--- a/public/chat_files/johnson_12slide_outbound_enterprise_deck.pptx
+++ b/public/chat_files/johnson_12slide_outbound_enterprise_deck.pptx
@@ -109,7 +109,7 @@
           <a:lstStyle/>
           <a:p>
             <a:r>
-              <a:rPr lang="en-US" sz="2800" b="1"/>
+              <a:rPr lang="en-US" sz="2400" b="1"/>
               <a:t>DockStream: Intelligent Cross-Dock Logistics</a:t>
             </a:r>
           </a:p>
@@ -135,16 +135,22 @@
           <a:bodyPr/>
           <a:lstStyle/>
           <a:p>
-            <a:pPr lvl="0"/>
-            <a:r>
-              <a:rPr lang="en-US" sz="1600"/>
+            <a:pPr lvl="0" marL="288000" indent="-288000">
+              <a:buFont typeface="Arial"/>
+              <a:buChar char="•"/>
+            </a:pPr>
+            <a:r>
+              <a:rPr lang="en-US" sz="1500"/>
               <a:t>Presented by Jack Johnson, Co-Founder</a:t>
             </a:r>
           </a:p>
           <a:p>
-            <a:pPr lvl="0"/>
-            <a:r>
-              <a:rPr lang="en-US" sz="1600"/>
+            <a:pPr lvl="0" marL="288000" indent="-288000">
+              <a:buFont typeface="Arial"/>
+              <a:buChar char="•"/>
+            </a:pPr>
+            <a:r>
+              <a:rPr lang="en-US" sz="1500"/>
               <a:t>Accelerating Mid-Market 3PL Dock Turn Times</a:t>
             </a:r>
           </a:p>
@@ -193,7 +199,7 @@
           <a:lstStyle/>
           <a:p>
             <a:r>
-              <a:rPr lang="en-US" sz="2800" b="1"/>
+              <a:rPr lang="en-US" sz="2400" b="1"/>
               <a:t>Pricing &amp; Licensing Tiers</a:t>
             </a:r>
           </a:p>
@@ -219,23 +225,32 @@
           <a:bodyPr/>
           <a:lstStyle/>
           <a:p>
-            <a:pPr lvl="0"/>
-            <a:r>
-              <a:rPr lang="en-US" sz="1600"/>
+            <a:pPr lvl="0" marL="288000" indent="-288000">
+              <a:buFont typeface="Arial"/>
+              <a:buChar char="•"/>
+            </a:pPr>
+            <a:r>
+              <a:rPr lang="en-US" sz="1500"/>
               <a:t>Standard Hub: $1,250/month per terminal (up to 20 bays)</a:t>
             </a:r>
           </a:p>
           <a:p>
-            <a:pPr lvl="0"/>
-            <a:r>
-              <a:rPr lang="en-US" sz="1600"/>
+            <a:pPr lvl="0" marL="288000" indent="-288000">
+              <a:buFont typeface="Arial"/>
+              <a:buChar char="•"/>
+            </a:pPr>
+            <a:r>
+              <a:rPr lang="en-US" sz="1500"/>
               <a:t>Enterprise Fleet: $2,800/month with unlimited bays and dedicated SLA</a:t>
             </a:r>
           </a:p>
           <a:p>
-            <a:pPr lvl="0"/>
-            <a:r>
-              <a:rPr lang="en-US" sz="1600"/>
+            <a:pPr lvl="0" marL="288000" indent="-288000">
+              <a:buFont typeface="Arial"/>
+              <a:buChar char="•"/>
+            </a:pPr>
+            <a:r>
+              <a:rPr lang="en-US" sz="1500"/>
               <a:t>Volume discounts available for multi-facility operations</a:t>
             </a:r>
           </a:p>
@@ -284,7 +299,7 @@
           <a:lstStyle/>
           <a:p>
             <a:r>
-              <a:rPr lang="en-US" sz="2800" b="1"/>
+              <a:rPr lang="en-US" sz="2400" b="1"/>
               <a:t>Customer ROI Payback Model</a:t>
             </a:r>
           </a:p>
@@ -310,23 +325,32 @@
           <a:bodyPr/>
           <a:lstStyle/>
           <a:p>
-            <a:pPr lvl="0"/>
-            <a:r>
-              <a:rPr lang="en-US" sz="1600"/>
+            <a:pPr lvl="0" marL="288000" indent="-288000">
+              <a:buFont typeface="Arial"/>
+              <a:buChar char="•"/>
+            </a:pPr>
+            <a:r>
+              <a:rPr lang="en-US" sz="1500"/>
               <a:t>Average terminal saves $14,800/month in prevented detention fees</a:t>
             </a:r>
           </a:p>
           <a:p>
-            <a:pPr lvl="0"/>
-            <a:r>
-              <a:rPr lang="en-US" sz="1600"/>
+            <a:pPr lvl="0" marL="288000" indent="-288000">
+              <a:buFont typeface="Arial"/>
+              <a:buChar char="•"/>
+            </a:pPr>
+            <a:r>
+              <a:rPr lang="en-US" sz="1500"/>
               <a:t>Labor efficiency yields additional $6,200/month in dispatcher bandwidth</a:t>
             </a:r>
           </a:p>
           <a:p>
-            <a:pPr lvl="0"/>
-            <a:r>
-              <a:rPr lang="en-US" sz="1600"/>
+            <a:pPr lvl="0" marL="288000" indent="-288000">
+              <a:buFont typeface="Arial"/>
+              <a:buChar char="•"/>
+            </a:pPr>
+            <a:r>
+              <a:rPr lang="en-US" sz="1500"/>
               <a:t>Net ROI payback achieved in 21 days from facility go-live</a:t>
             </a:r>
           </a:p>
@@ -375,7 +399,7 @@
           <a:lstStyle/>
           <a:p>
             <a:r>
-              <a:rPr lang="en-US" sz="2800" b="1"/>
+              <a:rPr lang="en-US" sz="2400" b="1"/>
               <a:t>Next Steps: Schedule Your Dockyard Scoping Call</a:t>
             </a:r>
           </a:p>
@@ -401,16 +425,22 @@
           <a:bodyPr/>
           <a:lstStyle/>
           <a:p>
-            <a:pPr lvl="0"/>
-            <a:r>
-              <a:rPr lang="en-US" sz="1600"/>
+            <a:pPr lvl="0" marL="288000" indent="-288000">
+              <a:buFont typeface="Arial"/>
+              <a:buChar char="•"/>
+            </a:pPr>
+            <a:r>
+              <a:rPr lang="en-US" sz="1500"/>
               <a:t>Visit www.dockstream.io/schedule</a:t>
             </a:r>
           </a:p>
           <a:p>
-            <a:pPr lvl="0"/>
-            <a:r>
-              <a:rPr lang="en-US" sz="1600"/>
+            <a:pPr lvl="0" marL="288000" indent="-288000">
+              <a:buFont typeface="Arial"/>
+              <a:buChar char="•"/>
+            </a:pPr>
+            <a:r>
+              <a:rPr lang="en-US" sz="1500"/>
               <a:t>Direct contact: Jack Johnson (jack@dockstream.io)</a:t>
             </a:r>
           </a:p>
@@ -459,7 +489,7 @@
           <a:lstStyle/>
           <a:p>
             <a:r>
-              <a:rPr lang="en-US" sz="2800" b="1"/>
+              <a:rPr lang="en-US" sz="2400" b="1"/>
               <a:t>The Hidden Cost of Dock Congestion</a:t>
             </a:r>
           </a:p>
@@ -485,23 +515,32 @@
           <a:bodyPr/>
           <a:lstStyle/>
           <a:p>
-            <a:pPr lvl="0"/>
-            <a:r>
-              <a:rPr lang="en-US" sz="1600"/>
+            <a:pPr lvl="0" marL="288000" indent="-288000">
+              <a:buFont typeface="Arial"/>
+              <a:buChar char="•"/>
+            </a:pPr>
+            <a:r>
+              <a:rPr lang="en-US" sz="1500"/>
               <a:t>Midwest carriers report 14 hours per week lost waiting on paperwork</a:t>
             </a:r>
           </a:p>
           <a:p>
-            <a:pPr lvl="0"/>
-            <a:r>
-              <a:rPr lang="en-US" sz="1600"/>
+            <a:pPr lvl="0" marL="288000" indent="-288000">
+              <a:buFont typeface="Arial"/>
+              <a:buChar char="•"/>
+            </a:pPr>
+            <a:r>
+              <a:rPr lang="en-US" sz="1500"/>
               <a:t>Detention fees cost average distribution hubs $180,000 annually</a:t>
             </a:r>
           </a:p>
           <a:p>
-            <a:pPr lvl="0"/>
-            <a:r>
-              <a:rPr lang="en-US" sz="1600"/>
+            <a:pPr lvl="0" marL="288000" indent="-288000">
+              <a:buFont typeface="Arial"/>
+              <a:buChar char="•"/>
+            </a:pPr>
+            <a:r>
+              <a:rPr lang="en-US" sz="1500"/>
               <a:t>Fragmented driver texts and phone calls create dockyard gridlock</a:t>
             </a:r>
           </a:p>
@@ -550,7 +589,7 @@
           <a:lstStyle/>
           <a:p>
             <a:r>
-              <a:rPr lang="en-US" sz="2800" b="1"/>
+              <a:rPr lang="en-US" sz="2400" b="1"/>
               <a:t>The DockStream Platform</a:t>
             </a:r>
           </a:p>
@@ -576,23 +615,32 @@
           <a:bodyPr/>
           <a:lstStyle/>
           <a:p>
-            <a:pPr lvl="0"/>
-            <a:r>
-              <a:rPr lang="en-US" sz="1600"/>
+            <a:pPr lvl="0" marL="288000" indent="-288000">
+              <a:buFont typeface="Arial"/>
+              <a:buChar char="•"/>
+            </a:pPr>
+            <a:r>
+              <a:rPr lang="en-US" sz="1500"/>
               <a:t>Automated driver check-in via mobile geofence</a:t>
             </a:r>
           </a:p>
           <a:p>
-            <a:pPr lvl="0"/>
-            <a:r>
-              <a:rPr lang="en-US" sz="1600"/>
+            <a:pPr lvl="0" marL="288000" indent="-288000">
+              <a:buFont typeface="Arial"/>
+              <a:buChar char="•"/>
+            </a:pPr>
+            <a:r>
+              <a:rPr lang="en-US" sz="1500"/>
               <a:t>Dynamic dock door assignment based on pallet count and liftgate need</a:t>
             </a:r>
           </a:p>
           <a:p>
-            <a:pPr lvl="0"/>
-            <a:r>
-              <a:rPr lang="en-US" sz="1600"/>
+            <a:pPr lvl="0" marL="288000" indent="-288000">
+              <a:buFont typeface="Arial"/>
+              <a:buChar char="•"/>
+            </a:pPr>
+            <a:r>
+              <a:rPr lang="en-US" sz="1500"/>
               <a:t>Instant electronic BOL generation and ERP sync</a:t>
             </a:r>
           </a:p>
@@ -641,7 +689,7 @@
           <a:lstStyle/>
           <a:p>
             <a:r>
-              <a:rPr lang="en-US" sz="2800" b="1"/>
+              <a:rPr lang="en-US" sz="2400" b="1"/>
               <a:t>Case Study: Midwest 3PL Pilot Results</a:t>
             </a:r>
           </a:p>
@@ -667,23 +715,32 @@
           <a:bodyPr/>
           <a:lstStyle/>
           <a:p>
-            <a:pPr lvl="0"/>
-            <a:r>
-              <a:rPr lang="en-US" sz="1600"/>
+            <a:pPr lvl="0" marL="288000" indent="-288000">
+              <a:buFont typeface="Arial"/>
+              <a:buChar char="•"/>
+            </a:pPr>
+            <a:r>
+              <a:rPr lang="en-US" sz="1500"/>
               <a:t>38% reduction in average trailer turnaround time</a:t>
             </a:r>
           </a:p>
           <a:p>
-            <a:pPr lvl="0"/>
-            <a:r>
-              <a:rPr lang="en-US" sz="1600"/>
+            <a:pPr lvl="0" marL="288000" indent="-288000">
+              <a:buFont typeface="Arial"/>
+              <a:buChar char="•"/>
+            </a:pPr>
+            <a:r>
+              <a:rPr lang="en-US" sz="1500"/>
               <a:t>14 hours per week saved per dispatcher</a:t>
             </a:r>
           </a:p>
           <a:p>
-            <a:pPr lvl="0"/>
-            <a:r>
-              <a:rPr lang="en-US" sz="1600"/>
+            <a:pPr lvl="0" marL="288000" indent="-288000">
+              <a:buFont typeface="Arial"/>
+              <a:buChar char="•"/>
+            </a:pPr>
+            <a:r>
+              <a:rPr lang="en-US" sz="1500"/>
               <a:t>Zero lost paperwork across 18,000 consecutive pallet transfers</a:t>
             </a:r>
           </a:p>
@@ -732,7 +789,7 @@
           <a:lstStyle/>
           <a:p>
             <a:r>
-              <a:rPr lang="en-US" sz="2800" b="1"/>
+              <a:rPr lang="en-US" sz="2400" b="1"/>
               <a:t>Architecture &amp; Enterprise Security</a:t>
             </a:r>
           </a:p>
@@ -758,23 +815,32 @@
           <a:bodyPr/>
           <a:lstStyle/>
           <a:p>
-            <a:pPr lvl="0"/>
-            <a:r>
-              <a:rPr lang="en-US" sz="1600"/>
+            <a:pPr lvl="0" marL="288000" indent="-288000">
+              <a:buFont typeface="Arial"/>
+              <a:buChar char="•"/>
+            </a:pPr>
+            <a:r>
+              <a:rPr lang="en-US" sz="1500"/>
               <a:t>Cloud-native microservices with 99.99% uptime guarantee</a:t>
             </a:r>
           </a:p>
           <a:p>
-            <a:pPr lvl="0"/>
-            <a:r>
-              <a:rPr lang="en-US" sz="1600"/>
+            <a:pPr lvl="0" marL="288000" indent="-288000">
+              <a:buFont typeface="Arial"/>
+              <a:buChar char="•"/>
+            </a:pPr>
+            <a:r>
+              <a:rPr lang="en-US" sz="1500"/>
               <a:t>SOC2 Type II certified with end-to-end 256-bit AES encryption</a:t>
             </a:r>
           </a:p>
           <a:p>
-            <a:pPr lvl="0"/>
-            <a:r>
-              <a:rPr lang="en-US" sz="1600"/>
+            <a:pPr lvl="0" marL="288000" indent="-288000">
+              <a:buFont typeface="Arial"/>
+              <a:buChar char="•"/>
+            </a:pPr>
+            <a:r>
+              <a:rPr lang="en-US" sz="1500"/>
               <a:t>Native bi-directional API connectors for SAP, Oracle TMS, and Blue Yonder</a:t>
             </a:r>
           </a:p>
@@ -823,7 +889,7 @@
           <a:lstStyle/>
           <a:p>
             <a:r>
-              <a:rPr lang="en-US" sz="2800" b="1"/>
+              <a:rPr lang="en-US" sz="2400" b="1"/>
               <a:t>Driver Experience &amp; Mobile Simplicity</a:t>
             </a:r>
           </a:p>
@@ -849,23 +915,32 @@
           <a:bodyPr/>
           <a:lstStyle/>
           <a:p>
-            <a:pPr lvl="0"/>
-            <a:r>
-              <a:rPr lang="en-US" sz="1600"/>
+            <a:pPr lvl="0" marL="288000" indent="-288000">
+              <a:buFont typeface="Arial"/>
+              <a:buChar char="•"/>
+            </a:pPr>
+            <a:r>
+              <a:rPr lang="en-US" sz="1500"/>
               <a:t>Drivers check in via SMS link—no mobile app download required</a:t>
             </a:r>
           </a:p>
           <a:p>
-            <a:pPr lvl="0"/>
-            <a:r>
-              <a:rPr lang="en-US" sz="1600"/>
+            <a:pPr lvl="0" marL="288000" indent="-288000">
+              <a:buFont typeface="Arial"/>
+              <a:buChar char="•"/>
+            </a:pPr>
+            <a:r>
+              <a:rPr lang="en-US" sz="1500"/>
               <a:t>Multi-language support (English, Spanish, Polish)</a:t>
             </a:r>
           </a:p>
           <a:p>
-            <a:pPr lvl="0"/>
-            <a:r>
-              <a:rPr lang="en-US" sz="1600"/>
+            <a:pPr lvl="0" marL="288000" indent="-288000">
+              <a:buFont typeface="Arial"/>
+              <a:buChar char="•"/>
+            </a:pPr>
+            <a:r>
+              <a:rPr lang="en-US" sz="1500"/>
               <a:t>Digital bill of lading signed on glass in under 30 seconds</a:t>
             </a:r>
           </a:p>
@@ -914,7 +989,7 @@
           <a:lstStyle/>
           <a:p>
             <a:r>
-              <a:rPr lang="en-US" sz="2800" b="1"/>
+              <a:rPr lang="en-US" sz="2400" b="1"/>
               <a:t>Real-Time Facility Operations Dashboard</a:t>
             </a:r>
           </a:p>
@@ -940,23 +1015,32 @@
           <a:bodyPr/>
           <a:lstStyle/>
           <a:p>
-            <a:pPr lvl="0"/>
-            <a:r>
-              <a:rPr lang="en-US" sz="1600"/>
+            <a:pPr lvl="0" marL="288000" indent="-288000">
+              <a:buFont typeface="Arial"/>
+              <a:buChar char="•"/>
+            </a:pPr>
+            <a:r>
+              <a:rPr lang="en-US" sz="1500"/>
               <a:t>Bird's-eye view of all active loading bays</a:t>
             </a:r>
           </a:p>
           <a:p>
-            <a:pPr lvl="0"/>
-            <a:r>
-              <a:rPr lang="en-US" sz="1600"/>
+            <a:pPr lvl="0" marL="288000" indent="-288000">
+              <a:buFont typeface="Arial"/>
+              <a:buChar char="•"/>
+            </a:pPr>
+            <a:r>
+              <a:rPr lang="en-US" sz="1500"/>
               <a:t>Predictive demurrage alerts 45 minutes before detention penalties trigger</a:t>
             </a:r>
           </a:p>
           <a:p>
-            <a:pPr lvl="0"/>
-            <a:r>
-              <a:rPr lang="en-US" sz="1600"/>
+            <a:pPr lvl="0" marL="288000" indent="-288000">
+              <a:buFont typeface="Arial"/>
+              <a:buChar char="•"/>
+            </a:pPr>
+            <a:r>
+              <a:rPr lang="en-US" sz="1500"/>
               <a:t>Automated shift performance and throughput reports</a:t>
             </a:r>
           </a:p>
@@ -1005,7 +1089,7 @@
           <a:lstStyle/>
           <a:p>
             <a:r>
-              <a:rPr lang="en-US" sz="2800" b="1"/>
+              <a:rPr lang="en-US" sz="2400" b="1"/>
               <a:t>Customer Testimonial: Apex Cold Logistics</a:t>
             </a:r>
           </a:p>
@@ -1031,16 +1115,22 @@
           <a:bodyPr/>
           <a:lstStyle/>
           <a:p>
-            <a:pPr lvl="0"/>
-            <a:r>
-              <a:rPr lang="en-US" sz="1600"/>
+            <a:pPr lvl="0" marL="288000" indent="-288000">
+              <a:buFont typeface="Arial"/>
+              <a:buChar char="•"/>
+            </a:pPr>
+            <a:r>
+              <a:rPr lang="en-US" sz="1500"/>
               <a:t>'DockStream paid for itself in reduced detention claims in month one.'</a:t>
             </a:r>
           </a:p>
           <a:p>
-            <a:pPr lvl="0"/>
-            <a:r>
-              <a:rPr lang="en-US" sz="1600"/>
+            <a:pPr lvl="0" marL="288000" indent="-288000">
+              <a:buFont typeface="Arial"/>
+              <a:buChar char="•"/>
+            </a:pPr>
+            <a:r>
+              <a:rPr lang="en-US" sz="1500"/>
               <a:t>- Dave Henderson, Director of Terminal Operations</a:t>
             </a:r>
           </a:p>
@@ -1089,7 +1179,7 @@
           <a:lstStyle/>
           <a:p>
             <a:r>
-              <a:rPr lang="en-US" sz="2800" b="1"/>
+              <a:rPr lang="en-US" sz="2400" b="1"/>
               <a:t>Deployment Timeline: Live in 14 Days</a:t>
             </a:r>
           </a:p>
@@ -1115,23 +1205,32 @@
           <a:bodyPr/>
           <a:lstStyle/>
           <a:p>
-            <a:pPr lvl="0"/>
-            <a:r>
-              <a:rPr lang="en-US" sz="1600"/>
+            <a:pPr lvl="0" marL="288000" indent="-288000">
+              <a:buFont typeface="Arial"/>
+              <a:buChar char="•"/>
+            </a:pPr>
+            <a:r>
+              <a:rPr lang="en-US" sz="1500"/>
               <a:t>Week 1: ERP API credential exchange and dockyard mapping</a:t>
             </a:r>
           </a:p>
           <a:p>
-            <a:pPr lvl="0"/>
-            <a:r>
-              <a:rPr lang="en-US" sz="1600"/>
+            <a:pPr lvl="0" marL="288000" indent="-288000">
+              <a:buFont typeface="Arial"/>
+              <a:buChar char="•"/>
+            </a:pPr>
+            <a:r>
+              <a:rPr lang="en-US" sz="1500"/>
               <a:t>Week 2: Frontline dispatcher training and pilot bay rollout</a:t>
             </a:r>
           </a:p>
           <a:p>
-            <a:pPr lvl="0"/>
-            <a:r>
-              <a:rPr lang="en-US" sz="1600"/>
+            <a:pPr lvl="0" marL="288000" indent="-288000">
+              <a:buFont typeface="Arial"/>
+              <a:buChar char="•"/>
+            </a:pPr>
+            <a:r>
+              <a:rPr lang="en-US" sz="1500"/>
               <a:t>Day 15: Full facility activation with dedicated implementation engineer</a:t>
             </a:r>
           </a:p>

--- a/public/chat_files/johnson_12slide_outbound_enterprise_deck.pptx
+++ b/public/chat_files/johnson_12slide_outbound_enterprise_deck.pptx
@@ -10,6 +10,13 @@
     <p:sldId id="258" r:id="rId9"/>
     <p:sldId id="259" r:id="rId10"/>
     <p:sldId id="260" r:id="rId11"/>
+    <p:sldId id="261" r:id="rId12"/>
+    <p:sldId id="262" r:id="rId13"/>
+    <p:sldId id="263" r:id="rId14"/>
+    <p:sldId id="264" r:id="rId15"/>
+    <p:sldId id="265" r:id="rId16"/>
+    <p:sldId id="266" r:id="rId17"/>
+    <p:sldId id="267" r:id="rId18"/>
   </p:sldIdLst>
   <p:sldSz cx="12191695" cy="6858000" type="screen4x3"/>
   <p:notesSz cx="6858000" cy="9144000"/>
@@ -3169,7 +3176,7 @@
               </a:defRPr>
             </a:pPr>
             <a:r>
-              <a:t>ENTERPRISE CAPABILITY BRIEFING · 2026</a:t>
+              <a:t>CONFIDENTIAL &amp; PROPRIETARY</a:t>
             </a:r>
           </a:p>
           <a:p>
@@ -3191,17 +3198,17 @@
           <a:p>
             <a:pPr>
               <a:spcAft>
-                <a:spcPts val="2400"/>
+                <a:spcPts val="600"/>
               </a:spcAft>
-              <a:defRPr sz="1600">
-                <a:solidFill>
-                  <a:srgbClr val="CBD5E1"/>
-                </a:solidFill>
-                <a:latin typeface="Calibri"/>
-              </a:defRPr>
-            </a:pPr>
-            <a:r>
-              <a:t>Presented by Jack Johnson, Co-Founder · Eliminating Terminal Gridlock &amp; Detention Penalties</a:t>
+              <a:defRPr sz="1300">
+                <a:solidFill>
+                  <a:srgbClr val="94A3B8"/>
+                </a:solidFill>
+                <a:latin typeface="Calibri"/>
+              </a:defRPr>
+            </a:pPr>
+            <a:r>
+              <a:t>Presented by Jack Johnson, Co-Founder</a:t>
             </a:r>
           </a:p>
           <a:p>
@@ -3217,15 +3224,271 @@
               </a:defRPr>
             </a:pPr>
             <a:r>
-              <a:t>Purpose-Built for Mid-Market 3PL Distribution Facilities &amp; Freight Carriers</a:t>
-            </a:r>
-          </a:p>
+              <a:t>Accelerating Mid-Market 3PL Dock Turn Times</a:t>
+            </a:r>
+          </a:p>
+        </p:txBody>
+      </p:sp>
+    </p:spTree>
+  </p:cSld>
+  <p:clrMapOvr>
+    <a:masterClrMapping/>
+  </p:clrMapOvr>
+</p:sld>
+</file>
+
+<file path=ppt/slides/slide10.xml><?xml version="1.0" encoding="utf-8"?>
+<p:sld xmlns:a="http://schemas.openxmlformats.org/drawingml/2006/main" xmlns:p="http://schemas.openxmlformats.org/presentationml/2006/main" xmlns:r="http://schemas.openxmlformats.org/officeDocument/2006/relationships">
+  <p:cSld>
+    <p:spTree>
+      <p:nvGrpSpPr>
+        <p:cNvPr id="1" name=""/>
+        <p:cNvGrpSpPr/>
+        <p:nvPr/>
+      </p:nvGrpSpPr>
+      <p:grpSpPr/>
+      <p:sp>
+        <p:nvSpPr>
+          <p:cNvPr id="2" name="Rectangle 1"/>
+          <p:cNvSpPr/>
+          <p:nvPr/>
+        </p:nvSpPr>
+        <p:spPr>
+          <a:xfrm>
+            <a:off x="0" y="0"/>
+            <a:ext cx="12191695" cy="6858000"/>
+          </a:xfrm>
+          <a:prstGeom prst="rect">
+            <a:avLst/>
+          </a:prstGeom>
+          <a:solidFill>
+            <a:srgbClr val="FFFFFF"/>
+          </a:solidFill>
+          <a:ln>
+            <a:noFill/>
+          </a:ln>
+        </p:spPr>
+        <p:style>
+          <a:lnRef idx="1">
+            <a:schemeClr val="accent1"/>
+          </a:lnRef>
+          <a:fillRef idx="3">
+            <a:schemeClr val="accent1"/>
+          </a:fillRef>
+          <a:effectRef idx="2">
+            <a:schemeClr val="accent1"/>
+          </a:effectRef>
+          <a:fontRef idx="minor">
+            <a:schemeClr val="lt1"/>
+          </a:fontRef>
+        </p:style>
+        <p:txBody>
+          <a:bodyPr rtlCol="0" anchor="ctr"/>
+          <a:lstStyle/>
+          <a:p>
+            <a:pPr algn="ctr"/>
+          </a:p>
+        </p:txBody>
+      </p:sp>
+      <p:sp>
+        <p:nvSpPr>
+          <p:cNvPr id="3" name="TextBox 2"/>
+          <p:cNvSpPr txBox="1"/>
+          <p:nvPr/>
+        </p:nvSpPr>
+        <p:spPr>
+          <a:xfrm>
+            <a:off x="731520" y="548640"/>
+            <a:ext cx="10698480" cy="1188720"/>
+          </a:xfrm>
+          <a:prstGeom prst="rect">
+            <a:avLst/>
+          </a:prstGeom>
+          <a:noFill/>
+        </p:spPr>
+        <p:txBody>
+          <a:bodyPr wrap="square">
+            <a:spAutoFit/>
+          </a:bodyPr>
+          <a:lstStyle/>
           <a:p>
             <a:pPr>
               <a:spcAft>
-                <a:spcPts val="600"/>
+                <a:spcPts val="400"/>
               </a:spcAft>
-              <a:defRPr sz="1300">
+              <a:defRPr sz="1000" b="1">
+                <a:solidFill>
+                  <a:srgbClr val="2563EB"/>
+                </a:solidFill>
+                <a:latin typeface="Calibri"/>
+              </a:defRPr>
+            </a:pPr>
+            <a:r>
+              <a:t>ENTERPRISE LOGISTICS AUTOMATION DECK — JACK JOHNSO</a:t>
+            </a:r>
+          </a:p>
+          <a:p>
+            <a:pPr>
+              <a:defRPr sz="2200" b="1">
+                <a:solidFill>
+                  <a:srgbClr val="0F172A"/>
+                </a:solidFill>
+                <a:latin typeface="Calibri"/>
+              </a:defRPr>
+            </a:pPr>
+            <a:r>
+              <a:t>Pricing &amp; Licensing Tiers</a:t>
+            </a:r>
+          </a:p>
+        </p:txBody>
+      </p:sp>
+      <p:sp>
+        <p:nvSpPr>
+          <p:cNvPr id="4" name="Rectangle 3"/>
+          <p:cNvSpPr/>
+          <p:nvPr/>
+        </p:nvSpPr>
+        <p:spPr>
+          <a:xfrm>
+            <a:off x="731520" y="1737360"/>
+            <a:ext cx="10698480" cy="13716"/>
+          </a:xfrm>
+          <a:prstGeom prst="rect">
+            <a:avLst/>
+          </a:prstGeom>
+          <a:solidFill>
+            <a:srgbClr val="E2E8F0"/>
+          </a:solidFill>
+          <a:ln>
+            <a:noFill/>
+          </a:ln>
+        </p:spPr>
+        <p:style>
+          <a:lnRef idx="1">
+            <a:schemeClr val="accent1"/>
+          </a:lnRef>
+          <a:fillRef idx="3">
+            <a:schemeClr val="accent1"/>
+          </a:fillRef>
+          <a:effectRef idx="2">
+            <a:schemeClr val="accent1"/>
+          </a:effectRef>
+          <a:fontRef idx="minor">
+            <a:schemeClr val="lt1"/>
+          </a:fontRef>
+        </p:style>
+        <p:txBody>
+          <a:bodyPr rtlCol="0" anchor="ctr"/>
+          <a:lstStyle/>
+          <a:p>
+            <a:pPr algn="ctr"/>
+          </a:p>
+        </p:txBody>
+      </p:sp>
+      <p:sp>
+        <p:nvSpPr>
+          <p:cNvPr id="5" name="TextBox 4"/>
+          <p:cNvSpPr txBox="1"/>
+          <p:nvPr/>
+        </p:nvSpPr>
+        <p:spPr>
+          <a:xfrm>
+            <a:off x="731520" y="2011680"/>
+            <a:ext cx="10698480" cy="4114800"/>
+          </a:xfrm>
+          <a:prstGeom prst="rect">
+            <a:avLst/>
+          </a:prstGeom>
+          <a:noFill/>
+        </p:spPr>
+        <p:txBody>
+          <a:bodyPr wrap="square">
+            <a:spAutoFit/>
+          </a:bodyPr>
+          <a:lstStyle/>
+          <a:p>
+            <a:pPr>
+              <a:lnSpc>
+                <a:spcPct val="125000"/>
+              </a:lnSpc>
+              <a:spcAft>
+                <a:spcPts val="1400"/>
+              </a:spcAft>
+              <a:defRPr sz="1500">
+                <a:solidFill>
+                  <a:srgbClr val="1E293B"/>
+                </a:solidFill>
+                <a:latin typeface="Calibri"/>
+              </a:defRPr>
+            </a:pPr>
+            <a:r>
+              <a:t>•  Standard Hub: $1,250/month per terminal (up to 20 bays)</a:t>
+            </a:r>
+          </a:p>
+          <a:p>
+            <a:pPr>
+              <a:lnSpc>
+                <a:spcPct val="125000"/>
+              </a:lnSpc>
+              <a:spcAft>
+                <a:spcPts val="1400"/>
+              </a:spcAft>
+              <a:defRPr sz="1500">
+                <a:solidFill>
+                  <a:srgbClr val="1E293B"/>
+                </a:solidFill>
+                <a:latin typeface="Calibri"/>
+              </a:defRPr>
+            </a:pPr>
+            <a:r>
+              <a:t>•  Enterprise Fleet: $2,800/month with unlimited bays and dedicated SLA</a:t>
+            </a:r>
+          </a:p>
+          <a:p>
+            <a:pPr>
+              <a:lnSpc>
+                <a:spcPct val="125000"/>
+              </a:lnSpc>
+              <a:spcAft>
+                <a:spcPts val="1400"/>
+              </a:spcAft>
+              <a:defRPr sz="1500">
+                <a:solidFill>
+                  <a:srgbClr val="1E293B"/>
+                </a:solidFill>
+                <a:latin typeface="Calibri"/>
+              </a:defRPr>
+            </a:pPr>
+            <a:r>
+              <a:t>•  Volume discounts available for multi-facility operations</a:t>
+            </a:r>
+          </a:p>
+        </p:txBody>
+      </p:sp>
+      <p:sp>
+        <p:nvSpPr>
+          <p:cNvPr id="6" name="TextBox 5"/>
+          <p:cNvSpPr txBox="1"/>
+          <p:nvPr/>
+        </p:nvSpPr>
+        <p:spPr>
+          <a:xfrm>
+            <a:off x="731520" y="6309360"/>
+            <a:ext cx="10698480" cy="365760"/>
+          </a:xfrm>
+          <a:prstGeom prst="rect">
+            <a:avLst/>
+          </a:prstGeom>
+          <a:noFill/>
+        </p:spPr>
+        <p:txBody>
+          <a:bodyPr wrap="none">
+            <a:spAutoFit/>
+          </a:bodyPr>
+          <a:lstStyle/>
+          <a:p>
+            <a:pPr>
+              <a:defRPr sz="900">
                 <a:solidFill>
                   <a:srgbClr val="94A3B8"/>
                 </a:solidFill>
@@ -3233,7 +3496,532 @@
               </a:defRPr>
             </a:pPr>
             <a:r>
-              <a:t>38% Turnaround Acceleration · 100% Digital Electronic BOL Compliance</a:t>
+              <a:t>Enterprise Logistics Automation Deck — Jack Johnson (12 Slides) · Slide 10 of 12</a:t>
+            </a:r>
+          </a:p>
+        </p:txBody>
+      </p:sp>
+    </p:spTree>
+  </p:cSld>
+  <p:clrMapOvr>
+    <a:masterClrMapping/>
+  </p:clrMapOvr>
+</p:sld>
+</file>
+
+<file path=ppt/slides/slide11.xml><?xml version="1.0" encoding="utf-8"?>
+<p:sld xmlns:a="http://schemas.openxmlformats.org/drawingml/2006/main" xmlns:p="http://schemas.openxmlformats.org/presentationml/2006/main" xmlns:r="http://schemas.openxmlformats.org/officeDocument/2006/relationships">
+  <p:cSld>
+    <p:spTree>
+      <p:nvGrpSpPr>
+        <p:cNvPr id="1" name=""/>
+        <p:cNvGrpSpPr/>
+        <p:nvPr/>
+      </p:nvGrpSpPr>
+      <p:grpSpPr/>
+      <p:sp>
+        <p:nvSpPr>
+          <p:cNvPr id="2" name="Rectangle 1"/>
+          <p:cNvSpPr/>
+          <p:nvPr/>
+        </p:nvSpPr>
+        <p:spPr>
+          <a:xfrm>
+            <a:off x="0" y="0"/>
+            <a:ext cx="12191695" cy="6858000"/>
+          </a:xfrm>
+          <a:prstGeom prst="rect">
+            <a:avLst/>
+          </a:prstGeom>
+          <a:solidFill>
+            <a:srgbClr val="FFFFFF"/>
+          </a:solidFill>
+          <a:ln>
+            <a:noFill/>
+          </a:ln>
+        </p:spPr>
+        <p:style>
+          <a:lnRef idx="1">
+            <a:schemeClr val="accent1"/>
+          </a:lnRef>
+          <a:fillRef idx="3">
+            <a:schemeClr val="accent1"/>
+          </a:fillRef>
+          <a:effectRef idx="2">
+            <a:schemeClr val="accent1"/>
+          </a:effectRef>
+          <a:fontRef idx="minor">
+            <a:schemeClr val="lt1"/>
+          </a:fontRef>
+        </p:style>
+        <p:txBody>
+          <a:bodyPr rtlCol="0" anchor="ctr"/>
+          <a:lstStyle/>
+          <a:p>
+            <a:pPr algn="ctr"/>
+          </a:p>
+        </p:txBody>
+      </p:sp>
+      <p:sp>
+        <p:nvSpPr>
+          <p:cNvPr id="3" name="TextBox 2"/>
+          <p:cNvSpPr txBox="1"/>
+          <p:nvPr/>
+        </p:nvSpPr>
+        <p:spPr>
+          <a:xfrm>
+            <a:off x="731520" y="548640"/>
+            <a:ext cx="10698480" cy="1188720"/>
+          </a:xfrm>
+          <a:prstGeom prst="rect">
+            <a:avLst/>
+          </a:prstGeom>
+          <a:noFill/>
+        </p:spPr>
+        <p:txBody>
+          <a:bodyPr wrap="square">
+            <a:spAutoFit/>
+          </a:bodyPr>
+          <a:lstStyle/>
+          <a:p>
+            <a:pPr>
+              <a:spcAft>
+                <a:spcPts val="400"/>
+              </a:spcAft>
+              <a:defRPr sz="1000" b="1">
+                <a:solidFill>
+                  <a:srgbClr val="2563EB"/>
+                </a:solidFill>
+                <a:latin typeface="Calibri"/>
+              </a:defRPr>
+            </a:pPr>
+            <a:r>
+              <a:t>ENTERPRISE LOGISTICS AUTOMATION DECK — JACK JOHNSO</a:t>
+            </a:r>
+          </a:p>
+          <a:p>
+            <a:pPr>
+              <a:defRPr sz="2200" b="1">
+                <a:solidFill>
+                  <a:srgbClr val="0F172A"/>
+                </a:solidFill>
+                <a:latin typeface="Calibri"/>
+              </a:defRPr>
+            </a:pPr>
+            <a:r>
+              <a:t>Customer ROI Payback Model</a:t>
+            </a:r>
+          </a:p>
+        </p:txBody>
+      </p:sp>
+      <p:sp>
+        <p:nvSpPr>
+          <p:cNvPr id="4" name="Rectangle 3"/>
+          <p:cNvSpPr/>
+          <p:nvPr/>
+        </p:nvSpPr>
+        <p:spPr>
+          <a:xfrm>
+            <a:off x="731520" y="1737360"/>
+            <a:ext cx="10698480" cy="13716"/>
+          </a:xfrm>
+          <a:prstGeom prst="rect">
+            <a:avLst/>
+          </a:prstGeom>
+          <a:solidFill>
+            <a:srgbClr val="E2E8F0"/>
+          </a:solidFill>
+          <a:ln>
+            <a:noFill/>
+          </a:ln>
+        </p:spPr>
+        <p:style>
+          <a:lnRef idx="1">
+            <a:schemeClr val="accent1"/>
+          </a:lnRef>
+          <a:fillRef idx="3">
+            <a:schemeClr val="accent1"/>
+          </a:fillRef>
+          <a:effectRef idx="2">
+            <a:schemeClr val="accent1"/>
+          </a:effectRef>
+          <a:fontRef idx="minor">
+            <a:schemeClr val="lt1"/>
+          </a:fontRef>
+        </p:style>
+        <p:txBody>
+          <a:bodyPr rtlCol="0" anchor="ctr"/>
+          <a:lstStyle/>
+          <a:p>
+            <a:pPr algn="ctr"/>
+          </a:p>
+        </p:txBody>
+      </p:sp>
+      <p:sp>
+        <p:nvSpPr>
+          <p:cNvPr id="5" name="TextBox 4"/>
+          <p:cNvSpPr txBox="1"/>
+          <p:nvPr/>
+        </p:nvSpPr>
+        <p:spPr>
+          <a:xfrm>
+            <a:off x="731520" y="2011680"/>
+            <a:ext cx="10698480" cy="4114800"/>
+          </a:xfrm>
+          <a:prstGeom prst="rect">
+            <a:avLst/>
+          </a:prstGeom>
+          <a:noFill/>
+        </p:spPr>
+        <p:txBody>
+          <a:bodyPr wrap="square">
+            <a:spAutoFit/>
+          </a:bodyPr>
+          <a:lstStyle/>
+          <a:p>
+            <a:pPr>
+              <a:lnSpc>
+                <a:spcPct val="125000"/>
+              </a:lnSpc>
+              <a:spcAft>
+                <a:spcPts val="1400"/>
+              </a:spcAft>
+              <a:defRPr sz="1500">
+                <a:solidFill>
+                  <a:srgbClr val="1E293B"/>
+                </a:solidFill>
+                <a:latin typeface="Calibri"/>
+              </a:defRPr>
+            </a:pPr>
+            <a:r>
+              <a:t>•  Average terminal saves $14,800/month in prevented detention fees</a:t>
+            </a:r>
+          </a:p>
+          <a:p>
+            <a:pPr>
+              <a:lnSpc>
+                <a:spcPct val="125000"/>
+              </a:lnSpc>
+              <a:spcAft>
+                <a:spcPts val="1400"/>
+              </a:spcAft>
+              <a:defRPr sz="1500">
+                <a:solidFill>
+                  <a:srgbClr val="1E293B"/>
+                </a:solidFill>
+                <a:latin typeface="Calibri"/>
+              </a:defRPr>
+            </a:pPr>
+            <a:r>
+              <a:t>•  Labor efficiency yields additional $6,200/month in dispatcher bandwidth</a:t>
+            </a:r>
+          </a:p>
+          <a:p>
+            <a:pPr>
+              <a:lnSpc>
+                <a:spcPct val="125000"/>
+              </a:lnSpc>
+              <a:spcAft>
+                <a:spcPts val="1400"/>
+              </a:spcAft>
+              <a:defRPr sz="1500">
+                <a:solidFill>
+                  <a:srgbClr val="1E293B"/>
+                </a:solidFill>
+                <a:latin typeface="Calibri"/>
+              </a:defRPr>
+            </a:pPr>
+            <a:r>
+              <a:t>•  Net ROI payback achieved in 21 days from facility go-live</a:t>
+            </a:r>
+          </a:p>
+        </p:txBody>
+      </p:sp>
+      <p:sp>
+        <p:nvSpPr>
+          <p:cNvPr id="6" name="TextBox 5"/>
+          <p:cNvSpPr txBox="1"/>
+          <p:nvPr/>
+        </p:nvSpPr>
+        <p:spPr>
+          <a:xfrm>
+            <a:off x="731520" y="6309360"/>
+            <a:ext cx="10698480" cy="365760"/>
+          </a:xfrm>
+          <a:prstGeom prst="rect">
+            <a:avLst/>
+          </a:prstGeom>
+          <a:noFill/>
+        </p:spPr>
+        <p:txBody>
+          <a:bodyPr wrap="none">
+            <a:spAutoFit/>
+          </a:bodyPr>
+          <a:lstStyle/>
+          <a:p>
+            <a:pPr>
+              <a:defRPr sz="900">
+                <a:solidFill>
+                  <a:srgbClr val="94A3B8"/>
+                </a:solidFill>
+                <a:latin typeface="Calibri"/>
+              </a:defRPr>
+            </a:pPr>
+            <a:r>
+              <a:t>Enterprise Logistics Automation Deck — Jack Johnson (12 Slides) · Slide 11 of 12</a:t>
+            </a:r>
+          </a:p>
+        </p:txBody>
+      </p:sp>
+    </p:spTree>
+  </p:cSld>
+  <p:clrMapOvr>
+    <a:masterClrMapping/>
+  </p:clrMapOvr>
+</p:sld>
+</file>
+
+<file path=ppt/slides/slide12.xml><?xml version="1.0" encoding="utf-8"?>
+<p:sld xmlns:a="http://schemas.openxmlformats.org/drawingml/2006/main" xmlns:p="http://schemas.openxmlformats.org/presentationml/2006/main" xmlns:r="http://schemas.openxmlformats.org/officeDocument/2006/relationships">
+  <p:cSld>
+    <p:spTree>
+      <p:nvGrpSpPr>
+        <p:cNvPr id="1" name=""/>
+        <p:cNvGrpSpPr/>
+        <p:nvPr/>
+      </p:nvGrpSpPr>
+      <p:grpSpPr/>
+      <p:sp>
+        <p:nvSpPr>
+          <p:cNvPr id="2" name="Rectangle 1"/>
+          <p:cNvSpPr/>
+          <p:nvPr/>
+        </p:nvSpPr>
+        <p:spPr>
+          <a:xfrm>
+            <a:off x="0" y="0"/>
+            <a:ext cx="12191695" cy="6858000"/>
+          </a:xfrm>
+          <a:prstGeom prst="rect">
+            <a:avLst/>
+          </a:prstGeom>
+          <a:solidFill>
+            <a:srgbClr val="FFFFFF"/>
+          </a:solidFill>
+          <a:ln>
+            <a:noFill/>
+          </a:ln>
+        </p:spPr>
+        <p:style>
+          <a:lnRef idx="1">
+            <a:schemeClr val="accent1"/>
+          </a:lnRef>
+          <a:fillRef idx="3">
+            <a:schemeClr val="accent1"/>
+          </a:fillRef>
+          <a:effectRef idx="2">
+            <a:schemeClr val="accent1"/>
+          </a:effectRef>
+          <a:fontRef idx="minor">
+            <a:schemeClr val="lt1"/>
+          </a:fontRef>
+        </p:style>
+        <p:txBody>
+          <a:bodyPr rtlCol="0" anchor="ctr"/>
+          <a:lstStyle/>
+          <a:p>
+            <a:pPr algn="ctr"/>
+          </a:p>
+        </p:txBody>
+      </p:sp>
+      <p:sp>
+        <p:nvSpPr>
+          <p:cNvPr id="3" name="TextBox 2"/>
+          <p:cNvSpPr txBox="1"/>
+          <p:nvPr/>
+        </p:nvSpPr>
+        <p:spPr>
+          <a:xfrm>
+            <a:off x="731520" y="548640"/>
+            <a:ext cx="10698480" cy="1188720"/>
+          </a:xfrm>
+          <a:prstGeom prst="rect">
+            <a:avLst/>
+          </a:prstGeom>
+          <a:noFill/>
+        </p:spPr>
+        <p:txBody>
+          <a:bodyPr wrap="square">
+            <a:spAutoFit/>
+          </a:bodyPr>
+          <a:lstStyle/>
+          <a:p>
+            <a:pPr>
+              <a:spcAft>
+                <a:spcPts val="400"/>
+              </a:spcAft>
+              <a:defRPr sz="1000" b="1">
+                <a:solidFill>
+                  <a:srgbClr val="2563EB"/>
+                </a:solidFill>
+                <a:latin typeface="Calibri"/>
+              </a:defRPr>
+            </a:pPr>
+            <a:r>
+              <a:t>ENTERPRISE LOGISTICS AUTOMATION DECK — JACK JOHNSO</a:t>
+            </a:r>
+          </a:p>
+          <a:p>
+            <a:pPr>
+              <a:defRPr sz="2200" b="1">
+                <a:solidFill>
+                  <a:srgbClr val="0F172A"/>
+                </a:solidFill>
+                <a:latin typeface="Calibri"/>
+              </a:defRPr>
+            </a:pPr>
+            <a:r>
+              <a:t>Next Steps: Schedule Your Dockyard Scoping Call</a:t>
+            </a:r>
+          </a:p>
+        </p:txBody>
+      </p:sp>
+      <p:sp>
+        <p:nvSpPr>
+          <p:cNvPr id="4" name="Rectangle 3"/>
+          <p:cNvSpPr/>
+          <p:nvPr/>
+        </p:nvSpPr>
+        <p:spPr>
+          <a:xfrm>
+            <a:off x="731520" y="1737360"/>
+            <a:ext cx="10698480" cy="13716"/>
+          </a:xfrm>
+          <a:prstGeom prst="rect">
+            <a:avLst/>
+          </a:prstGeom>
+          <a:solidFill>
+            <a:srgbClr val="E2E8F0"/>
+          </a:solidFill>
+          <a:ln>
+            <a:noFill/>
+          </a:ln>
+        </p:spPr>
+        <p:style>
+          <a:lnRef idx="1">
+            <a:schemeClr val="accent1"/>
+          </a:lnRef>
+          <a:fillRef idx="3">
+            <a:schemeClr val="accent1"/>
+          </a:fillRef>
+          <a:effectRef idx="2">
+            <a:schemeClr val="accent1"/>
+          </a:effectRef>
+          <a:fontRef idx="minor">
+            <a:schemeClr val="lt1"/>
+          </a:fontRef>
+        </p:style>
+        <p:txBody>
+          <a:bodyPr rtlCol="0" anchor="ctr"/>
+          <a:lstStyle/>
+          <a:p>
+            <a:pPr algn="ctr"/>
+          </a:p>
+        </p:txBody>
+      </p:sp>
+      <p:sp>
+        <p:nvSpPr>
+          <p:cNvPr id="5" name="TextBox 4"/>
+          <p:cNvSpPr txBox="1"/>
+          <p:nvPr/>
+        </p:nvSpPr>
+        <p:spPr>
+          <a:xfrm>
+            <a:off x="731520" y="2011680"/>
+            <a:ext cx="10698480" cy="4114800"/>
+          </a:xfrm>
+          <a:prstGeom prst="rect">
+            <a:avLst/>
+          </a:prstGeom>
+          <a:noFill/>
+        </p:spPr>
+        <p:txBody>
+          <a:bodyPr wrap="square">
+            <a:spAutoFit/>
+          </a:bodyPr>
+          <a:lstStyle/>
+          <a:p>
+            <a:pPr>
+              <a:lnSpc>
+                <a:spcPct val="125000"/>
+              </a:lnSpc>
+              <a:spcAft>
+                <a:spcPts val="1400"/>
+              </a:spcAft>
+              <a:defRPr sz="1500">
+                <a:solidFill>
+                  <a:srgbClr val="1E293B"/>
+                </a:solidFill>
+                <a:latin typeface="Calibri"/>
+              </a:defRPr>
+            </a:pPr>
+            <a:r>
+              <a:t>•  Visit www.dockstream.io/schedule</a:t>
+            </a:r>
+          </a:p>
+          <a:p>
+            <a:pPr>
+              <a:lnSpc>
+                <a:spcPct val="125000"/>
+              </a:lnSpc>
+              <a:spcAft>
+                <a:spcPts val="1400"/>
+              </a:spcAft>
+              <a:defRPr sz="1500">
+                <a:solidFill>
+                  <a:srgbClr val="1E293B"/>
+                </a:solidFill>
+                <a:latin typeface="Calibri"/>
+              </a:defRPr>
+            </a:pPr>
+            <a:r>
+              <a:t>•  Direct contact: Jack Johnson (jack@dockstream.io)</a:t>
+            </a:r>
+          </a:p>
+        </p:txBody>
+      </p:sp>
+      <p:sp>
+        <p:nvSpPr>
+          <p:cNvPr id="6" name="TextBox 5"/>
+          <p:cNvSpPr txBox="1"/>
+          <p:nvPr/>
+        </p:nvSpPr>
+        <p:spPr>
+          <a:xfrm>
+            <a:off x="731520" y="6309360"/>
+            <a:ext cx="10698480" cy="365760"/>
+          </a:xfrm>
+          <a:prstGeom prst="rect">
+            <a:avLst/>
+          </a:prstGeom>
+          <a:noFill/>
+        </p:spPr>
+        <p:txBody>
+          <a:bodyPr wrap="none">
+            <a:spAutoFit/>
+          </a:bodyPr>
+          <a:lstStyle/>
+          <a:p>
+            <a:pPr>
+              <a:defRPr sz="900">
+                <a:solidFill>
+                  <a:srgbClr val="94A3B8"/>
+                </a:solidFill>
+                <a:latin typeface="Calibri"/>
+              </a:defRPr>
+            </a:pPr>
+            <a:r>
+              <a:t>Enterprise Logistics Automation Deck — Jack Johnson (12 Slides) · Slide 12 of 12</a:t>
             </a:r>
           </a:p>
         </p:txBody>
@@ -3333,7 +4121,7 @@
               </a:defRPr>
             </a:pPr>
             <a:r>
-              <a:t>INDUSTRY CHALLENGE</a:t>
+              <a:t>ENTERPRISE LOGISTICS AUTOMATION DECK — JACK JOHNSO</a:t>
             </a:r>
           </a:p>
           <a:p>
@@ -3346,23 +4134,7 @@
               </a:defRPr>
             </a:pPr>
             <a:r>
-              <a:t>The Hidden Cost of Cross-Dock Inefficiency</a:t>
-            </a:r>
-          </a:p>
-          <a:p>
-            <a:pPr>
-              <a:spcBef>
-                <a:spcPts val="200"/>
-              </a:spcBef>
-              <a:defRPr sz="1200">
-                <a:solidFill>
-                  <a:srgbClr val="64748B"/>
-                </a:solidFill>
-                <a:latin typeface="Calibri"/>
-              </a:defRPr>
-            </a:pPr>
-            <a:r>
-              <a:t>Fragmented paperwork and manual phone calls paralyze regional distribution terminals</a:t>
+              <a:t>The Hidden Cost of Dock Congestion</a:t>
             </a:r>
           </a:p>
         </p:txBody>
@@ -3412,59 +4184,14 @@
       </p:sp>
       <p:sp>
         <p:nvSpPr>
-          <p:cNvPr id="5" name="Rounded Rectangle 4"/>
-          <p:cNvSpPr/>
-          <p:nvPr/>
-        </p:nvSpPr>
-        <p:spPr>
-          <a:xfrm>
-            <a:off x="731520" y="1920240"/>
-            <a:ext cx="2468880" cy="4114800"/>
-          </a:xfrm>
-          <a:prstGeom prst="roundRect">
-            <a:avLst/>
-          </a:prstGeom>
-          <a:solidFill>
-            <a:srgbClr val="F8FAFC"/>
-          </a:solidFill>
-          <a:ln w="12700">
-            <a:solidFill>
-              <a:srgbClr val="CBD5E1"/>
-            </a:solidFill>
-          </a:ln>
-        </p:spPr>
-        <p:style>
-          <a:lnRef idx="1">
-            <a:schemeClr val="accent1"/>
-          </a:lnRef>
-          <a:fillRef idx="3">
-            <a:schemeClr val="accent1"/>
-          </a:fillRef>
-          <a:effectRef idx="2">
-            <a:schemeClr val="accent1"/>
-          </a:effectRef>
-          <a:fontRef idx="minor">
-            <a:schemeClr val="lt1"/>
-          </a:fontRef>
-        </p:style>
-        <p:txBody>
-          <a:bodyPr rtlCol="0" anchor="ctr"/>
-          <a:lstStyle/>
-          <a:p>
-            <a:pPr algn="ctr"/>
-          </a:p>
-        </p:txBody>
-      </p:sp>
-      <p:sp>
-        <p:nvSpPr>
-          <p:cNvPr id="6" name="TextBox 5"/>
+          <p:cNvPr id="5" name="TextBox 4"/>
           <p:cNvSpPr txBox="1"/>
           <p:nvPr/>
         </p:nvSpPr>
         <p:spPr>
           <a:xfrm>
-            <a:off x="1005840" y="2286000"/>
-            <a:ext cx="1920240" cy="3383280"/>
+            <a:off x="731520" y="2011680"/>
+            <a:ext cx="10698480" cy="4114800"/>
           </a:xfrm>
           <a:prstGeom prst="rect">
             <a:avLst/>
@@ -3478,106 +4205,73 @@
           <a:lstStyle/>
           <a:p>
             <a:pPr>
+              <a:lnSpc>
+                <a:spcPct val="125000"/>
+              </a:lnSpc>
               <a:spcAft>
-                <a:spcPts val="1000"/>
+                <a:spcPts val="1400"/>
               </a:spcAft>
-              <a:defRPr sz="3600" b="1">
-                <a:solidFill>
-                  <a:srgbClr val="2563EB"/>
-                </a:solidFill>
-                <a:latin typeface="Calibri"/>
-              </a:defRPr>
-            </a:pPr>
-            <a:r>
-              <a:t>$180k</a:t>
-            </a:r>
-          </a:p>
-          <a:p>
-            <a:pPr>
+              <a:defRPr sz="1500">
+                <a:solidFill>
+                  <a:srgbClr val="1E293B"/>
+                </a:solidFill>
+                <a:latin typeface="Calibri"/>
+              </a:defRPr>
+            </a:pPr>
+            <a:r>
+              <a:t>•  Midwest carriers report 14 hours per week lost waiting on paperwork</a:t>
+            </a:r>
+          </a:p>
+          <a:p>
+            <a:pPr>
+              <a:lnSpc>
+                <a:spcPct val="125000"/>
+              </a:lnSpc>
               <a:spcAft>
-                <a:spcPts val="800"/>
+                <a:spcPts val="1400"/>
               </a:spcAft>
-              <a:defRPr sz="1400" b="1">
-                <a:solidFill>
-                  <a:srgbClr val="0F172A"/>
-                </a:solidFill>
-                <a:latin typeface="Calibri"/>
-              </a:defRPr>
-            </a:pPr>
-            <a:r>
-              <a:t>Annual Detention Loss</a:t>
-            </a:r>
-          </a:p>
-          <a:p>
-            <a:pPr>
-              <a:defRPr sz="1100">
-                <a:solidFill>
-                  <a:srgbClr val="64748B"/>
-                </a:solidFill>
-                <a:latin typeface="Calibri"/>
-              </a:defRPr>
-            </a:pPr>
-            <a:r>
-              <a:t>Paid per terminal in carrier demurrage penalties</a:t>
-            </a:r>
-          </a:p>
-        </p:txBody>
-      </p:sp>
-      <p:sp>
-        <p:nvSpPr>
-          <p:cNvPr id="7" name="Rounded Rectangle 6"/>
-          <p:cNvSpPr/>
-          <p:nvPr/>
-        </p:nvSpPr>
-        <p:spPr>
-          <a:xfrm>
-            <a:off x="3474720" y="1920240"/>
-            <a:ext cx="2468880" cy="4114800"/>
-          </a:xfrm>
-          <a:prstGeom prst="roundRect">
-            <a:avLst/>
-          </a:prstGeom>
-          <a:solidFill>
-            <a:srgbClr val="F8FAFC"/>
-          </a:solidFill>
-          <a:ln w="12700">
-            <a:solidFill>
-              <a:srgbClr val="CBD5E1"/>
-            </a:solidFill>
-          </a:ln>
-        </p:spPr>
-        <p:style>
-          <a:lnRef idx="1">
-            <a:schemeClr val="accent1"/>
-          </a:lnRef>
-          <a:fillRef idx="3">
-            <a:schemeClr val="accent1"/>
-          </a:fillRef>
-          <a:effectRef idx="2">
-            <a:schemeClr val="accent1"/>
-          </a:effectRef>
-          <a:fontRef idx="minor">
-            <a:schemeClr val="lt1"/>
-          </a:fontRef>
-        </p:style>
-        <p:txBody>
-          <a:bodyPr rtlCol="0" anchor="ctr"/>
-          <a:lstStyle/>
-          <a:p>
-            <a:pPr algn="ctr"/>
-          </a:p>
-        </p:txBody>
-      </p:sp>
-      <p:sp>
-        <p:nvSpPr>
-          <p:cNvPr id="8" name="TextBox 7"/>
+              <a:defRPr sz="1500">
+                <a:solidFill>
+                  <a:srgbClr val="1E293B"/>
+                </a:solidFill>
+                <a:latin typeface="Calibri"/>
+              </a:defRPr>
+            </a:pPr>
+            <a:r>
+              <a:t>•  Detention fees cost average distribution hubs $180,000 annually</a:t>
+            </a:r>
+          </a:p>
+          <a:p>
+            <a:pPr>
+              <a:lnSpc>
+                <a:spcPct val="125000"/>
+              </a:lnSpc>
+              <a:spcAft>
+                <a:spcPts val="1400"/>
+              </a:spcAft>
+              <a:defRPr sz="1500">
+                <a:solidFill>
+                  <a:srgbClr val="1E293B"/>
+                </a:solidFill>
+                <a:latin typeface="Calibri"/>
+              </a:defRPr>
+            </a:pPr>
+            <a:r>
+              <a:t>•  Fragmented driver texts and phone calls create dockyard gridlock</a:t>
+            </a:r>
+          </a:p>
+        </p:txBody>
+      </p:sp>
+      <p:sp>
+        <p:nvSpPr>
+          <p:cNvPr id="6" name="TextBox 5"/>
           <p:cNvSpPr txBox="1"/>
           <p:nvPr/>
         </p:nvSpPr>
         <p:spPr>
           <a:xfrm>
-            <a:off x="3749040" y="2286000"/>
-            <a:ext cx="1920240" cy="3383280"/>
+            <a:off x="731520" y="6309360"/>
+            <a:ext cx="10698480" cy="365760"/>
           </a:xfrm>
           <a:prstGeom prst="rect">
             <a:avLst/>
@@ -3585,300 +4279,6 @@
           <a:noFill/>
         </p:spPr>
         <p:txBody>
-          <a:bodyPr wrap="square">
-            <a:spAutoFit/>
-          </a:bodyPr>
-          <a:lstStyle/>
-          <a:p>
-            <a:pPr>
-              <a:spcAft>
-                <a:spcPts val="1000"/>
-              </a:spcAft>
-              <a:defRPr sz="3600" b="1">
-                <a:solidFill>
-                  <a:srgbClr val="2563EB"/>
-                </a:solidFill>
-                <a:latin typeface="Calibri"/>
-              </a:defRPr>
-            </a:pPr>
-            <a:r>
-              <a:t>114 min</a:t>
-            </a:r>
-          </a:p>
-          <a:p>
-            <a:pPr>
-              <a:spcAft>
-                <a:spcPts val="800"/>
-              </a:spcAft>
-              <a:defRPr sz="1400" b="1">
-                <a:solidFill>
-                  <a:srgbClr val="0F172A"/>
-                </a:solidFill>
-                <a:latin typeface="Calibri"/>
-              </a:defRPr>
-            </a:pPr>
-            <a:r>
-              <a:t>Average Dwell Time</a:t>
-            </a:r>
-          </a:p>
-          <a:p>
-            <a:pPr>
-              <a:defRPr sz="1100">
-                <a:solidFill>
-                  <a:srgbClr val="64748B"/>
-                </a:solidFill>
-                <a:latin typeface="Calibri"/>
-              </a:defRPr>
-            </a:pPr>
-            <a:r>
-              <a:t>Trucks parked waiting for manual dock door assignment</a:t>
-            </a:r>
-          </a:p>
-        </p:txBody>
-      </p:sp>
-      <p:sp>
-        <p:nvSpPr>
-          <p:cNvPr id="9" name="Rounded Rectangle 8"/>
-          <p:cNvSpPr/>
-          <p:nvPr/>
-        </p:nvSpPr>
-        <p:spPr>
-          <a:xfrm>
-            <a:off x="6217920" y="1920240"/>
-            <a:ext cx="2468880" cy="4114800"/>
-          </a:xfrm>
-          <a:prstGeom prst="roundRect">
-            <a:avLst/>
-          </a:prstGeom>
-          <a:solidFill>
-            <a:srgbClr val="F8FAFC"/>
-          </a:solidFill>
-          <a:ln w="12700">
-            <a:solidFill>
-              <a:srgbClr val="CBD5E1"/>
-            </a:solidFill>
-          </a:ln>
-        </p:spPr>
-        <p:style>
-          <a:lnRef idx="1">
-            <a:schemeClr val="accent1"/>
-          </a:lnRef>
-          <a:fillRef idx="3">
-            <a:schemeClr val="accent1"/>
-          </a:fillRef>
-          <a:effectRef idx="2">
-            <a:schemeClr val="accent1"/>
-          </a:effectRef>
-          <a:fontRef idx="minor">
-            <a:schemeClr val="lt1"/>
-          </a:fontRef>
-        </p:style>
-        <p:txBody>
-          <a:bodyPr rtlCol="0" anchor="ctr"/>
-          <a:lstStyle/>
-          <a:p>
-            <a:pPr algn="ctr"/>
-          </a:p>
-        </p:txBody>
-      </p:sp>
-      <p:sp>
-        <p:nvSpPr>
-          <p:cNvPr id="10" name="TextBox 9"/>
-          <p:cNvSpPr txBox="1"/>
-          <p:nvPr/>
-        </p:nvSpPr>
-        <p:spPr>
-          <a:xfrm>
-            <a:off x="6492240" y="2286000"/>
-            <a:ext cx="1920240" cy="3383280"/>
-          </a:xfrm>
-          <a:prstGeom prst="rect">
-            <a:avLst/>
-          </a:prstGeom>
-          <a:noFill/>
-        </p:spPr>
-        <p:txBody>
-          <a:bodyPr wrap="square">
-            <a:spAutoFit/>
-          </a:bodyPr>
-          <a:lstStyle/>
-          <a:p>
-            <a:pPr>
-              <a:spcAft>
-                <a:spcPts val="1000"/>
-              </a:spcAft>
-              <a:defRPr sz="3600" b="1">
-                <a:solidFill>
-                  <a:srgbClr val="2563EB"/>
-                </a:solidFill>
-                <a:latin typeface="Calibri"/>
-              </a:defRPr>
-            </a:pPr>
-            <a:r>
-              <a:t>14 hrs</a:t>
-            </a:r>
-          </a:p>
-          <a:p>
-            <a:pPr>
-              <a:spcAft>
-                <a:spcPts val="800"/>
-              </a:spcAft>
-              <a:defRPr sz="1400" b="1">
-                <a:solidFill>
-                  <a:srgbClr val="0F172A"/>
-                </a:solidFill>
-                <a:latin typeface="Calibri"/>
-              </a:defRPr>
-            </a:pPr>
-            <a:r>
-              <a:t>Lost Weekly per Staff</a:t>
-            </a:r>
-          </a:p>
-          <a:p>
-            <a:pPr>
-              <a:defRPr sz="1100">
-                <a:solidFill>
-                  <a:srgbClr val="64748B"/>
-                </a:solidFill>
-                <a:latin typeface="Calibri"/>
-              </a:defRPr>
-            </a:pPr>
-            <a:r>
-              <a:t>Spent by dispatchers on phone tag and clipboard tracking</a:t>
-            </a:r>
-          </a:p>
-        </p:txBody>
-      </p:sp>
-      <p:sp>
-        <p:nvSpPr>
-          <p:cNvPr id="11" name="Rounded Rectangle 10"/>
-          <p:cNvSpPr/>
-          <p:nvPr/>
-        </p:nvSpPr>
-        <p:spPr>
-          <a:xfrm>
-            <a:off x="8961120" y="1920240"/>
-            <a:ext cx="2468880" cy="4114800"/>
-          </a:xfrm>
-          <a:prstGeom prst="roundRect">
-            <a:avLst/>
-          </a:prstGeom>
-          <a:solidFill>
-            <a:srgbClr val="F8FAFC"/>
-          </a:solidFill>
-          <a:ln w="12700">
-            <a:solidFill>
-              <a:srgbClr val="CBD5E1"/>
-            </a:solidFill>
-          </a:ln>
-        </p:spPr>
-        <p:style>
-          <a:lnRef idx="1">
-            <a:schemeClr val="accent1"/>
-          </a:lnRef>
-          <a:fillRef idx="3">
-            <a:schemeClr val="accent1"/>
-          </a:fillRef>
-          <a:effectRef idx="2">
-            <a:schemeClr val="accent1"/>
-          </a:effectRef>
-          <a:fontRef idx="minor">
-            <a:schemeClr val="lt1"/>
-          </a:fontRef>
-        </p:style>
-        <p:txBody>
-          <a:bodyPr rtlCol="0" anchor="ctr"/>
-          <a:lstStyle/>
-          <a:p>
-            <a:pPr algn="ctr"/>
-          </a:p>
-        </p:txBody>
-      </p:sp>
-      <p:sp>
-        <p:nvSpPr>
-          <p:cNvPr id="12" name="TextBox 11"/>
-          <p:cNvSpPr txBox="1"/>
-          <p:nvPr/>
-        </p:nvSpPr>
-        <p:spPr>
-          <a:xfrm>
-            <a:off x="9235440" y="2286000"/>
-            <a:ext cx="1920240" cy="3383280"/>
-          </a:xfrm>
-          <a:prstGeom prst="rect">
-            <a:avLst/>
-          </a:prstGeom>
-          <a:noFill/>
-        </p:spPr>
-        <p:txBody>
-          <a:bodyPr wrap="square">
-            <a:spAutoFit/>
-          </a:bodyPr>
-          <a:lstStyle/>
-          <a:p>
-            <a:pPr>
-              <a:spcAft>
-                <a:spcPts val="1000"/>
-              </a:spcAft>
-              <a:defRPr sz="3600" b="1">
-                <a:solidFill>
-                  <a:srgbClr val="2563EB"/>
-                </a:solidFill>
-                <a:latin typeface="Calibri"/>
-              </a:defRPr>
-            </a:pPr>
-            <a:r>
-              <a:t>12%</a:t>
-            </a:r>
-          </a:p>
-          <a:p>
-            <a:pPr>
-              <a:spcAft>
-                <a:spcPts val="800"/>
-              </a:spcAft>
-              <a:defRPr sz="1400" b="1">
-                <a:solidFill>
-                  <a:srgbClr val="0F172A"/>
-                </a:solidFill>
-                <a:latin typeface="Calibri"/>
-              </a:defRPr>
-            </a:pPr>
-            <a:r>
-              <a:t>BOL Claim Disputes</a:t>
-            </a:r>
-          </a:p>
-          <a:p>
-            <a:pPr>
-              <a:defRPr sz="1100">
-                <a:solidFill>
-                  <a:srgbClr val="64748B"/>
-                </a:solidFill>
-                <a:latin typeface="Calibri"/>
-              </a:defRPr>
-            </a:pPr>
-            <a:r>
-              <a:t>Paper bills lost, illegible, or lacking damage photos</a:t>
-            </a:r>
-          </a:p>
-        </p:txBody>
-      </p:sp>
-      <p:sp>
-        <p:nvSpPr>
-          <p:cNvPr id="13" name="TextBox 12"/>
-          <p:cNvSpPr txBox="1"/>
-          <p:nvPr/>
-        </p:nvSpPr>
-        <p:spPr>
-          <a:xfrm>
-            <a:off x="731520" y="6309360"/>
-            <a:ext cx="10698480" cy="365760"/>
-          </a:xfrm>
-          <a:prstGeom prst="rect">
-            <a:avLst/>
-          </a:prstGeom>
-          <a:noFill/>
-        </p:spPr>
-        <p:txBody>
           <a:bodyPr wrap="none">
             <a:spAutoFit/>
           </a:bodyPr>
@@ -3893,7 +4293,7 @@
               </a:defRPr>
             </a:pPr>
             <a:r>
-              <a:t>DockStream Enterprise — Outbound Logistics Presentation · Slide 2 of 5</a:t>
+              <a:t>Enterprise Logistics Automation Deck — Jack Johnson (12 Slides) · Slide 2 of 12</a:t>
             </a:r>
           </a:p>
         </p:txBody>
@@ -3993,7 +4393,7 @@
               </a:defRPr>
             </a:pPr>
             <a:r>
-              <a:t>THE DOCKSTREAM SOLUTION</a:t>
+              <a:t>ENTERPRISE LOGISTICS AUTOMATION DECK — JACK JOHNSO</a:t>
             </a:r>
           </a:p>
           <a:p>
@@ -4006,23 +4406,7 @@
               </a:defRPr>
             </a:pPr>
             <a:r>
-              <a:t>A Complete Terminal Orchestration Operating System</a:t>
-            </a:r>
-          </a:p>
-          <a:p>
-            <a:pPr>
-              <a:spcBef>
-                <a:spcPts val="200"/>
-              </a:spcBef>
-              <a:defRPr sz="1200">
-                <a:solidFill>
-                  <a:srgbClr val="64748B"/>
-                </a:solidFill>
-                <a:latin typeface="Calibri"/>
-              </a:defRPr>
-            </a:pPr>
-            <a:r>
-              <a:t>Connecting frontline dispatchers, yard spotters, and carriers in real time</a:t>
+              <a:t>The DockStream Platform</a:t>
             </a:r>
           </a:p>
         </p:txBody>
@@ -4072,59 +4456,14 @@
       </p:sp>
       <p:sp>
         <p:nvSpPr>
-          <p:cNvPr id="5" name="Rounded Rectangle 4"/>
-          <p:cNvSpPr/>
-          <p:nvPr/>
-        </p:nvSpPr>
-        <p:spPr>
-          <a:xfrm>
-            <a:off x="731520" y="1920240"/>
-            <a:ext cx="3352800" cy="4114800"/>
-          </a:xfrm>
-          <a:prstGeom prst="roundRect">
-            <a:avLst/>
-          </a:prstGeom>
-          <a:solidFill>
-            <a:srgbClr val="F8FAFC"/>
-          </a:solidFill>
-          <a:ln w="12700">
-            <a:solidFill>
-              <a:srgbClr val="CBD5E1"/>
-            </a:solidFill>
-          </a:ln>
-        </p:spPr>
-        <p:style>
-          <a:lnRef idx="1">
-            <a:schemeClr val="accent1"/>
-          </a:lnRef>
-          <a:fillRef idx="3">
-            <a:schemeClr val="accent1"/>
-          </a:fillRef>
-          <a:effectRef idx="2">
-            <a:schemeClr val="accent1"/>
-          </a:effectRef>
-          <a:fontRef idx="minor">
-            <a:schemeClr val="lt1"/>
-          </a:fontRef>
-        </p:style>
-        <p:txBody>
-          <a:bodyPr rtlCol="0" anchor="ctr"/>
-          <a:lstStyle/>
-          <a:p>
-            <a:pPr algn="ctr"/>
-          </a:p>
-        </p:txBody>
-      </p:sp>
-      <p:sp>
-        <p:nvSpPr>
-          <p:cNvPr id="6" name="TextBox 5"/>
+          <p:cNvPr id="5" name="TextBox 4"/>
           <p:cNvSpPr txBox="1"/>
           <p:nvPr/>
         </p:nvSpPr>
         <p:spPr>
           <a:xfrm>
-            <a:off x="1005840" y="2194560"/>
-            <a:ext cx="2804160" cy="3566160"/>
+            <a:off x="731520" y="2011680"/>
+            <a:ext cx="10698480" cy="4114800"/>
           </a:xfrm>
           <a:prstGeom prst="rect">
             <a:avLst/>
@@ -4138,125 +4477,73 @@
           <a:lstStyle/>
           <a:p>
             <a:pPr>
+              <a:lnSpc>
+                <a:spcPct val="125000"/>
+              </a:lnSpc>
               <a:spcAft>
-                <a:spcPts val="1000"/>
+                <a:spcPts val="1400"/>
               </a:spcAft>
-              <a:defRPr sz="1500" b="1">
-                <a:solidFill>
-                  <a:srgbClr val="0F172A"/>
-                </a:solidFill>
-                <a:latin typeface="Calibri"/>
-              </a:defRPr>
-            </a:pPr>
-            <a:r>
-              <a:t>1. Mobile Driver Check-In</a:t>
-            </a:r>
-          </a:p>
-          <a:p>
-            <a:pPr>
+              <a:defRPr sz="1500">
+                <a:solidFill>
+                  <a:srgbClr val="1E293B"/>
+                </a:solidFill>
+                <a:latin typeface="Calibri"/>
+              </a:defRPr>
+            </a:pPr>
+            <a:r>
+              <a:t>•  Automated driver check-in via mobile geofence</a:t>
+            </a:r>
+          </a:p>
+          <a:p>
+            <a:pPr>
+              <a:lnSpc>
+                <a:spcPct val="125000"/>
+              </a:lnSpc>
               <a:spcAft>
-                <a:spcPts val="600"/>
+                <a:spcPts val="1400"/>
               </a:spcAft>
-              <a:defRPr sz="1100">
-                <a:solidFill>
-                  <a:srgbClr val="334155"/>
-                </a:solidFill>
-                <a:latin typeface="Calibri"/>
-              </a:defRPr>
-            </a:pPr>
-            <a:r>
-              <a:t>•  Geofence triggers arrival alerts 2 miles out</a:t>
-            </a:r>
-          </a:p>
-          <a:p>
-            <a:pPr>
+              <a:defRPr sz="1500">
+                <a:solidFill>
+                  <a:srgbClr val="1E293B"/>
+                </a:solidFill>
+                <a:latin typeface="Calibri"/>
+              </a:defRPr>
+            </a:pPr>
+            <a:r>
+              <a:t>•  Dynamic dock door assignment based on pallet count and liftgate need</a:t>
+            </a:r>
+          </a:p>
+          <a:p>
+            <a:pPr>
+              <a:lnSpc>
+                <a:spcPct val="125000"/>
+              </a:lnSpc>
               <a:spcAft>
-                <a:spcPts val="600"/>
+                <a:spcPts val="1400"/>
               </a:spcAft>
-              <a:defRPr sz="1100">
-                <a:solidFill>
-                  <a:srgbClr val="334155"/>
-                </a:solidFill>
-                <a:latin typeface="Calibri"/>
-              </a:defRPr>
-            </a:pPr>
-            <a:r>
-              <a:t>•  Zero app friction: instant web container</a:t>
-            </a:r>
-          </a:p>
-          <a:p>
-            <a:pPr>
-              <a:spcAft>
-                <a:spcPts val="600"/>
-              </a:spcAft>
-              <a:defRPr sz="1100">
-                <a:solidFill>
-                  <a:srgbClr val="334155"/>
-                </a:solidFill>
-                <a:latin typeface="Calibri"/>
-              </a:defRPr>
-            </a:pPr>
-            <a:r>
-              <a:t>•  Validates seal and temperature specs instantly</a:t>
-            </a:r>
-          </a:p>
-        </p:txBody>
-      </p:sp>
-      <p:sp>
-        <p:nvSpPr>
-          <p:cNvPr id="7" name="Rounded Rectangle 6"/>
-          <p:cNvSpPr/>
-          <p:nvPr/>
-        </p:nvSpPr>
-        <p:spPr>
-          <a:xfrm>
-            <a:off x="4404360" y="1920240"/>
-            <a:ext cx="3352800" cy="4114800"/>
-          </a:xfrm>
-          <a:prstGeom prst="roundRect">
-            <a:avLst/>
-          </a:prstGeom>
-          <a:solidFill>
-            <a:srgbClr val="F8FAFC"/>
-          </a:solidFill>
-          <a:ln w="12700">
-            <a:solidFill>
-              <a:srgbClr val="CBD5E1"/>
-            </a:solidFill>
-          </a:ln>
-        </p:spPr>
-        <p:style>
-          <a:lnRef idx="1">
-            <a:schemeClr val="accent1"/>
-          </a:lnRef>
-          <a:fillRef idx="3">
-            <a:schemeClr val="accent1"/>
-          </a:fillRef>
-          <a:effectRef idx="2">
-            <a:schemeClr val="accent1"/>
-          </a:effectRef>
-          <a:fontRef idx="minor">
-            <a:schemeClr val="lt1"/>
-          </a:fontRef>
-        </p:style>
-        <p:txBody>
-          <a:bodyPr rtlCol="0" anchor="ctr"/>
-          <a:lstStyle/>
-          <a:p>
-            <a:pPr algn="ctr"/>
-          </a:p>
-        </p:txBody>
-      </p:sp>
-      <p:sp>
-        <p:nvSpPr>
-          <p:cNvPr id="8" name="TextBox 7"/>
+              <a:defRPr sz="1500">
+                <a:solidFill>
+                  <a:srgbClr val="1E293B"/>
+                </a:solidFill>
+                <a:latin typeface="Calibri"/>
+              </a:defRPr>
+            </a:pPr>
+            <a:r>
+              <a:t>•  Instant electronic BOL generation and ERP sync</a:t>
+            </a:r>
+          </a:p>
+        </p:txBody>
+      </p:sp>
+      <p:sp>
+        <p:nvSpPr>
+          <p:cNvPr id="6" name="TextBox 5"/>
           <p:cNvSpPr txBox="1"/>
           <p:nvPr/>
         </p:nvSpPr>
         <p:spPr>
           <a:xfrm>
-            <a:off x="4678680" y="2194560"/>
-            <a:ext cx="2804160" cy="3566160"/>
+            <a:off x="731520" y="6309360"/>
+            <a:ext cx="10698480" cy="365760"/>
           </a:xfrm>
           <a:prstGeom prst="rect">
             <a:avLst/>
@@ -4264,225 +4551,6 @@
           <a:noFill/>
         </p:spPr>
         <p:txBody>
-          <a:bodyPr wrap="square">
-            <a:spAutoFit/>
-          </a:bodyPr>
-          <a:lstStyle/>
-          <a:p>
-            <a:pPr>
-              <a:spcAft>
-                <a:spcPts val="1000"/>
-              </a:spcAft>
-              <a:defRPr sz="1500" b="1">
-                <a:solidFill>
-                  <a:srgbClr val="0F172A"/>
-                </a:solidFill>
-                <a:latin typeface="Calibri"/>
-              </a:defRPr>
-            </a:pPr>
-            <a:r>
-              <a:t>2. Dynamic Bay Assignment</a:t>
-            </a:r>
-          </a:p>
-          <a:p>
-            <a:pPr>
-              <a:spcAft>
-                <a:spcPts val="600"/>
-              </a:spcAft>
-              <a:defRPr sz="1100">
-                <a:solidFill>
-                  <a:srgbClr val="334155"/>
-                </a:solidFill>
-                <a:latin typeface="Calibri"/>
-              </a:defRPr>
-            </a:pPr>
-            <a:r>
-              <a:t>•  Algorithm routes trailers based on forklift traffic</a:t>
-            </a:r>
-          </a:p>
-          <a:p>
-            <a:pPr>
-              <a:spcAft>
-                <a:spcPts val="600"/>
-              </a:spcAft>
-              <a:defRPr sz="1100">
-                <a:solidFill>
-                  <a:srgbClr val="334155"/>
-                </a:solidFill>
-                <a:latin typeface="Calibri"/>
-              </a:defRPr>
-            </a:pPr>
-            <a:r>
-              <a:t>•  Prioritizes hot freight and expiring demurrage</a:t>
-            </a:r>
-          </a:p>
-          <a:p>
-            <a:pPr>
-              <a:spcAft>
-                <a:spcPts val="600"/>
-              </a:spcAft>
-              <a:defRPr sz="1100">
-                <a:solidFill>
-                  <a:srgbClr val="334155"/>
-                </a:solidFill>
-                <a:latin typeface="Calibri"/>
-              </a:defRPr>
-            </a:pPr>
-            <a:r>
-              <a:t>•  Cuts yard dwell time by 38% immediately</a:t>
-            </a:r>
-          </a:p>
-        </p:txBody>
-      </p:sp>
-      <p:sp>
-        <p:nvSpPr>
-          <p:cNvPr id="9" name="Rounded Rectangle 8"/>
-          <p:cNvSpPr/>
-          <p:nvPr/>
-        </p:nvSpPr>
-        <p:spPr>
-          <a:xfrm>
-            <a:off x="8077200" y="1920240"/>
-            <a:ext cx="3352800" cy="4114800"/>
-          </a:xfrm>
-          <a:prstGeom prst="roundRect">
-            <a:avLst/>
-          </a:prstGeom>
-          <a:solidFill>
-            <a:srgbClr val="F8FAFC"/>
-          </a:solidFill>
-          <a:ln w="12700">
-            <a:solidFill>
-              <a:srgbClr val="CBD5E1"/>
-            </a:solidFill>
-          </a:ln>
-        </p:spPr>
-        <p:style>
-          <a:lnRef idx="1">
-            <a:schemeClr val="accent1"/>
-          </a:lnRef>
-          <a:fillRef idx="3">
-            <a:schemeClr val="accent1"/>
-          </a:fillRef>
-          <a:effectRef idx="2">
-            <a:schemeClr val="accent1"/>
-          </a:effectRef>
-          <a:fontRef idx="minor">
-            <a:schemeClr val="lt1"/>
-          </a:fontRef>
-        </p:style>
-        <p:txBody>
-          <a:bodyPr rtlCol="0" anchor="ctr"/>
-          <a:lstStyle/>
-          <a:p>
-            <a:pPr algn="ctr"/>
-          </a:p>
-        </p:txBody>
-      </p:sp>
-      <p:sp>
-        <p:nvSpPr>
-          <p:cNvPr id="10" name="TextBox 9"/>
-          <p:cNvSpPr txBox="1"/>
-          <p:nvPr/>
-        </p:nvSpPr>
-        <p:spPr>
-          <a:xfrm>
-            <a:off x="8351520" y="2194560"/>
-            <a:ext cx="2804160" cy="3566160"/>
-          </a:xfrm>
-          <a:prstGeom prst="rect">
-            <a:avLst/>
-          </a:prstGeom>
-          <a:noFill/>
-        </p:spPr>
-        <p:txBody>
-          <a:bodyPr wrap="square">
-            <a:spAutoFit/>
-          </a:bodyPr>
-          <a:lstStyle/>
-          <a:p>
-            <a:pPr>
-              <a:spcAft>
-                <a:spcPts val="1000"/>
-              </a:spcAft>
-              <a:defRPr sz="1500" b="1">
-                <a:solidFill>
-                  <a:srgbClr val="0F172A"/>
-                </a:solidFill>
-                <a:latin typeface="Calibri"/>
-              </a:defRPr>
-            </a:pPr>
-            <a:r>
-              <a:t>3. Sign-on-Glass e-BOL</a:t>
-            </a:r>
-          </a:p>
-          <a:p>
-            <a:pPr>
-              <a:spcAft>
-                <a:spcPts val="600"/>
-              </a:spcAft>
-              <a:defRPr sz="1100">
-                <a:solidFill>
-                  <a:srgbClr val="334155"/>
-                </a:solidFill>
-                <a:latin typeface="Calibri"/>
-              </a:defRPr>
-            </a:pPr>
-            <a:r>
-              <a:t>•  Timestamped photo exceptions for damaged cartons</a:t>
-            </a:r>
-          </a:p>
-          <a:p>
-            <a:pPr>
-              <a:spcAft>
-                <a:spcPts val="600"/>
-              </a:spcAft>
-              <a:defRPr sz="1100">
-                <a:solidFill>
-                  <a:srgbClr val="334155"/>
-                </a:solidFill>
-                <a:latin typeface="Calibri"/>
-              </a:defRPr>
-            </a:pPr>
-            <a:r>
-              <a:t>•  Digital sign-off dispatched to carrier and shipper</a:t>
-            </a:r>
-          </a:p>
-          <a:p>
-            <a:pPr>
-              <a:spcAft>
-                <a:spcPts val="600"/>
-              </a:spcAft>
-              <a:defRPr sz="1100">
-                <a:solidFill>
-                  <a:srgbClr val="334155"/>
-                </a:solidFill>
-                <a:latin typeface="Calibri"/>
-              </a:defRPr>
-            </a:pPr>
-            <a:r>
-              <a:t>•  Direct REST sync to SAP, Oracle, and Blue Yonder</a:t>
-            </a:r>
-          </a:p>
-        </p:txBody>
-      </p:sp>
-      <p:sp>
-        <p:nvSpPr>
-          <p:cNvPr id="11" name="TextBox 10"/>
-          <p:cNvSpPr txBox="1"/>
-          <p:nvPr/>
-        </p:nvSpPr>
-        <p:spPr>
-          <a:xfrm>
-            <a:off x="731520" y="6309360"/>
-            <a:ext cx="10698480" cy="365760"/>
-          </a:xfrm>
-          <a:prstGeom prst="rect">
-            <a:avLst/>
-          </a:prstGeom>
-          <a:noFill/>
-        </p:spPr>
-        <p:txBody>
           <a:bodyPr wrap="none">
             <a:spAutoFit/>
           </a:bodyPr>
@@ -4497,7 +4565,7 @@
               </a:defRPr>
             </a:pPr>
             <a:r>
-              <a:t>DockStream Enterprise — Outbound Logistics Presentation · Slide 3 of 5</a:t>
+              <a:t>Enterprise Logistics Automation Deck — Jack Johnson (12 Slides) · Slide 3 of 12</a:t>
             </a:r>
           </a:p>
         </p:txBody>
@@ -4597,7 +4665,7 @@
               </a:defRPr>
             </a:pPr>
             <a:r>
-              <a:t>ENTERPRISE ROI</a:t>
+              <a:t>ENTERPRISE LOGISTICS AUTOMATION DECK — JACK JOHNSO</a:t>
             </a:r>
           </a:p>
           <a:p>
@@ -4610,23 +4678,7 @@
               </a:defRPr>
             </a:pPr>
             <a:r>
-              <a:t>Proven Pilot Results: Midwest 3PL Case Study</a:t>
-            </a:r>
-          </a:p>
-          <a:p>
-            <a:pPr>
-              <a:spcBef>
-                <a:spcPts val="200"/>
-              </a:spcBef>
-              <a:defRPr sz="1200">
-                <a:solidFill>
-                  <a:srgbClr val="64748B"/>
-                </a:solidFill>
-                <a:latin typeface="Calibri"/>
-              </a:defRPr>
-            </a:pPr>
-            <a:r>
-              <a:t>Performance audited across 18,400 consecutive trailer transfers over 90 days</a:t>
+              <a:t>Case Study: Midwest 3PL Pilot Results</a:t>
             </a:r>
           </a:p>
         </p:txBody>
@@ -4676,59 +4728,14 @@
       </p:sp>
       <p:sp>
         <p:nvSpPr>
-          <p:cNvPr id="5" name="Rounded Rectangle 4"/>
-          <p:cNvSpPr/>
-          <p:nvPr/>
-        </p:nvSpPr>
-        <p:spPr>
-          <a:xfrm>
-            <a:off x="731520" y="1920240"/>
-            <a:ext cx="2468880" cy="4114800"/>
-          </a:xfrm>
-          <a:prstGeom prst="roundRect">
-            <a:avLst/>
-          </a:prstGeom>
-          <a:solidFill>
-            <a:srgbClr val="F8FAFC"/>
-          </a:solidFill>
-          <a:ln w="12700">
-            <a:solidFill>
-              <a:srgbClr val="CBD5E1"/>
-            </a:solidFill>
-          </a:ln>
-        </p:spPr>
-        <p:style>
-          <a:lnRef idx="1">
-            <a:schemeClr val="accent1"/>
-          </a:lnRef>
-          <a:fillRef idx="3">
-            <a:schemeClr val="accent1"/>
-          </a:fillRef>
-          <a:effectRef idx="2">
-            <a:schemeClr val="accent1"/>
-          </a:effectRef>
-          <a:fontRef idx="minor">
-            <a:schemeClr val="lt1"/>
-          </a:fontRef>
-        </p:style>
-        <p:txBody>
-          <a:bodyPr rtlCol="0" anchor="ctr"/>
-          <a:lstStyle/>
-          <a:p>
-            <a:pPr algn="ctr"/>
-          </a:p>
-        </p:txBody>
-      </p:sp>
-      <p:sp>
-        <p:nvSpPr>
-          <p:cNvPr id="6" name="TextBox 5"/>
+          <p:cNvPr id="5" name="TextBox 4"/>
           <p:cNvSpPr txBox="1"/>
           <p:nvPr/>
         </p:nvSpPr>
         <p:spPr>
           <a:xfrm>
-            <a:off x="1005840" y="2286000"/>
-            <a:ext cx="1920240" cy="3383280"/>
+            <a:off x="731520" y="2011680"/>
+            <a:ext cx="10698480" cy="4114800"/>
           </a:xfrm>
           <a:prstGeom prst="rect">
             <a:avLst/>
@@ -4742,106 +4749,73 @@
           <a:lstStyle/>
           <a:p>
             <a:pPr>
+              <a:lnSpc>
+                <a:spcPct val="125000"/>
+              </a:lnSpc>
               <a:spcAft>
-                <a:spcPts val="1000"/>
+                <a:spcPts val="1400"/>
               </a:spcAft>
-              <a:defRPr sz="3600" b="1">
-                <a:solidFill>
-                  <a:srgbClr val="2563EB"/>
-                </a:solidFill>
-                <a:latin typeface="Calibri"/>
-              </a:defRPr>
-            </a:pPr>
-            <a:r>
-              <a:t>38%</a:t>
-            </a:r>
-          </a:p>
-          <a:p>
-            <a:pPr>
+              <a:defRPr sz="1500">
+                <a:solidFill>
+                  <a:srgbClr val="1E293B"/>
+                </a:solidFill>
+                <a:latin typeface="Calibri"/>
+              </a:defRPr>
+            </a:pPr>
+            <a:r>
+              <a:t>•  38% reduction in average trailer turnaround time</a:t>
+            </a:r>
+          </a:p>
+          <a:p>
+            <a:pPr>
+              <a:lnSpc>
+                <a:spcPct val="125000"/>
+              </a:lnSpc>
               <a:spcAft>
-                <a:spcPts val="800"/>
+                <a:spcPts val="1400"/>
               </a:spcAft>
-              <a:defRPr sz="1400" b="1">
-                <a:solidFill>
-                  <a:srgbClr val="0F172A"/>
-                </a:solidFill>
-                <a:latin typeface="Calibri"/>
-              </a:defRPr>
-            </a:pPr>
-            <a:r>
-              <a:t>Turn Time Reduction</a:t>
-            </a:r>
-          </a:p>
-          <a:p>
-            <a:pPr>
-              <a:defRPr sz="1100">
-                <a:solidFill>
-                  <a:srgbClr val="64748B"/>
-                </a:solidFill>
-                <a:latin typeface="Calibri"/>
-              </a:defRPr>
-            </a:pPr>
-            <a:r>
-              <a:t>From 114 minutes down to 71 minutes per trailer</a:t>
-            </a:r>
-          </a:p>
-        </p:txBody>
-      </p:sp>
-      <p:sp>
-        <p:nvSpPr>
-          <p:cNvPr id="7" name="Rounded Rectangle 6"/>
-          <p:cNvSpPr/>
-          <p:nvPr/>
-        </p:nvSpPr>
-        <p:spPr>
-          <a:xfrm>
-            <a:off x="3474720" y="1920240"/>
-            <a:ext cx="2468880" cy="4114800"/>
-          </a:xfrm>
-          <a:prstGeom prst="roundRect">
-            <a:avLst/>
-          </a:prstGeom>
-          <a:solidFill>
-            <a:srgbClr val="F8FAFC"/>
-          </a:solidFill>
-          <a:ln w="12700">
-            <a:solidFill>
-              <a:srgbClr val="CBD5E1"/>
-            </a:solidFill>
-          </a:ln>
-        </p:spPr>
-        <p:style>
-          <a:lnRef idx="1">
-            <a:schemeClr val="accent1"/>
-          </a:lnRef>
-          <a:fillRef idx="3">
-            <a:schemeClr val="accent1"/>
-          </a:fillRef>
-          <a:effectRef idx="2">
-            <a:schemeClr val="accent1"/>
-          </a:effectRef>
-          <a:fontRef idx="minor">
-            <a:schemeClr val="lt1"/>
-          </a:fontRef>
-        </p:style>
-        <p:txBody>
-          <a:bodyPr rtlCol="0" anchor="ctr"/>
-          <a:lstStyle/>
-          <a:p>
-            <a:pPr algn="ctr"/>
-          </a:p>
-        </p:txBody>
-      </p:sp>
-      <p:sp>
-        <p:nvSpPr>
-          <p:cNvPr id="8" name="TextBox 7"/>
+              <a:defRPr sz="1500">
+                <a:solidFill>
+                  <a:srgbClr val="1E293B"/>
+                </a:solidFill>
+                <a:latin typeface="Calibri"/>
+              </a:defRPr>
+            </a:pPr>
+            <a:r>
+              <a:t>•  14 hours per week saved per dispatcher</a:t>
+            </a:r>
+          </a:p>
+          <a:p>
+            <a:pPr>
+              <a:lnSpc>
+                <a:spcPct val="125000"/>
+              </a:lnSpc>
+              <a:spcAft>
+                <a:spcPts val="1400"/>
+              </a:spcAft>
+              <a:defRPr sz="1500">
+                <a:solidFill>
+                  <a:srgbClr val="1E293B"/>
+                </a:solidFill>
+                <a:latin typeface="Calibri"/>
+              </a:defRPr>
+            </a:pPr>
+            <a:r>
+              <a:t>•  Zero lost paperwork across 18,000 consecutive pallet transfers</a:t>
+            </a:r>
+          </a:p>
+        </p:txBody>
+      </p:sp>
+      <p:sp>
+        <p:nvSpPr>
+          <p:cNvPr id="6" name="TextBox 5"/>
           <p:cNvSpPr txBox="1"/>
           <p:nvPr/>
         </p:nvSpPr>
         <p:spPr>
           <a:xfrm>
-            <a:off x="3749040" y="2286000"/>
-            <a:ext cx="1920240" cy="3383280"/>
+            <a:off x="731520" y="6309360"/>
+            <a:ext cx="10698480" cy="365760"/>
           </a:xfrm>
           <a:prstGeom prst="rect">
             <a:avLst/>
@@ -4849,300 +4823,6 @@
           <a:noFill/>
         </p:spPr>
         <p:txBody>
-          <a:bodyPr wrap="square">
-            <a:spAutoFit/>
-          </a:bodyPr>
-          <a:lstStyle/>
-          <a:p>
-            <a:pPr>
-              <a:spcAft>
-                <a:spcPts val="1000"/>
-              </a:spcAft>
-              <a:defRPr sz="3600" b="1">
-                <a:solidFill>
-                  <a:srgbClr val="2563EB"/>
-                </a:solidFill>
-                <a:latin typeface="Calibri"/>
-              </a:defRPr>
-            </a:pPr>
-            <a:r>
-              <a:t>$184k</a:t>
-            </a:r>
-          </a:p>
-          <a:p>
-            <a:pPr>
-              <a:spcAft>
-                <a:spcPts val="800"/>
-              </a:spcAft>
-              <a:defRPr sz="1400" b="1">
-                <a:solidFill>
-                  <a:srgbClr val="0F172A"/>
-                </a:solidFill>
-                <a:latin typeface="Calibri"/>
-              </a:defRPr>
-            </a:pPr>
-            <a:r>
-              <a:t>Demurrage Savings</a:t>
-            </a:r>
-          </a:p>
-          <a:p>
-            <a:pPr>
-              <a:defRPr sz="1100">
-                <a:solidFill>
-                  <a:srgbClr val="64748B"/>
-                </a:solidFill>
-                <a:latin typeface="Calibri"/>
-              </a:defRPr>
-            </a:pPr>
-            <a:r>
-              <a:t>41% drop in carrier detention claims in quarter one</a:t>
-            </a:r>
-          </a:p>
-        </p:txBody>
-      </p:sp>
-      <p:sp>
-        <p:nvSpPr>
-          <p:cNvPr id="9" name="Rounded Rectangle 8"/>
-          <p:cNvSpPr/>
-          <p:nvPr/>
-        </p:nvSpPr>
-        <p:spPr>
-          <a:xfrm>
-            <a:off x="6217920" y="1920240"/>
-            <a:ext cx="2468880" cy="4114800"/>
-          </a:xfrm>
-          <a:prstGeom prst="roundRect">
-            <a:avLst/>
-          </a:prstGeom>
-          <a:solidFill>
-            <a:srgbClr val="F8FAFC"/>
-          </a:solidFill>
-          <a:ln w="12700">
-            <a:solidFill>
-              <a:srgbClr val="CBD5E1"/>
-            </a:solidFill>
-          </a:ln>
-        </p:spPr>
-        <p:style>
-          <a:lnRef idx="1">
-            <a:schemeClr val="accent1"/>
-          </a:lnRef>
-          <a:fillRef idx="3">
-            <a:schemeClr val="accent1"/>
-          </a:fillRef>
-          <a:effectRef idx="2">
-            <a:schemeClr val="accent1"/>
-          </a:effectRef>
-          <a:fontRef idx="minor">
-            <a:schemeClr val="lt1"/>
-          </a:fontRef>
-        </p:style>
-        <p:txBody>
-          <a:bodyPr rtlCol="0" anchor="ctr"/>
-          <a:lstStyle/>
-          <a:p>
-            <a:pPr algn="ctr"/>
-          </a:p>
-        </p:txBody>
-      </p:sp>
-      <p:sp>
-        <p:nvSpPr>
-          <p:cNvPr id="10" name="TextBox 9"/>
-          <p:cNvSpPr txBox="1"/>
-          <p:nvPr/>
-        </p:nvSpPr>
-        <p:spPr>
-          <a:xfrm>
-            <a:off x="6492240" y="2286000"/>
-            <a:ext cx="1920240" cy="3383280"/>
-          </a:xfrm>
-          <a:prstGeom prst="rect">
-            <a:avLst/>
-          </a:prstGeom>
-          <a:noFill/>
-        </p:spPr>
-        <p:txBody>
-          <a:bodyPr wrap="square">
-            <a:spAutoFit/>
-          </a:bodyPr>
-          <a:lstStyle/>
-          <a:p>
-            <a:pPr>
-              <a:spcAft>
-                <a:spcPts val="1000"/>
-              </a:spcAft>
-              <a:defRPr sz="3600" b="1">
-                <a:solidFill>
-                  <a:srgbClr val="2563EB"/>
-                </a:solidFill>
-                <a:latin typeface="Calibri"/>
-              </a:defRPr>
-            </a:pPr>
-            <a:r>
-              <a:t>100%</a:t>
-            </a:r>
-          </a:p>
-          <a:p>
-            <a:pPr>
-              <a:spcAft>
-                <a:spcPts val="800"/>
-              </a:spcAft>
-              <a:defRPr sz="1400" b="1">
-                <a:solidFill>
-                  <a:srgbClr val="0F172A"/>
-                </a:solidFill>
-                <a:latin typeface="Calibri"/>
-              </a:defRPr>
-            </a:pPr>
-            <a:r>
-              <a:t>Audit Compliance</a:t>
-            </a:r>
-          </a:p>
-          <a:p>
-            <a:pPr>
-              <a:defRPr sz="1100">
-                <a:solidFill>
-                  <a:srgbClr val="64748B"/>
-                </a:solidFill>
-                <a:latin typeface="Calibri"/>
-              </a:defRPr>
-            </a:pPr>
-            <a:r>
-              <a:t>Zero lost shipping documents across 18,400 transfers</a:t>
-            </a:r>
-          </a:p>
-        </p:txBody>
-      </p:sp>
-      <p:sp>
-        <p:nvSpPr>
-          <p:cNvPr id="11" name="Rounded Rectangle 10"/>
-          <p:cNvSpPr/>
-          <p:nvPr/>
-        </p:nvSpPr>
-        <p:spPr>
-          <a:xfrm>
-            <a:off x="8961120" y="1920240"/>
-            <a:ext cx="2468880" cy="4114800"/>
-          </a:xfrm>
-          <a:prstGeom prst="roundRect">
-            <a:avLst/>
-          </a:prstGeom>
-          <a:solidFill>
-            <a:srgbClr val="F8FAFC"/>
-          </a:solidFill>
-          <a:ln w="12700">
-            <a:solidFill>
-              <a:srgbClr val="CBD5E1"/>
-            </a:solidFill>
-          </a:ln>
-        </p:spPr>
-        <p:style>
-          <a:lnRef idx="1">
-            <a:schemeClr val="accent1"/>
-          </a:lnRef>
-          <a:fillRef idx="3">
-            <a:schemeClr val="accent1"/>
-          </a:fillRef>
-          <a:effectRef idx="2">
-            <a:schemeClr val="accent1"/>
-          </a:effectRef>
-          <a:fontRef idx="minor">
-            <a:schemeClr val="lt1"/>
-          </a:fontRef>
-        </p:style>
-        <p:txBody>
-          <a:bodyPr rtlCol="0" anchor="ctr"/>
-          <a:lstStyle/>
-          <a:p>
-            <a:pPr algn="ctr"/>
-          </a:p>
-        </p:txBody>
-      </p:sp>
-      <p:sp>
-        <p:nvSpPr>
-          <p:cNvPr id="12" name="TextBox 11"/>
-          <p:cNvSpPr txBox="1"/>
-          <p:nvPr/>
-        </p:nvSpPr>
-        <p:spPr>
-          <a:xfrm>
-            <a:off x="9235440" y="2286000"/>
-            <a:ext cx="1920240" cy="3383280"/>
-          </a:xfrm>
-          <a:prstGeom prst="rect">
-            <a:avLst/>
-          </a:prstGeom>
-          <a:noFill/>
-        </p:spPr>
-        <p:txBody>
-          <a:bodyPr wrap="square">
-            <a:spAutoFit/>
-          </a:bodyPr>
-          <a:lstStyle/>
-          <a:p>
-            <a:pPr>
-              <a:spcAft>
-                <a:spcPts val="1000"/>
-              </a:spcAft>
-              <a:defRPr sz="3600" b="1">
-                <a:solidFill>
-                  <a:srgbClr val="2563EB"/>
-                </a:solidFill>
-                <a:latin typeface="Calibri"/>
-              </a:defRPr>
-            </a:pPr>
-            <a:r>
-              <a:t>60 Days</a:t>
-            </a:r>
-          </a:p>
-          <a:p>
-            <a:pPr>
-              <a:spcAft>
-                <a:spcPts val="800"/>
-              </a:spcAft>
-              <a:defRPr sz="1400" b="1">
-                <a:solidFill>
-                  <a:srgbClr val="0F172A"/>
-                </a:solidFill>
-                <a:latin typeface="Calibri"/>
-              </a:defRPr>
-            </a:pPr>
-            <a:r>
-              <a:t>Cash Payback Window</a:t>
-            </a:r>
-          </a:p>
-          <a:p>
-            <a:pPr>
-              <a:defRPr sz="1100">
-                <a:solidFill>
-                  <a:srgbClr val="64748B"/>
-                </a:solidFill>
-                <a:latin typeface="Calibri"/>
-              </a:defRPr>
-            </a:pPr>
-            <a:r>
-              <a:t>Platform investment fully recovered in two months</a:t>
-            </a:r>
-          </a:p>
-        </p:txBody>
-      </p:sp>
-      <p:sp>
-        <p:nvSpPr>
-          <p:cNvPr id="13" name="TextBox 12"/>
-          <p:cNvSpPr txBox="1"/>
-          <p:nvPr/>
-        </p:nvSpPr>
-        <p:spPr>
-          <a:xfrm>
-            <a:off x="731520" y="6309360"/>
-            <a:ext cx="10698480" cy="365760"/>
-          </a:xfrm>
-          <a:prstGeom prst="rect">
-            <a:avLst/>
-          </a:prstGeom>
-          <a:noFill/>
-        </p:spPr>
-        <p:txBody>
           <a:bodyPr wrap="none">
             <a:spAutoFit/>
           </a:bodyPr>
@@ -5157,7 +4837,7 @@
               </a:defRPr>
             </a:pPr>
             <a:r>
-              <a:t>DockStream Enterprise — Outbound Logistics Presentation · Slide 4 of 5</a:t>
+              <a:t>Enterprise Logistics Automation Deck — Jack Johnson (12 Slides) · Slide 4 of 12</a:t>
             </a:r>
           </a:p>
         </p:txBody>
@@ -5257,7 +4937,7 @@
               </a:defRPr>
             </a:pPr>
             <a:r>
-              <a:t>COMMERCIAL PRICING</a:t>
+              <a:t>ENTERPRISE LOGISTICS AUTOMATION DECK — JACK JOHNSO</a:t>
             </a:r>
           </a:p>
           <a:p>
@@ -5270,23 +4950,7 @@
               </a:defRPr>
             </a:pPr>
             <a:r>
-              <a:t>Predictable, High-ROI Commercial Tiering</a:t>
-            </a:r>
-          </a:p>
-          <a:p>
-            <a:pPr>
-              <a:spcBef>
-                <a:spcPts val="200"/>
-              </a:spcBef>
-              <a:defRPr sz="1200">
-                <a:solidFill>
-                  <a:srgbClr val="64748B"/>
-                </a:solidFill>
-                <a:latin typeface="Calibri"/>
-              </a:defRPr>
-            </a:pPr>
-            <a:r>
-              <a:t>Simple transparent licensing based on terminal size and load throughput</a:t>
+              <a:t>Architecture &amp; Enterprise Security</a:t>
             </a:r>
           </a:p>
         </p:txBody>
@@ -5336,25 +5000,157 @@
       </p:sp>
       <p:sp>
         <p:nvSpPr>
-          <p:cNvPr id="5" name="Rounded Rectangle 4"/>
+          <p:cNvPr id="5" name="TextBox 4"/>
+          <p:cNvSpPr txBox="1"/>
+          <p:nvPr/>
+        </p:nvSpPr>
+        <p:spPr>
+          <a:xfrm>
+            <a:off x="731520" y="2011680"/>
+            <a:ext cx="10698480" cy="4114800"/>
+          </a:xfrm>
+          <a:prstGeom prst="rect">
+            <a:avLst/>
+          </a:prstGeom>
+          <a:noFill/>
+        </p:spPr>
+        <p:txBody>
+          <a:bodyPr wrap="square">
+            <a:spAutoFit/>
+          </a:bodyPr>
+          <a:lstStyle/>
+          <a:p>
+            <a:pPr>
+              <a:lnSpc>
+                <a:spcPct val="125000"/>
+              </a:lnSpc>
+              <a:spcAft>
+                <a:spcPts val="1400"/>
+              </a:spcAft>
+              <a:defRPr sz="1500">
+                <a:solidFill>
+                  <a:srgbClr val="1E293B"/>
+                </a:solidFill>
+                <a:latin typeface="Calibri"/>
+              </a:defRPr>
+            </a:pPr>
+            <a:r>
+              <a:t>•  Cloud-native microservices with 99.99% uptime guarantee</a:t>
+            </a:r>
+          </a:p>
+          <a:p>
+            <a:pPr>
+              <a:lnSpc>
+                <a:spcPct val="125000"/>
+              </a:lnSpc>
+              <a:spcAft>
+                <a:spcPts val="1400"/>
+              </a:spcAft>
+              <a:defRPr sz="1500">
+                <a:solidFill>
+                  <a:srgbClr val="1E293B"/>
+                </a:solidFill>
+                <a:latin typeface="Calibri"/>
+              </a:defRPr>
+            </a:pPr>
+            <a:r>
+              <a:t>•  SOC2 Type II certified with end-to-end 256-bit AES encryption</a:t>
+            </a:r>
+          </a:p>
+          <a:p>
+            <a:pPr>
+              <a:lnSpc>
+                <a:spcPct val="125000"/>
+              </a:lnSpc>
+              <a:spcAft>
+                <a:spcPts val="1400"/>
+              </a:spcAft>
+              <a:defRPr sz="1500">
+                <a:solidFill>
+                  <a:srgbClr val="1E293B"/>
+                </a:solidFill>
+                <a:latin typeface="Calibri"/>
+              </a:defRPr>
+            </a:pPr>
+            <a:r>
+              <a:t>•  Native bi-directional API connectors for SAP, Oracle TMS, and Blue Yonder</a:t>
+            </a:r>
+          </a:p>
+        </p:txBody>
+      </p:sp>
+      <p:sp>
+        <p:nvSpPr>
+          <p:cNvPr id="6" name="TextBox 5"/>
+          <p:cNvSpPr txBox="1"/>
+          <p:nvPr/>
+        </p:nvSpPr>
+        <p:spPr>
+          <a:xfrm>
+            <a:off x="731520" y="6309360"/>
+            <a:ext cx="10698480" cy="365760"/>
+          </a:xfrm>
+          <a:prstGeom prst="rect">
+            <a:avLst/>
+          </a:prstGeom>
+          <a:noFill/>
+        </p:spPr>
+        <p:txBody>
+          <a:bodyPr wrap="none">
+            <a:spAutoFit/>
+          </a:bodyPr>
+          <a:lstStyle/>
+          <a:p>
+            <a:pPr>
+              <a:defRPr sz="900">
+                <a:solidFill>
+                  <a:srgbClr val="94A3B8"/>
+                </a:solidFill>
+                <a:latin typeface="Calibri"/>
+              </a:defRPr>
+            </a:pPr>
+            <a:r>
+              <a:t>Enterprise Logistics Automation Deck — Jack Johnson (12 Slides) · Slide 5 of 12</a:t>
+            </a:r>
+          </a:p>
+        </p:txBody>
+      </p:sp>
+    </p:spTree>
+  </p:cSld>
+  <p:clrMapOvr>
+    <a:masterClrMapping/>
+  </p:clrMapOvr>
+</p:sld>
+</file>
+
+<file path=ppt/slides/slide6.xml><?xml version="1.0" encoding="utf-8"?>
+<p:sld xmlns:a="http://schemas.openxmlformats.org/drawingml/2006/main" xmlns:p="http://schemas.openxmlformats.org/presentationml/2006/main" xmlns:r="http://schemas.openxmlformats.org/officeDocument/2006/relationships">
+  <p:cSld>
+    <p:spTree>
+      <p:nvGrpSpPr>
+        <p:cNvPr id="1" name=""/>
+        <p:cNvGrpSpPr/>
+        <p:nvPr/>
+      </p:nvGrpSpPr>
+      <p:grpSpPr/>
+      <p:sp>
+        <p:nvSpPr>
+          <p:cNvPr id="2" name="Rectangle 1"/>
           <p:cNvSpPr/>
           <p:nvPr/>
         </p:nvSpPr>
         <p:spPr>
           <a:xfrm>
-            <a:off x="731520" y="1920240"/>
-            <a:ext cx="3352800" cy="4114800"/>
-          </a:xfrm>
-          <a:prstGeom prst="roundRect">
+            <a:off x="0" y="0"/>
+            <a:ext cx="12191695" cy="6858000"/>
+          </a:xfrm>
+          <a:prstGeom prst="rect">
             <a:avLst/>
           </a:prstGeom>
           <a:solidFill>
-            <a:srgbClr val="F8FAFC"/>
+            <a:srgbClr val="FFFFFF"/>
           </a:solidFill>
-          <a:ln w="12700">
-            <a:solidFill>
-              <a:srgbClr val="CBD5E1"/>
-            </a:solidFill>
+          <a:ln>
+            <a:noFill/>
           </a:ln>
         </p:spPr>
         <p:style>
@@ -5381,14 +5177,14 @@
       </p:sp>
       <p:sp>
         <p:nvSpPr>
-          <p:cNvPr id="6" name="TextBox 5"/>
+          <p:cNvPr id="3" name="TextBox 2"/>
           <p:cNvSpPr txBox="1"/>
           <p:nvPr/>
         </p:nvSpPr>
         <p:spPr>
           <a:xfrm>
-            <a:off x="1005840" y="2194560"/>
-            <a:ext cx="2804160" cy="3566160"/>
+            <a:off x="731520" y="548640"/>
+            <a:ext cx="10698480" cy="1188720"/>
           </a:xfrm>
           <a:prstGeom prst="rect">
             <a:avLst/>
@@ -5403,9 +5199,22 @@
           <a:p>
             <a:pPr>
               <a:spcAft>
-                <a:spcPts val="1000"/>
+                <a:spcPts val="400"/>
               </a:spcAft>
-              <a:defRPr sz="1500" b="1">
+              <a:defRPr sz="1000" b="1">
+                <a:solidFill>
+                  <a:srgbClr val="2563EB"/>
+                </a:solidFill>
+                <a:latin typeface="Calibri"/>
+              </a:defRPr>
+            </a:pPr>
+            <a:r>
+              <a:t>ENTERPRISE LOGISTICS AUTOMATION DECK — JACK JOHNSO</a:t>
+            </a:r>
+          </a:p>
+          <a:p>
+            <a:pPr>
+              <a:defRPr sz="2200" b="1">
                 <a:solidFill>
                   <a:srgbClr val="0F172A"/>
                 </a:solidFill>
@@ -5413,80 +5222,30 @@
               </a:defRPr>
             </a:pPr>
             <a:r>
-              <a:t>Standard Hub ($14,400/yr)</a:t>
-            </a:r>
-          </a:p>
-          <a:p>
-            <a:pPr>
-              <a:spcAft>
-                <a:spcPts val="600"/>
-              </a:spcAft>
-              <a:defRPr sz="1100">
-                <a:solidFill>
-                  <a:srgbClr val="334155"/>
-                </a:solidFill>
-                <a:latin typeface="Calibri"/>
-              </a:defRPr>
-            </a:pPr>
-            <a:r>
-              <a:t>•  Single terminal with up to 20 dock doors</a:t>
-            </a:r>
-          </a:p>
-          <a:p>
-            <a:pPr>
-              <a:spcAft>
-                <a:spcPts val="600"/>
-              </a:spcAft>
-              <a:defRPr sz="1100">
-                <a:solidFill>
-                  <a:srgbClr val="334155"/>
-                </a:solidFill>
-                <a:latin typeface="Calibri"/>
-              </a:defRPr>
-            </a:pPr>
-            <a:r>
-              <a:t>•  Mobile driver intake &amp; e-BOL generation</a:t>
-            </a:r>
-          </a:p>
-          <a:p>
-            <a:pPr>
-              <a:spcAft>
-                <a:spcPts val="600"/>
-              </a:spcAft>
-              <a:defRPr sz="1100">
-                <a:solidFill>
-                  <a:srgbClr val="334155"/>
-                </a:solidFill>
-                <a:latin typeface="Calibri"/>
-              </a:defRPr>
-            </a:pPr>
-            <a:r>
-              <a:t>•  Standard email support and 99.9% uptime SLA</a:t>
-            </a:r>
-          </a:p>
-        </p:txBody>
-      </p:sp>
-      <p:sp>
-        <p:nvSpPr>
-          <p:cNvPr id="7" name="Rounded Rectangle 6"/>
+              <a:t>Driver Experience &amp; Mobile Simplicity</a:t>
+            </a:r>
+          </a:p>
+        </p:txBody>
+      </p:sp>
+      <p:sp>
+        <p:nvSpPr>
+          <p:cNvPr id="4" name="Rectangle 3"/>
           <p:cNvSpPr/>
           <p:nvPr/>
         </p:nvSpPr>
         <p:spPr>
           <a:xfrm>
-            <a:off x="4404360" y="1920240"/>
-            <a:ext cx="3352800" cy="4114800"/>
-          </a:xfrm>
-          <a:prstGeom prst="roundRect">
+            <a:off x="731520" y="1737360"/>
+            <a:ext cx="10698480" cy="13716"/>
+          </a:xfrm>
+          <a:prstGeom prst="rect">
             <a:avLst/>
           </a:prstGeom>
           <a:solidFill>
-            <a:srgbClr val="F8FAFC"/>
+            <a:srgbClr val="E2E8F0"/>
           </a:solidFill>
-          <a:ln w="12700">
-            <a:solidFill>
-              <a:srgbClr val="CBD5E1"/>
-            </a:solidFill>
+          <a:ln>
+            <a:noFill/>
           </a:ln>
         </p:spPr>
         <p:style>
@@ -5513,14 +5272,14 @@
       </p:sp>
       <p:sp>
         <p:nvSpPr>
-          <p:cNvPr id="8" name="TextBox 7"/>
+          <p:cNvPr id="5" name="TextBox 4"/>
           <p:cNvSpPr txBox="1"/>
           <p:nvPr/>
         </p:nvSpPr>
         <p:spPr>
           <a:xfrm>
-            <a:off x="4678680" y="2194560"/>
-            <a:ext cx="2804160" cy="3566160"/>
+            <a:off x="731520" y="2011680"/>
+            <a:ext cx="10698480" cy="4114800"/>
           </a:xfrm>
           <a:prstGeom prst="rect">
             <a:avLst/>
@@ -5534,91 +5293,136 @@
           <a:lstStyle/>
           <a:p>
             <a:pPr>
+              <a:lnSpc>
+                <a:spcPct val="125000"/>
+              </a:lnSpc>
               <a:spcAft>
-                <a:spcPts val="1000"/>
+                <a:spcPts val="1400"/>
               </a:spcAft>
-              <a:defRPr sz="1500" b="1">
-                <a:solidFill>
-                  <a:srgbClr val="0F172A"/>
-                </a:solidFill>
-                <a:latin typeface="Calibri"/>
-              </a:defRPr>
-            </a:pPr>
-            <a:r>
-              <a:t>Enterprise Terminal ($28,500/yr)</a:t>
-            </a:r>
-          </a:p>
-          <a:p>
-            <a:pPr>
+              <a:defRPr sz="1500">
+                <a:solidFill>
+                  <a:srgbClr val="1E293B"/>
+                </a:solidFill>
+                <a:latin typeface="Calibri"/>
+              </a:defRPr>
+            </a:pPr>
+            <a:r>
+              <a:t>•  Drivers check in via SMS link—no mobile app download required</a:t>
+            </a:r>
+          </a:p>
+          <a:p>
+            <a:pPr>
+              <a:lnSpc>
+                <a:spcPct val="125000"/>
+              </a:lnSpc>
               <a:spcAft>
-                <a:spcPts val="600"/>
+                <a:spcPts val="1400"/>
               </a:spcAft>
-              <a:defRPr sz="1100">
-                <a:solidFill>
-                  <a:srgbClr val="334155"/>
-                </a:solidFill>
-                <a:latin typeface="Calibri"/>
-              </a:defRPr>
-            </a:pPr>
-            <a:r>
-              <a:t>•  High-volume regional hub (20–60 doors)</a:t>
-            </a:r>
-          </a:p>
-          <a:p>
-            <a:pPr>
+              <a:defRPr sz="1500">
+                <a:solidFill>
+                  <a:srgbClr val="1E293B"/>
+                </a:solidFill>
+                <a:latin typeface="Calibri"/>
+              </a:defRPr>
+            </a:pPr>
+            <a:r>
+              <a:t>•  Multi-language support (English, Spanish, Polish)</a:t>
+            </a:r>
+          </a:p>
+          <a:p>
+            <a:pPr>
+              <a:lnSpc>
+                <a:spcPct val="125000"/>
+              </a:lnSpc>
               <a:spcAft>
-                <a:spcPts val="600"/>
+                <a:spcPts val="1400"/>
               </a:spcAft>
-              <a:defRPr sz="1100">
-                <a:solidFill>
-                  <a:srgbClr val="334155"/>
-                </a:solidFill>
-                <a:latin typeface="Calibri"/>
-              </a:defRPr>
-            </a:pPr>
-            <a:r>
-              <a:t>•  Dynamic yard slotting &amp; demurrage countdown</a:t>
-            </a:r>
-          </a:p>
-          <a:p>
-            <a:pPr>
-              <a:spcAft>
-                <a:spcPts val="600"/>
-              </a:spcAft>
-              <a:defRPr sz="1100">
-                <a:solidFill>
-                  <a:srgbClr val="334155"/>
-                </a:solidFill>
-                <a:latin typeface="Calibri"/>
-              </a:defRPr>
-            </a:pPr>
-            <a:r>
-              <a:t>•  Native SAP / Oracle TMS integration modules</a:t>
-            </a:r>
-          </a:p>
-        </p:txBody>
-      </p:sp>
-      <p:sp>
-        <p:nvSpPr>
-          <p:cNvPr id="9" name="Rounded Rectangle 8"/>
+              <a:defRPr sz="1500">
+                <a:solidFill>
+                  <a:srgbClr val="1E293B"/>
+                </a:solidFill>
+                <a:latin typeface="Calibri"/>
+              </a:defRPr>
+            </a:pPr>
+            <a:r>
+              <a:t>•  Digital bill of lading signed on glass in under 30 seconds</a:t>
+            </a:r>
+          </a:p>
+        </p:txBody>
+      </p:sp>
+      <p:sp>
+        <p:nvSpPr>
+          <p:cNvPr id="6" name="TextBox 5"/>
+          <p:cNvSpPr txBox="1"/>
+          <p:nvPr/>
+        </p:nvSpPr>
+        <p:spPr>
+          <a:xfrm>
+            <a:off x="731520" y="6309360"/>
+            <a:ext cx="10698480" cy="365760"/>
+          </a:xfrm>
+          <a:prstGeom prst="rect">
+            <a:avLst/>
+          </a:prstGeom>
+          <a:noFill/>
+        </p:spPr>
+        <p:txBody>
+          <a:bodyPr wrap="none">
+            <a:spAutoFit/>
+          </a:bodyPr>
+          <a:lstStyle/>
+          <a:p>
+            <a:pPr>
+              <a:defRPr sz="900">
+                <a:solidFill>
+                  <a:srgbClr val="94A3B8"/>
+                </a:solidFill>
+                <a:latin typeface="Calibri"/>
+              </a:defRPr>
+            </a:pPr>
+            <a:r>
+              <a:t>Enterprise Logistics Automation Deck — Jack Johnson (12 Slides) · Slide 6 of 12</a:t>
+            </a:r>
+          </a:p>
+        </p:txBody>
+      </p:sp>
+    </p:spTree>
+  </p:cSld>
+  <p:clrMapOvr>
+    <a:masterClrMapping/>
+  </p:clrMapOvr>
+</p:sld>
+</file>
+
+<file path=ppt/slides/slide7.xml><?xml version="1.0" encoding="utf-8"?>
+<p:sld xmlns:a="http://schemas.openxmlformats.org/drawingml/2006/main" xmlns:p="http://schemas.openxmlformats.org/presentationml/2006/main" xmlns:r="http://schemas.openxmlformats.org/officeDocument/2006/relationships">
+  <p:cSld>
+    <p:spTree>
+      <p:nvGrpSpPr>
+        <p:cNvPr id="1" name=""/>
+        <p:cNvGrpSpPr/>
+        <p:nvPr/>
+      </p:nvGrpSpPr>
+      <p:grpSpPr/>
+      <p:sp>
+        <p:nvSpPr>
+          <p:cNvPr id="2" name="Rectangle 1"/>
           <p:cNvSpPr/>
           <p:nvPr/>
         </p:nvSpPr>
         <p:spPr>
           <a:xfrm>
-            <a:off x="8077200" y="1920240"/>
-            <a:ext cx="3352800" cy="4114800"/>
-          </a:xfrm>
-          <a:prstGeom prst="roundRect">
+            <a:off x="0" y="0"/>
+            <a:ext cx="12191695" cy="6858000"/>
+          </a:xfrm>
+          <a:prstGeom prst="rect">
             <a:avLst/>
           </a:prstGeom>
           <a:solidFill>
-            <a:srgbClr val="F8FAFC"/>
+            <a:srgbClr val="FFFFFF"/>
           </a:solidFill>
-          <a:ln w="12700">
-            <a:solidFill>
-              <a:srgbClr val="CBD5E1"/>
-            </a:solidFill>
+          <a:ln>
+            <a:noFill/>
           </a:ln>
         </p:spPr>
         <p:style>
@@ -5645,14 +5449,14 @@
       </p:sp>
       <p:sp>
         <p:nvSpPr>
-          <p:cNvPr id="10" name="TextBox 9"/>
+          <p:cNvPr id="3" name="TextBox 2"/>
           <p:cNvSpPr txBox="1"/>
           <p:nvPr/>
         </p:nvSpPr>
         <p:spPr>
           <a:xfrm>
-            <a:off x="8351520" y="2194560"/>
-            <a:ext cx="2804160" cy="3566160"/>
+            <a:off x="731520" y="548640"/>
+            <a:ext cx="10698480" cy="1188720"/>
           </a:xfrm>
           <a:prstGeom prst="rect">
             <a:avLst/>
@@ -5667,9 +5471,22 @@
           <a:p>
             <a:pPr>
               <a:spcAft>
-                <a:spcPts val="1000"/>
+                <a:spcPts val="400"/>
               </a:spcAft>
-              <a:defRPr sz="1500" b="1">
+              <a:defRPr sz="1000" b="1">
+                <a:solidFill>
+                  <a:srgbClr val="2563EB"/>
+                </a:solidFill>
+                <a:latin typeface="Calibri"/>
+              </a:defRPr>
+            </a:pPr>
+            <a:r>
+              <a:t>ENTERPRISE LOGISTICS AUTOMATION DECK — JACK JOHNSO</a:t>
+            </a:r>
+          </a:p>
+          <a:p>
+            <a:pPr>
+              <a:defRPr sz="2200" b="1">
                 <a:solidFill>
                   <a:srgbClr val="0F172A"/>
                 </a:solidFill>
@@ -5677,69 +5494,64 @@
               </a:defRPr>
             </a:pPr>
             <a:r>
-              <a:t>Multi-Site Network ($54,000/yr)</a:t>
-            </a:r>
-          </a:p>
-          <a:p>
-            <a:pPr>
-              <a:spcAft>
-                <a:spcPts val="600"/>
-              </a:spcAft>
-              <a:defRPr sz="1100">
-                <a:solidFill>
-                  <a:srgbClr val="334155"/>
-                </a:solidFill>
-                <a:latin typeface="Calibri"/>
-              </a:defRPr>
-            </a:pPr>
-            <a:r>
-              <a:t>•  Enterprise carrier network with 60+ doors</a:t>
-            </a:r>
-          </a:p>
-          <a:p>
-            <a:pPr>
-              <a:spcAft>
-                <a:spcPts val="600"/>
-              </a:spcAft>
-              <a:defRPr sz="1100">
-                <a:solidFill>
-                  <a:srgbClr val="334155"/>
-                </a:solidFill>
-                <a:latin typeface="Calibri"/>
-              </a:defRPr>
-            </a:pPr>
-            <a:r>
-              <a:t>•  Custom EDI bridges &amp; dedicated solution architect</a:t>
-            </a:r>
-          </a:p>
-          <a:p>
-            <a:pPr>
-              <a:spcAft>
-                <a:spcPts val="600"/>
-              </a:spcAft>
-              <a:defRPr sz="1100">
-                <a:solidFill>
-                  <a:srgbClr val="334155"/>
-                </a:solidFill>
-                <a:latin typeface="Calibri"/>
-              </a:defRPr>
-            </a:pPr>
-            <a:r>
-              <a:t>•  99.95% uptime SLA with 24/7 dedicated telephone support</a:t>
-            </a:r>
-          </a:p>
-        </p:txBody>
-      </p:sp>
-      <p:sp>
-        <p:nvSpPr>
-          <p:cNvPr id="11" name="TextBox 10"/>
+              <a:t>Real-Time Facility Operations Dashboard</a:t>
+            </a:r>
+          </a:p>
+        </p:txBody>
+      </p:sp>
+      <p:sp>
+        <p:nvSpPr>
+          <p:cNvPr id="4" name="Rectangle 3"/>
+          <p:cNvSpPr/>
+          <p:nvPr/>
+        </p:nvSpPr>
+        <p:spPr>
+          <a:xfrm>
+            <a:off x="731520" y="1737360"/>
+            <a:ext cx="10698480" cy="13716"/>
+          </a:xfrm>
+          <a:prstGeom prst="rect">
+            <a:avLst/>
+          </a:prstGeom>
+          <a:solidFill>
+            <a:srgbClr val="E2E8F0"/>
+          </a:solidFill>
+          <a:ln>
+            <a:noFill/>
+          </a:ln>
+        </p:spPr>
+        <p:style>
+          <a:lnRef idx="1">
+            <a:schemeClr val="accent1"/>
+          </a:lnRef>
+          <a:fillRef idx="3">
+            <a:schemeClr val="accent1"/>
+          </a:fillRef>
+          <a:effectRef idx="2">
+            <a:schemeClr val="accent1"/>
+          </a:effectRef>
+          <a:fontRef idx="minor">
+            <a:schemeClr val="lt1"/>
+          </a:fontRef>
+        </p:style>
+        <p:txBody>
+          <a:bodyPr rtlCol="0" anchor="ctr"/>
+          <a:lstStyle/>
+          <a:p>
+            <a:pPr algn="ctr"/>
+          </a:p>
+        </p:txBody>
+      </p:sp>
+      <p:sp>
+        <p:nvSpPr>
+          <p:cNvPr id="5" name="TextBox 4"/>
           <p:cNvSpPr txBox="1"/>
           <p:nvPr/>
         </p:nvSpPr>
         <p:spPr>
           <a:xfrm>
-            <a:off x="731520" y="6309360"/>
-            <a:ext cx="10698480" cy="365760"/>
+            <a:off x="731520" y="2011680"/>
+            <a:ext cx="10698480" cy="4114800"/>
           </a:xfrm>
           <a:prstGeom prst="rect">
             <a:avLst/>
@@ -5747,6 +5559,86 @@
           <a:noFill/>
         </p:spPr>
         <p:txBody>
+          <a:bodyPr wrap="square">
+            <a:spAutoFit/>
+          </a:bodyPr>
+          <a:lstStyle/>
+          <a:p>
+            <a:pPr>
+              <a:lnSpc>
+                <a:spcPct val="125000"/>
+              </a:lnSpc>
+              <a:spcAft>
+                <a:spcPts val="1400"/>
+              </a:spcAft>
+              <a:defRPr sz="1500">
+                <a:solidFill>
+                  <a:srgbClr val="1E293B"/>
+                </a:solidFill>
+                <a:latin typeface="Calibri"/>
+              </a:defRPr>
+            </a:pPr>
+            <a:r>
+              <a:t>•  Bird's-eye view of all active loading bays</a:t>
+            </a:r>
+          </a:p>
+          <a:p>
+            <a:pPr>
+              <a:lnSpc>
+                <a:spcPct val="125000"/>
+              </a:lnSpc>
+              <a:spcAft>
+                <a:spcPts val="1400"/>
+              </a:spcAft>
+              <a:defRPr sz="1500">
+                <a:solidFill>
+                  <a:srgbClr val="1E293B"/>
+                </a:solidFill>
+                <a:latin typeface="Calibri"/>
+              </a:defRPr>
+            </a:pPr>
+            <a:r>
+              <a:t>•  Predictive demurrage alerts 45 minutes before detention penalties trigger</a:t>
+            </a:r>
+          </a:p>
+          <a:p>
+            <a:pPr>
+              <a:lnSpc>
+                <a:spcPct val="125000"/>
+              </a:lnSpc>
+              <a:spcAft>
+                <a:spcPts val="1400"/>
+              </a:spcAft>
+              <a:defRPr sz="1500">
+                <a:solidFill>
+                  <a:srgbClr val="1E293B"/>
+                </a:solidFill>
+                <a:latin typeface="Calibri"/>
+              </a:defRPr>
+            </a:pPr>
+            <a:r>
+              <a:t>•  Automated shift performance and throughput reports</a:t>
+            </a:r>
+          </a:p>
+        </p:txBody>
+      </p:sp>
+      <p:sp>
+        <p:nvSpPr>
+          <p:cNvPr id="6" name="TextBox 5"/>
+          <p:cNvSpPr txBox="1"/>
+          <p:nvPr/>
+        </p:nvSpPr>
+        <p:spPr>
+          <a:xfrm>
+            <a:off x="731520" y="6309360"/>
+            <a:ext cx="10698480" cy="365760"/>
+          </a:xfrm>
+          <a:prstGeom prst="rect">
+            <a:avLst/>
+          </a:prstGeom>
+          <a:noFill/>
+        </p:spPr>
+        <p:txBody>
           <a:bodyPr wrap="none">
             <a:spAutoFit/>
           </a:bodyPr>
@@ -5761,7 +5653,532 @@
               </a:defRPr>
             </a:pPr>
             <a:r>
-              <a:t>DockStream Enterprise — Outbound Logistics Presentation · Slide 5 of 5</a:t>
+              <a:t>Enterprise Logistics Automation Deck — Jack Johnson (12 Slides) · Slide 7 of 12</a:t>
+            </a:r>
+          </a:p>
+        </p:txBody>
+      </p:sp>
+    </p:spTree>
+  </p:cSld>
+  <p:clrMapOvr>
+    <a:masterClrMapping/>
+  </p:clrMapOvr>
+</p:sld>
+</file>
+
+<file path=ppt/slides/slide8.xml><?xml version="1.0" encoding="utf-8"?>
+<p:sld xmlns:a="http://schemas.openxmlformats.org/drawingml/2006/main" xmlns:p="http://schemas.openxmlformats.org/presentationml/2006/main" xmlns:r="http://schemas.openxmlformats.org/officeDocument/2006/relationships">
+  <p:cSld>
+    <p:spTree>
+      <p:nvGrpSpPr>
+        <p:cNvPr id="1" name=""/>
+        <p:cNvGrpSpPr/>
+        <p:nvPr/>
+      </p:nvGrpSpPr>
+      <p:grpSpPr/>
+      <p:sp>
+        <p:nvSpPr>
+          <p:cNvPr id="2" name="Rectangle 1"/>
+          <p:cNvSpPr/>
+          <p:nvPr/>
+        </p:nvSpPr>
+        <p:spPr>
+          <a:xfrm>
+            <a:off x="0" y="0"/>
+            <a:ext cx="12191695" cy="6858000"/>
+          </a:xfrm>
+          <a:prstGeom prst="rect">
+            <a:avLst/>
+          </a:prstGeom>
+          <a:solidFill>
+            <a:srgbClr val="FFFFFF"/>
+          </a:solidFill>
+          <a:ln>
+            <a:noFill/>
+          </a:ln>
+        </p:spPr>
+        <p:style>
+          <a:lnRef idx="1">
+            <a:schemeClr val="accent1"/>
+          </a:lnRef>
+          <a:fillRef idx="3">
+            <a:schemeClr val="accent1"/>
+          </a:fillRef>
+          <a:effectRef idx="2">
+            <a:schemeClr val="accent1"/>
+          </a:effectRef>
+          <a:fontRef idx="minor">
+            <a:schemeClr val="lt1"/>
+          </a:fontRef>
+        </p:style>
+        <p:txBody>
+          <a:bodyPr rtlCol="0" anchor="ctr"/>
+          <a:lstStyle/>
+          <a:p>
+            <a:pPr algn="ctr"/>
+          </a:p>
+        </p:txBody>
+      </p:sp>
+      <p:sp>
+        <p:nvSpPr>
+          <p:cNvPr id="3" name="TextBox 2"/>
+          <p:cNvSpPr txBox="1"/>
+          <p:nvPr/>
+        </p:nvSpPr>
+        <p:spPr>
+          <a:xfrm>
+            <a:off x="731520" y="548640"/>
+            <a:ext cx="10698480" cy="1188720"/>
+          </a:xfrm>
+          <a:prstGeom prst="rect">
+            <a:avLst/>
+          </a:prstGeom>
+          <a:noFill/>
+        </p:spPr>
+        <p:txBody>
+          <a:bodyPr wrap="square">
+            <a:spAutoFit/>
+          </a:bodyPr>
+          <a:lstStyle/>
+          <a:p>
+            <a:pPr>
+              <a:spcAft>
+                <a:spcPts val="400"/>
+              </a:spcAft>
+              <a:defRPr sz="1000" b="1">
+                <a:solidFill>
+                  <a:srgbClr val="2563EB"/>
+                </a:solidFill>
+                <a:latin typeface="Calibri"/>
+              </a:defRPr>
+            </a:pPr>
+            <a:r>
+              <a:t>ENTERPRISE LOGISTICS AUTOMATION DECK — JACK JOHNSO</a:t>
+            </a:r>
+          </a:p>
+          <a:p>
+            <a:pPr>
+              <a:defRPr sz="2200" b="1">
+                <a:solidFill>
+                  <a:srgbClr val="0F172A"/>
+                </a:solidFill>
+                <a:latin typeface="Calibri"/>
+              </a:defRPr>
+            </a:pPr>
+            <a:r>
+              <a:t>Customer Testimonial: Apex Cold Logistics</a:t>
+            </a:r>
+          </a:p>
+        </p:txBody>
+      </p:sp>
+      <p:sp>
+        <p:nvSpPr>
+          <p:cNvPr id="4" name="Rectangle 3"/>
+          <p:cNvSpPr/>
+          <p:nvPr/>
+        </p:nvSpPr>
+        <p:spPr>
+          <a:xfrm>
+            <a:off x="731520" y="1737360"/>
+            <a:ext cx="10698480" cy="13716"/>
+          </a:xfrm>
+          <a:prstGeom prst="rect">
+            <a:avLst/>
+          </a:prstGeom>
+          <a:solidFill>
+            <a:srgbClr val="E2E8F0"/>
+          </a:solidFill>
+          <a:ln>
+            <a:noFill/>
+          </a:ln>
+        </p:spPr>
+        <p:style>
+          <a:lnRef idx="1">
+            <a:schemeClr val="accent1"/>
+          </a:lnRef>
+          <a:fillRef idx="3">
+            <a:schemeClr val="accent1"/>
+          </a:fillRef>
+          <a:effectRef idx="2">
+            <a:schemeClr val="accent1"/>
+          </a:effectRef>
+          <a:fontRef idx="minor">
+            <a:schemeClr val="lt1"/>
+          </a:fontRef>
+        </p:style>
+        <p:txBody>
+          <a:bodyPr rtlCol="0" anchor="ctr"/>
+          <a:lstStyle/>
+          <a:p>
+            <a:pPr algn="ctr"/>
+          </a:p>
+        </p:txBody>
+      </p:sp>
+      <p:sp>
+        <p:nvSpPr>
+          <p:cNvPr id="5" name="TextBox 4"/>
+          <p:cNvSpPr txBox="1"/>
+          <p:nvPr/>
+        </p:nvSpPr>
+        <p:spPr>
+          <a:xfrm>
+            <a:off x="731520" y="2011680"/>
+            <a:ext cx="10698480" cy="4114800"/>
+          </a:xfrm>
+          <a:prstGeom prst="rect">
+            <a:avLst/>
+          </a:prstGeom>
+          <a:noFill/>
+        </p:spPr>
+        <p:txBody>
+          <a:bodyPr wrap="square">
+            <a:spAutoFit/>
+          </a:bodyPr>
+          <a:lstStyle/>
+          <a:p>
+            <a:pPr>
+              <a:lnSpc>
+                <a:spcPct val="125000"/>
+              </a:lnSpc>
+              <a:spcAft>
+                <a:spcPts val="1400"/>
+              </a:spcAft>
+              <a:defRPr sz="1500">
+                <a:solidFill>
+                  <a:srgbClr val="1E293B"/>
+                </a:solidFill>
+                <a:latin typeface="Calibri"/>
+              </a:defRPr>
+            </a:pPr>
+            <a:r>
+              <a:t>•  'DockStream paid for itself in reduced detention claims in month one.'</a:t>
+            </a:r>
+          </a:p>
+          <a:p>
+            <a:pPr>
+              <a:lnSpc>
+                <a:spcPct val="125000"/>
+              </a:lnSpc>
+              <a:spcAft>
+                <a:spcPts val="1400"/>
+              </a:spcAft>
+              <a:defRPr sz="1500">
+                <a:solidFill>
+                  <a:srgbClr val="1E293B"/>
+                </a:solidFill>
+                <a:latin typeface="Calibri"/>
+              </a:defRPr>
+            </a:pPr>
+            <a:r>
+              <a:t>•  - Dave Henderson, Director of Terminal Operations</a:t>
+            </a:r>
+          </a:p>
+        </p:txBody>
+      </p:sp>
+      <p:sp>
+        <p:nvSpPr>
+          <p:cNvPr id="6" name="TextBox 5"/>
+          <p:cNvSpPr txBox="1"/>
+          <p:nvPr/>
+        </p:nvSpPr>
+        <p:spPr>
+          <a:xfrm>
+            <a:off x="731520" y="6309360"/>
+            <a:ext cx="10698480" cy="365760"/>
+          </a:xfrm>
+          <a:prstGeom prst="rect">
+            <a:avLst/>
+          </a:prstGeom>
+          <a:noFill/>
+        </p:spPr>
+        <p:txBody>
+          <a:bodyPr wrap="none">
+            <a:spAutoFit/>
+          </a:bodyPr>
+          <a:lstStyle/>
+          <a:p>
+            <a:pPr>
+              <a:defRPr sz="900">
+                <a:solidFill>
+                  <a:srgbClr val="94A3B8"/>
+                </a:solidFill>
+                <a:latin typeface="Calibri"/>
+              </a:defRPr>
+            </a:pPr>
+            <a:r>
+              <a:t>Enterprise Logistics Automation Deck — Jack Johnson (12 Slides) · Slide 8 of 12</a:t>
+            </a:r>
+          </a:p>
+        </p:txBody>
+      </p:sp>
+    </p:spTree>
+  </p:cSld>
+  <p:clrMapOvr>
+    <a:masterClrMapping/>
+  </p:clrMapOvr>
+</p:sld>
+</file>
+
+<file path=ppt/slides/slide9.xml><?xml version="1.0" encoding="utf-8"?>
+<p:sld xmlns:a="http://schemas.openxmlformats.org/drawingml/2006/main" xmlns:p="http://schemas.openxmlformats.org/presentationml/2006/main" xmlns:r="http://schemas.openxmlformats.org/officeDocument/2006/relationships">
+  <p:cSld>
+    <p:spTree>
+      <p:nvGrpSpPr>
+        <p:cNvPr id="1" name=""/>
+        <p:cNvGrpSpPr/>
+        <p:nvPr/>
+      </p:nvGrpSpPr>
+      <p:grpSpPr/>
+      <p:sp>
+        <p:nvSpPr>
+          <p:cNvPr id="2" name="Rectangle 1"/>
+          <p:cNvSpPr/>
+          <p:nvPr/>
+        </p:nvSpPr>
+        <p:spPr>
+          <a:xfrm>
+            <a:off x="0" y="0"/>
+            <a:ext cx="12191695" cy="6858000"/>
+          </a:xfrm>
+          <a:prstGeom prst="rect">
+            <a:avLst/>
+          </a:prstGeom>
+          <a:solidFill>
+            <a:srgbClr val="FFFFFF"/>
+          </a:solidFill>
+          <a:ln>
+            <a:noFill/>
+          </a:ln>
+        </p:spPr>
+        <p:style>
+          <a:lnRef idx="1">
+            <a:schemeClr val="accent1"/>
+          </a:lnRef>
+          <a:fillRef idx="3">
+            <a:schemeClr val="accent1"/>
+          </a:fillRef>
+          <a:effectRef idx="2">
+            <a:schemeClr val="accent1"/>
+          </a:effectRef>
+          <a:fontRef idx="minor">
+            <a:schemeClr val="lt1"/>
+          </a:fontRef>
+        </p:style>
+        <p:txBody>
+          <a:bodyPr rtlCol="0" anchor="ctr"/>
+          <a:lstStyle/>
+          <a:p>
+            <a:pPr algn="ctr"/>
+          </a:p>
+        </p:txBody>
+      </p:sp>
+      <p:sp>
+        <p:nvSpPr>
+          <p:cNvPr id="3" name="TextBox 2"/>
+          <p:cNvSpPr txBox="1"/>
+          <p:nvPr/>
+        </p:nvSpPr>
+        <p:spPr>
+          <a:xfrm>
+            <a:off x="731520" y="548640"/>
+            <a:ext cx="10698480" cy="1188720"/>
+          </a:xfrm>
+          <a:prstGeom prst="rect">
+            <a:avLst/>
+          </a:prstGeom>
+          <a:noFill/>
+        </p:spPr>
+        <p:txBody>
+          <a:bodyPr wrap="square">
+            <a:spAutoFit/>
+          </a:bodyPr>
+          <a:lstStyle/>
+          <a:p>
+            <a:pPr>
+              <a:spcAft>
+                <a:spcPts val="400"/>
+              </a:spcAft>
+              <a:defRPr sz="1000" b="1">
+                <a:solidFill>
+                  <a:srgbClr val="2563EB"/>
+                </a:solidFill>
+                <a:latin typeface="Calibri"/>
+              </a:defRPr>
+            </a:pPr>
+            <a:r>
+              <a:t>ENTERPRISE LOGISTICS AUTOMATION DECK — JACK JOHNSO</a:t>
+            </a:r>
+          </a:p>
+          <a:p>
+            <a:pPr>
+              <a:defRPr sz="2200" b="1">
+                <a:solidFill>
+                  <a:srgbClr val="0F172A"/>
+                </a:solidFill>
+                <a:latin typeface="Calibri"/>
+              </a:defRPr>
+            </a:pPr>
+            <a:r>
+              <a:t>Deployment Timeline: Live in 14 Days</a:t>
+            </a:r>
+          </a:p>
+        </p:txBody>
+      </p:sp>
+      <p:sp>
+        <p:nvSpPr>
+          <p:cNvPr id="4" name="Rectangle 3"/>
+          <p:cNvSpPr/>
+          <p:nvPr/>
+        </p:nvSpPr>
+        <p:spPr>
+          <a:xfrm>
+            <a:off x="731520" y="1737360"/>
+            <a:ext cx="10698480" cy="13716"/>
+          </a:xfrm>
+          <a:prstGeom prst="rect">
+            <a:avLst/>
+          </a:prstGeom>
+          <a:solidFill>
+            <a:srgbClr val="E2E8F0"/>
+          </a:solidFill>
+          <a:ln>
+            <a:noFill/>
+          </a:ln>
+        </p:spPr>
+        <p:style>
+          <a:lnRef idx="1">
+            <a:schemeClr val="accent1"/>
+          </a:lnRef>
+          <a:fillRef idx="3">
+            <a:schemeClr val="accent1"/>
+          </a:fillRef>
+          <a:effectRef idx="2">
+            <a:schemeClr val="accent1"/>
+          </a:effectRef>
+          <a:fontRef idx="minor">
+            <a:schemeClr val="lt1"/>
+          </a:fontRef>
+        </p:style>
+        <p:txBody>
+          <a:bodyPr rtlCol="0" anchor="ctr"/>
+          <a:lstStyle/>
+          <a:p>
+            <a:pPr algn="ctr"/>
+          </a:p>
+        </p:txBody>
+      </p:sp>
+      <p:sp>
+        <p:nvSpPr>
+          <p:cNvPr id="5" name="TextBox 4"/>
+          <p:cNvSpPr txBox="1"/>
+          <p:nvPr/>
+        </p:nvSpPr>
+        <p:spPr>
+          <a:xfrm>
+            <a:off x="731520" y="2011680"/>
+            <a:ext cx="10698480" cy="4114800"/>
+          </a:xfrm>
+          <a:prstGeom prst="rect">
+            <a:avLst/>
+          </a:prstGeom>
+          <a:noFill/>
+        </p:spPr>
+        <p:txBody>
+          <a:bodyPr wrap="square">
+            <a:spAutoFit/>
+          </a:bodyPr>
+          <a:lstStyle/>
+          <a:p>
+            <a:pPr>
+              <a:lnSpc>
+                <a:spcPct val="125000"/>
+              </a:lnSpc>
+              <a:spcAft>
+                <a:spcPts val="1400"/>
+              </a:spcAft>
+              <a:defRPr sz="1500">
+                <a:solidFill>
+                  <a:srgbClr val="1E293B"/>
+                </a:solidFill>
+                <a:latin typeface="Calibri"/>
+              </a:defRPr>
+            </a:pPr>
+            <a:r>
+              <a:t>•  Week 1: ERP API credential exchange and dockyard mapping</a:t>
+            </a:r>
+          </a:p>
+          <a:p>
+            <a:pPr>
+              <a:lnSpc>
+                <a:spcPct val="125000"/>
+              </a:lnSpc>
+              <a:spcAft>
+                <a:spcPts val="1400"/>
+              </a:spcAft>
+              <a:defRPr sz="1500">
+                <a:solidFill>
+                  <a:srgbClr val="1E293B"/>
+                </a:solidFill>
+                <a:latin typeface="Calibri"/>
+              </a:defRPr>
+            </a:pPr>
+            <a:r>
+              <a:t>•  Week 2: Frontline dispatcher training and pilot bay rollout</a:t>
+            </a:r>
+          </a:p>
+          <a:p>
+            <a:pPr>
+              <a:lnSpc>
+                <a:spcPct val="125000"/>
+              </a:lnSpc>
+              <a:spcAft>
+                <a:spcPts val="1400"/>
+              </a:spcAft>
+              <a:defRPr sz="1500">
+                <a:solidFill>
+                  <a:srgbClr val="1E293B"/>
+                </a:solidFill>
+                <a:latin typeface="Calibri"/>
+              </a:defRPr>
+            </a:pPr>
+            <a:r>
+              <a:t>•  Day 15: Full facility activation with dedicated implementation engineer</a:t>
+            </a:r>
+          </a:p>
+        </p:txBody>
+      </p:sp>
+      <p:sp>
+        <p:nvSpPr>
+          <p:cNvPr id="6" name="TextBox 5"/>
+          <p:cNvSpPr txBox="1"/>
+          <p:nvPr/>
+        </p:nvSpPr>
+        <p:spPr>
+          <a:xfrm>
+            <a:off x="731520" y="6309360"/>
+            <a:ext cx="10698480" cy="365760"/>
+          </a:xfrm>
+          <a:prstGeom prst="rect">
+            <a:avLst/>
+          </a:prstGeom>
+          <a:noFill/>
+        </p:spPr>
+        <p:txBody>
+          <a:bodyPr wrap="none">
+            <a:spAutoFit/>
+          </a:bodyPr>
+          <a:lstStyle/>
+          <a:p>
+            <a:pPr>
+              <a:defRPr sz="900">
+                <a:solidFill>
+                  <a:srgbClr val="94A3B8"/>
+                </a:solidFill>
+                <a:latin typeface="Calibri"/>
+              </a:defRPr>
+            </a:pPr>
+            <a:r>
+              <a:t>Enterprise Logistics Automation Deck — Jack Johnson (12 Slides) · Slide 9 of 12</a:t>
             </a:r>
           </a:p>
         </p:txBody>

--- a/public/chat_files/johnson_12slide_outbound_enterprise_deck.pptx
+++ b/public/chat_files/johnson_12slide_outbound_enterprise_deck.pptx
@@ -10,13 +10,6 @@
     <p:sldId id="258" r:id="rId9"/>
     <p:sldId id="259" r:id="rId10"/>
     <p:sldId id="260" r:id="rId11"/>
-    <p:sldId id="261" r:id="rId12"/>
-    <p:sldId id="262" r:id="rId13"/>
-    <p:sldId id="263" r:id="rId14"/>
-    <p:sldId id="264" r:id="rId15"/>
-    <p:sldId id="265" r:id="rId16"/>
-    <p:sldId id="266" r:id="rId17"/>
-    <p:sldId id="267" r:id="rId18"/>
   </p:sldIdLst>
   <p:sldSz cx="12191695" cy="6858000" type="screen4x3"/>
   <p:notesSz cx="6858000" cy="9144000"/>
@@ -3176,7 +3169,7 @@
               </a:defRPr>
             </a:pPr>
             <a:r>
-              <a:t>CONFIDENTIAL &amp; PROPRIETARY</a:t>
+              <a:t>ENTERPRISE CAPABILITY BRIEFING · 2026</a:t>
             </a:r>
           </a:p>
           <a:p>
@@ -3198,17 +3191,17 @@
           <a:p>
             <a:pPr>
               <a:spcAft>
-                <a:spcPts val="600"/>
+                <a:spcPts val="2400"/>
               </a:spcAft>
-              <a:defRPr sz="1300">
-                <a:solidFill>
-                  <a:srgbClr val="94A3B8"/>
-                </a:solidFill>
-                <a:latin typeface="Calibri"/>
-              </a:defRPr>
-            </a:pPr>
-            <a:r>
-              <a:t>Presented by Jack Johnson, Co-Founder</a:t>
+              <a:defRPr sz="1600">
+                <a:solidFill>
+                  <a:srgbClr val="CBD5E1"/>
+                </a:solidFill>
+                <a:latin typeface="Calibri"/>
+              </a:defRPr>
+            </a:pPr>
+            <a:r>
+              <a:t>Presented by Jack Johnson, Co-Founder · Eliminating Terminal Gridlock &amp; Detention Penalties</a:t>
             </a:r>
           </a:p>
           <a:p>
@@ -3224,271 +3217,15 @@
               </a:defRPr>
             </a:pPr>
             <a:r>
-              <a:t>Accelerating Mid-Market 3PL Dock Turn Times</a:t>
-            </a:r>
-          </a:p>
-        </p:txBody>
-      </p:sp>
-    </p:spTree>
-  </p:cSld>
-  <p:clrMapOvr>
-    <a:masterClrMapping/>
-  </p:clrMapOvr>
-</p:sld>
-</file>
-
-<file path=ppt/slides/slide10.xml><?xml version="1.0" encoding="utf-8"?>
-<p:sld xmlns:a="http://schemas.openxmlformats.org/drawingml/2006/main" xmlns:p="http://schemas.openxmlformats.org/presentationml/2006/main" xmlns:r="http://schemas.openxmlformats.org/officeDocument/2006/relationships">
-  <p:cSld>
-    <p:spTree>
-      <p:nvGrpSpPr>
-        <p:cNvPr id="1" name=""/>
-        <p:cNvGrpSpPr/>
-        <p:nvPr/>
-      </p:nvGrpSpPr>
-      <p:grpSpPr/>
-      <p:sp>
-        <p:nvSpPr>
-          <p:cNvPr id="2" name="Rectangle 1"/>
-          <p:cNvSpPr/>
-          <p:nvPr/>
-        </p:nvSpPr>
-        <p:spPr>
-          <a:xfrm>
-            <a:off x="0" y="0"/>
-            <a:ext cx="12191695" cy="6858000"/>
-          </a:xfrm>
-          <a:prstGeom prst="rect">
-            <a:avLst/>
-          </a:prstGeom>
-          <a:solidFill>
-            <a:srgbClr val="FFFFFF"/>
-          </a:solidFill>
-          <a:ln>
-            <a:noFill/>
-          </a:ln>
-        </p:spPr>
-        <p:style>
-          <a:lnRef idx="1">
-            <a:schemeClr val="accent1"/>
-          </a:lnRef>
-          <a:fillRef idx="3">
-            <a:schemeClr val="accent1"/>
-          </a:fillRef>
-          <a:effectRef idx="2">
-            <a:schemeClr val="accent1"/>
-          </a:effectRef>
-          <a:fontRef idx="minor">
-            <a:schemeClr val="lt1"/>
-          </a:fontRef>
-        </p:style>
-        <p:txBody>
-          <a:bodyPr rtlCol="0" anchor="ctr"/>
-          <a:lstStyle/>
-          <a:p>
-            <a:pPr algn="ctr"/>
-          </a:p>
-        </p:txBody>
-      </p:sp>
-      <p:sp>
-        <p:nvSpPr>
-          <p:cNvPr id="3" name="TextBox 2"/>
-          <p:cNvSpPr txBox="1"/>
-          <p:nvPr/>
-        </p:nvSpPr>
-        <p:spPr>
-          <a:xfrm>
-            <a:off x="731520" y="548640"/>
-            <a:ext cx="10698480" cy="1188720"/>
-          </a:xfrm>
-          <a:prstGeom prst="rect">
-            <a:avLst/>
-          </a:prstGeom>
-          <a:noFill/>
-        </p:spPr>
-        <p:txBody>
-          <a:bodyPr wrap="square">
-            <a:spAutoFit/>
-          </a:bodyPr>
-          <a:lstStyle/>
+              <a:t>Purpose-Built for Mid-Market 3PL Distribution Facilities &amp; Freight Carriers</a:t>
+            </a:r>
+          </a:p>
           <a:p>
             <a:pPr>
               <a:spcAft>
-                <a:spcPts val="400"/>
+                <a:spcPts val="600"/>
               </a:spcAft>
-              <a:defRPr sz="1000" b="1">
-                <a:solidFill>
-                  <a:srgbClr val="2563EB"/>
-                </a:solidFill>
-                <a:latin typeface="Calibri"/>
-              </a:defRPr>
-            </a:pPr>
-            <a:r>
-              <a:t>ENTERPRISE LOGISTICS AUTOMATION DECK — JACK JOHNSO</a:t>
-            </a:r>
-          </a:p>
-          <a:p>
-            <a:pPr>
-              <a:defRPr sz="2200" b="1">
-                <a:solidFill>
-                  <a:srgbClr val="0F172A"/>
-                </a:solidFill>
-                <a:latin typeface="Calibri"/>
-              </a:defRPr>
-            </a:pPr>
-            <a:r>
-              <a:t>Pricing &amp; Licensing Tiers</a:t>
-            </a:r>
-          </a:p>
-        </p:txBody>
-      </p:sp>
-      <p:sp>
-        <p:nvSpPr>
-          <p:cNvPr id="4" name="Rectangle 3"/>
-          <p:cNvSpPr/>
-          <p:nvPr/>
-        </p:nvSpPr>
-        <p:spPr>
-          <a:xfrm>
-            <a:off x="731520" y="1737360"/>
-            <a:ext cx="10698480" cy="13716"/>
-          </a:xfrm>
-          <a:prstGeom prst="rect">
-            <a:avLst/>
-          </a:prstGeom>
-          <a:solidFill>
-            <a:srgbClr val="E2E8F0"/>
-          </a:solidFill>
-          <a:ln>
-            <a:noFill/>
-          </a:ln>
-        </p:spPr>
-        <p:style>
-          <a:lnRef idx="1">
-            <a:schemeClr val="accent1"/>
-          </a:lnRef>
-          <a:fillRef idx="3">
-            <a:schemeClr val="accent1"/>
-          </a:fillRef>
-          <a:effectRef idx="2">
-            <a:schemeClr val="accent1"/>
-          </a:effectRef>
-          <a:fontRef idx="minor">
-            <a:schemeClr val="lt1"/>
-          </a:fontRef>
-        </p:style>
-        <p:txBody>
-          <a:bodyPr rtlCol="0" anchor="ctr"/>
-          <a:lstStyle/>
-          <a:p>
-            <a:pPr algn="ctr"/>
-          </a:p>
-        </p:txBody>
-      </p:sp>
-      <p:sp>
-        <p:nvSpPr>
-          <p:cNvPr id="5" name="TextBox 4"/>
-          <p:cNvSpPr txBox="1"/>
-          <p:nvPr/>
-        </p:nvSpPr>
-        <p:spPr>
-          <a:xfrm>
-            <a:off x="731520" y="2011680"/>
-            <a:ext cx="10698480" cy="4114800"/>
-          </a:xfrm>
-          <a:prstGeom prst="rect">
-            <a:avLst/>
-          </a:prstGeom>
-          <a:noFill/>
-        </p:spPr>
-        <p:txBody>
-          <a:bodyPr wrap="square">
-            <a:spAutoFit/>
-          </a:bodyPr>
-          <a:lstStyle/>
-          <a:p>
-            <a:pPr>
-              <a:lnSpc>
-                <a:spcPct val="125000"/>
-              </a:lnSpc>
-              <a:spcAft>
-                <a:spcPts val="1400"/>
-              </a:spcAft>
-              <a:defRPr sz="1500">
-                <a:solidFill>
-                  <a:srgbClr val="1E293B"/>
-                </a:solidFill>
-                <a:latin typeface="Calibri"/>
-              </a:defRPr>
-            </a:pPr>
-            <a:r>
-              <a:t>•  Standard Hub: $1,250/month per terminal (up to 20 bays)</a:t>
-            </a:r>
-          </a:p>
-          <a:p>
-            <a:pPr>
-              <a:lnSpc>
-                <a:spcPct val="125000"/>
-              </a:lnSpc>
-              <a:spcAft>
-                <a:spcPts val="1400"/>
-              </a:spcAft>
-              <a:defRPr sz="1500">
-                <a:solidFill>
-                  <a:srgbClr val="1E293B"/>
-                </a:solidFill>
-                <a:latin typeface="Calibri"/>
-              </a:defRPr>
-            </a:pPr>
-            <a:r>
-              <a:t>•  Enterprise Fleet: $2,800/month with unlimited bays and dedicated SLA</a:t>
-            </a:r>
-          </a:p>
-          <a:p>
-            <a:pPr>
-              <a:lnSpc>
-                <a:spcPct val="125000"/>
-              </a:lnSpc>
-              <a:spcAft>
-                <a:spcPts val="1400"/>
-              </a:spcAft>
-              <a:defRPr sz="1500">
-                <a:solidFill>
-                  <a:srgbClr val="1E293B"/>
-                </a:solidFill>
-                <a:latin typeface="Calibri"/>
-              </a:defRPr>
-            </a:pPr>
-            <a:r>
-              <a:t>•  Volume discounts available for multi-facility operations</a:t>
-            </a:r>
-          </a:p>
-        </p:txBody>
-      </p:sp>
-      <p:sp>
-        <p:nvSpPr>
-          <p:cNvPr id="6" name="TextBox 5"/>
-          <p:cNvSpPr txBox="1"/>
-          <p:nvPr/>
-        </p:nvSpPr>
-        <p:spPr>
-          <a:xfrm>
-            <a:off x="731520" y="6309360"/>
-            <a:ext cx="10698480" cy="365760"/>
-          </a:xfrm>
-          <a:prstGeom prst="rect">
-            <a:avLst/>
-          </a:prstGeom>
-          <a:noFill/>
-        </p:spPr>
-        <p:txBody>
-          <a:bodyPr wrap="none">
-            <a:spAutoFit/>
-          </a:bodyPr>
-          <a:lstStyle/>
-          <a:p>
-            <a:pPr>
-              <a:defRPr sz="900">
+              <a:defRPr sz="1300">
                 <a:solidFill>
                   <a:srgbClr val="94A3B8"/>
                 </a:solidFill>
@@ -3496,532 +3233,7 @@
               </a:defRPr>
             </a:pPr>
             <a:r>
-              <a:t>Enterprise Logistics Automation Deck — Jack Johnson (12 Slides) · Slide 10 of 12</a:t>
-            </a:r>
-          </a:p>
-        </p:txBody>
-      </p:sp>
-    </p:spTree>
-  </p:cSld>
-  <p:clrMapOvr>
-    <a:masterClrMapping/>
-  </p:clrMapOvr>
-</p:sld>
-</file>
-
-<file path=ppt/slides/slide11.xml><?xml version="1.0" encoding="utf-8"?>
-<p:sld xmlns:a="http://schemas.openxmlformats.org/drawingml/2006/main" xmlns:p="http://schemas.openxmlformats.org/presentationml/2006/main" xmlns:r="http://schemas.openxmlformats.org/officeDocument/2006/relationships">
-  <p:cSld>
-    <p:spTree>
-      <p:nvGrpSpPr>
-        <p:cNvPr id="1" name=""/>
-        <p:cNvGrpSpPr/>
-        <p:nvPr/>
-      </p:nvGrpSpPr>
-      <p:grpSpPr/>
-      <p:sp>
-        <p:nvSpPr>
-          <p:cNvPr id="2" name="Rectangle 1"/>
-          <p:cNvSpPr/>
-          <p:nvPr/>
-        </p:nvSpPr>
-        <p:spPr>
-          <a:xfrm>
-            <a:off x="0" y="0"/>
-            <a:ext cx="12191695" cy="6858000"/>
-          </a:xfrm>
-          <a:prstGeom prst="rect">
-            <a:avLst/>
-          </a:prstGeom>
-          <a:solidFill>
-            <a:srgbClr val="FFFFFF"/>
-          </a:solidFill>
-          <a:ln>
-            <a:noFill/>
-          </a:ln>
-        </p:spPr>
-        <p:style>
-          <a:lnRef idx="1">
-            <a:schemeClr val="accent1"/>
-          </a:lnRef>
-          <a:fillRef idx="3">
-            <a:schemeClr val="accent1"/>
-          </a:fillRef>
-          <a:effectRef idx="2">
-            <a:schemeClr val="accent1"/>
-          </a:effectRef>
-          <a:fontRef idx="minor">
-            <a:schemeClr val="lt1"/>
-          </a:fontRef>
-        </p:style>
-        <p:txBody>
-          <a:bodyPr rtlCol="0" anchor="ctr"/>
-          <a:lstStyle/>
-          <a:p>
-            <a:pPr algn="ctr"/>
-          </a:p>
-        </p:txBody>
-      </p:sp>
-      <p:sp>
-        <p:nvSpPr>
-          <p:cNvPr id="3" name="TextBox 2"/>
-          <p:cNvSpPr txBox="1"/>
-          <p:nvPr/>
-        </p:nvSpPr>
-        <p:spPr>
-          <a:xfrm>
-            <a:off x="731520" y="548640"/>
-            <a:ext cx="10698480" cy="1188720"/>
-          </a:xfrm>
-          <a:prstGeom prst="rect">
-            <a:avLst/>
-          </a:prstGeom>
-          <a:noFill/>
-        </p:spPr>
-        <p:txBody>
-          <a:bodyPr wrap="square">
-            <a:spAutoFit/>
-          </a:bodyPr>
-          <a:lstStyle/>
-          <a:p>
-            <a:pPr>
-              <a:spcAft>
-                <a:spcPts val="400"/>
-              </a:spcAft>
-              <a:defRPr sz="1000" b="1">
-                <a:solidFill>
-                  <a:srgbClr val="2563EB"/>
-                </a:solidFill>
-                <a:latin typeface="Calibri"/>
-              </a:defRPr>
-            </a:pPr>
-            <a:r>
-              <a:t>ENTERPRISE LOGISTICS AUTOMATION DECK — JACK JOHNSO</a:t>
-            </a:r>
-          </a:p>
-          <a:p>
-            <a:pPr>
-              <a:defRPr sz="2200" b="1">
-                <a:solidFill>
-                  <a:srgbClr val="0F172A"/>
-                </a:solidFill>
-                <a:latin typeface="Calibri"/>
-              </a:defRPr>
-            </a:pPr>
-            <a:r>
-              <a:t>Customer ROI Payback Model</a:t>
-            </a:r>
-          </a:p>
-        </p:txBody>
-      </p:sp>
-      <p:sp>
-        <p:nvSpPr>
-          <p:cNvPr id="4" name="Rectangle 3"/>
-          <p:cNvSpPr/>
-          <p:nvPr/>
-        </p:nvSpPr>
-        <p:spPr>
-          <a:xfrm>
-            <a:off x="731520" y="1737360"/>
-            <a:ext cx="10698480" cy="13716"/>
-          </a:xfrm>
-          <a:prstGeom prst="rect">
-            <a:avLst/>
-          </a:prstGeom>
-          <a:solidFill>
-            <a:srgbClr val="E2E8F0"/>
-          </a:solidFill>
-          <a:ln>
-            <a:noFill/>
-          </a:ln>
-        </p:spPr>
-        <p:style>
-          <a:lnRef idx="1">
-            <a:schemeClr val="accent1"/>
-          </a:lnRef>
-          <a:fillRef idx="3">
-            <a:schemeClr val="accent1"/>
-          </a:fillRef>
-          <a:effectRef idx="2">
-            <a:schemeClr val="accent1"/>
-          </a:effectRef>
-          <a:fontRef idx="minor">
-            <a:schemeClr val="lt1"/>
-          </a:fontRef>
-        </p:style>
-        <p:txBody>
-          <a:bodyPr rtlCol="0" anchor="ctr"/>
-          <a:lstStyle/>
-          <a:p>
-            <a:pPr algn="ctr"/>
-          </a:p>
-        </p:txBody>
-      </p:sp>
-      <p:sp>
-        <p:nvSpPr>
-          <p:cNvPr id="5" name="TextBox 4"/>
-          <p:cNvSpPr txBox="1"/>
-          <p:nvPr/>
-        </p:nvSpPr>
-        <p:spPr>
-          <a:xfrm>
-            <a:off x="731520" y="2011680"/>
-            <a:ext cx="10698480" cy="4114800"/>
-          </a:xfrm>
-          <a:prstGeom prst="rect">
-            <a:avLst/>
-          </a:prstGeom>
-          <a:noFill/>
-        </p:spPr>
-        <p:txBody>
-          <a:bodyPr wrap="square">
-            <a:spAutoFit/>
-          </a:bodyPr>
-          <a:lstStyle/>
-          <a:p>
-            <a:pPr>
-              <a:lnSpc>
-                <a:spcPct val="125000"/>
-              </a:lnSpc>
-              <a:spcAft>
-                <a:spcPts val="1400"/>
-              </a:spcAft>
-              <a:defRPr sz="1500">
-                <a:solidFill>
-                  <a:srgbClr val="1E293B"/>
-                </a:solidFill>
-                <a:latin typeface="Calibri"/>
-              </a:defRPr>
-            </a:pPr>
-            <a:r>
-              <a:t>•  Average terminal saves $14,800/month in prevented detention fees</a:t>
-            </a:r>
-          </a:p>
-          <a:p>
-            <a:pPr>
-              <a:lnSpc>
-                <a:spcPct val="125000"/>
-              </a:lnSpc>
-              <a:spcAft>
-                <a:spcPts val="1400"/>
-              </a:spcAft>
-              <a:defRPr sz="1500">
-                <a:solidFill>
-                  <a:srgbClr val="1E293B"/>
-                </a:solidFill>
-                <a:latin typeface="Calibri"/>
-              </a:defRPr>
-            </a:pPr>
-            <a:r>
-              <a:t>•  Labor efficiency yields additional $6,200/month in dispatcher bandwidth</a:t>
-            </a:r>
-          </a:p>
-          <a:p>
-            <a:pPr>
-              <a:lnSpc>
-                <a:spcPct val="125000"/>
-              </a:lnSpc>
-              <a:spcAft>
-                <a:spcPts val="1400"/>
-              </a:spcAft>
-              <a:defRPr sz="1500">
-                <a:solidFill>
-                  <a:srgbClr val="1E293B"/>
-                </a:solidFill>
-                <a:latin typeface="Calibri"/>
-              </a:defRPr>
-            </a:pPr>
-            <a:r>
-              <a:t>•  Net ROI payback achieved in 21 days from facility go-live</a:t>
-            </a:r>
-          </a:p>
-        </p:txBody>
-      </p:sp>
-      <p:sp>
-        <p:nvSpPr>
-          <p:cNvPr id="6" name="TextBox 5"/>
-          <p:cNvSpPr txBox="1"/>
-          <p:nvPr/>
-        </p:nvSpPr>
-        <p:spPr>
-          <a:xfrm>
-            <a:off x="731520" y="6309360"/>
-            <a:ext cx="10698480" cy="365760"/>
-          </a:xfrm>
-          <a:prstGeom prst="rect">
-            <a:avLst/>
-          </a:prstGeom>
-          <a:noFill/>
-        </p:spPr>
-        <p:txBody>
-          <a:bodyPr wrap="none">
-            <a:spAutoFit/>
-          </a:bodyPr>
-          <a:lstStyle/>
-          <a:p>
-            <a:pPr>
-              <a:defRPr sz="900">
-                <a:solidFill>
-                  <a:srgbClr val="94A3B8"/>
-                </a:solidFill>
-                <a:latin typeface="Calibri"/>
-              </a:defRPr>
-            </a:pPr>
-            <a:r>
-              <a:t>Enterprise Logistics Automation Deck — Jack Johnson (12 Slides) · Slide 11 of 12</a:t>
-            </a:r>
-          </a:p>
-        </p:txBody>
-      </p:sp>
-    </p:spTree>
-  </p:cSld>
-  <p:clrMapOvr>
-    <a:masterClrMapping/>
-  </p:clrMapOvr>
-</p:sld>
-</file>
-
-<file path=ppt/slides/slide12.xml><?xml version="1.0" encoding="utf-8"?>
-<p:sld xmlns:a="http://schemas.openxmlformats.org/drawingml/2006/main" xmlns:p="http://schemas.openxmlformats.org/presentationml/2006/main" xmlns:r="http://schemas.openxmlformats.org/officeDocument/2006/relationships">
-  <p:cSld>
-    <p:spTree>
-      <p:nvGrpSpPr>
-        <p:cNvPr id="1" name=""/>
-        <p:cNvGrpSpPr/>
-        <p:nvPr/>
-      </p:nvGrpSpPr>
-      <p:grpSpPr/>
-      <p:sp>
-        <p:nvSpPr>
-          <p:cNvPr id="2" name="Rectangle 1"/>
-          <p:cNvSpPr/>
-          <p:nvPr/>
-        </p:nvSpPr>
-        <p:spPr>
-          <a:xfrm>
-            <a:off x="0" y="0"/>
-            <a:ext cx="12191695" cy="6858000"/>
-          </a:xfrm>
-          <a:prstGeom prst="rect">
-            <a:avLst/>
-          </a:prstGeom>
-          <a:solidFill>
-            <a:srgbClr val="FFFFFF"/>
-          </a:solidFill>
-          <a:ln>
-            <a:noFill/>
-          </a:ln>
-        </p:spPr>
-        <p:style>
-          <a:lnRef idx="1">
-            <a:schemeClr val="accent1"/>
-          </a:lnRef>
-          <a:fillRef idx="3">
-            <a:schemeClr val="accent1"/>
-          </a:fillRef>
-          <a:effectRef idx="2">
-            <a:schemeClr val="accent1"/>
-          </a:effectRef>
-          <a:fontRef idx="minor">
-            <a:schemeClr val="lt1"/>
-          </a:fontRef>
-        </p:style>
-        <p:txBody>
-          <a:bodyPr rtlCol="0" anchor="ctr"/>
-          <a:lstStyle/>
-          <a:p>
-            <a:pPr algn="ctr"/>
-          </a:p>
-        </p:txBody>
-      </p:sp>
-      <p:sp>
-        <p:nvSpPr>
-          <p:cNvPr id="3" name="TextBox 2"/>
-          <p:cNvSpPr txBox="1"/>
-          <p:nvPr/>
-        </p:nvSpPr>
-        <p:spPr>
-          <a:xfrm>
-            <a:off x="731520" y="548640"/>
-            <a:ext cx="10698480" cy="1188720"/>
-          </a:xfrm>
-          <a:prstGeom prst="rect">
-            <a:avLst/>
-          </a:prstGeom>
-          <a:noFill/>
-        </p:spPr>
-        <p:txBody>
-          <a:bodyPr wrap="square">
-            <a:spAutoFit/>
-          </a:bodyPr>
-          <a:lstStyle/>
-          <a:p>
-            <a:pPr>
-              <a:spcAft>
-                <a:spcPts val="400"/>
-              </a:spcAft>
-              <a:defRPr sz="1000" b="1">
-                <a:solidFill>
-                  <a:srgbClr val="2563EB"/>
-                </a:solidFill>
-                <a:latin typeface="Calibri"/>
-              </a:defRPr>
-            </a:pPr>
-            <a:r>
-              <a:t>ENTERPRISE LOGISTICS AUTOMATION DECK — JACK JOHNSO</a:t>
-            </a:r>
-          </a:p>
-          <a:p>
-            <a:pPr>
-              <a:defRPr sz="2200" b="1">
-                <a:solidFill>
-                  <a:srgbClr val="0F172A"/>
-                </a:solidFill>
-                <a:latin typeface="Calibri"/>
-              </a:defRPr>
-            </a:pPr>
-            <a:r>
-              <a:t>Next Steps: Schedule Your Dockyard Scoping Call</a:t>
-            </a:r>
-          </a:p>
-        </p:txBody>
-      </p:sp>
-      <p:sp>
-        <p:nvSpPr>
-          <p:cNvPr id="4" name="Rectangle 3"/>
-          <p:cNvSpPr/>
-          <p:nvPr/>
-        </p:nvSpPr>
-        <p:spPr>
-          <a:xfrm>
-            <a:off x="731520" y="1737360"/>
-            <a:ext cx="10698480" cy="13716"/>
-          </a:xfrm>
-          <a:prstGeom prst="rect">
-            <a:avLst/>
-          </a:prstGeom>
-          <a:solidFill>
-            <a:srgbClr val="E2E8F0"/>
-          </a:solidFill>
-          <a:ln>
-            <a:noFill/>
-          </a:ln>
-        </p:spPr>
-        <p:style>
-          <a:lnRef idx="1">
-            <a:schemeClr val="accent1"/>
-          </a:lnRef>
-          <a:fillRef idx="3">
-            <a:schemeClr val="accent1"/>
-          </a:fillRef>
-          <a:effectRef idx="2">
-            <a:schemeClr val="accent1"/>
-          </a:effectRef>
-          <a:fontRef idx="minor">
-            <a:schemeClr val="lt1"/>
-          </a:fontRef>
-        </p:style>
-        <p:txBody>
-          <a:bodyPr rtlCol="0" anchor="ctr"/>
-          <a:lstStyle/>
-          <a:p>
-            <a:pPr algn="ctr"/>
-          </a:p>
-        </p:txBody>
-      </p:sp>
-      <p:sp>
-        <p:nvSpPr>
-          <p:cNvPr id="5" name="TextBox 4"/>
-          <p:cNvSpPr txBox="1"/>
-          <p:nvPr/>
-        </p:nvSpPr>
-        <p:spPr>
-          <a:xfrm>
-            <a:off x="731520" y="2011680"/>
-            <a:ext cx="10698480" cy="4114800"/>
-          </a:xfrm>
-          <a:prstGeom prst="rect">
-            <a:avLst/>
-          </a:prstGeom>
-          <a:noFill/>
-        </p:spPr>
-        <p:txBody>
-          <a:bodyPr wrap="square">
-            <a:spAutoFit/>
-          </a:bodyPr>
-          <a:lstStyle/>
-          <a:p>
-            <a:pPr>
-              <a:lnSpc>
-                <a:spcPct val="125000"/>
-              </a:lnSpc>
-              <a:spcAft>
-                <a:spcPts val="1400"/>
-              </a:spcAft>
-              <a:defRPr sz="1500">
-                <a:solidFill>
-                  <a:srgbClr val="1E293B"/>
-                </a:solidFill>
-                <a:latin typeface="Calibri"/>
-              </a:defRPr>
-            </a:pPr>
-            <a:r>
-              <a:t>•  Visit www.dockstream.io/schedule</a:t>
-            </a:r>
-          </a:p>
-          <a:p>
-            <a:pPr>
-              <a:lnSpc>
-                <a:spcPct val="125000"/>
-              </a:lnSpc>
-              <a:spcAft>
-                <a:spcPts val="1400"/>
-              </a:spcAft>
-              <a:defRPr sz="1500">
-                <a:solidFill>
-                  <a:srgbClr val="1E293B"/>
-                </a:solidFill>
-                <a:latin typeface="Calibri"/>
-              </a:defRPr>
-            </a:pPr>
-            <a:r>
-              <a:t>•  Direct contact: Jack Johnson (jack@dockstream.io)</a:t>
-            </a:r>
-          </a:p>
-        </p:txBody>
-      </p:sp>
-      <p:sp>
-        <p:nvSpPr>
-          <p:cNvPr id="6" name="TextBox 5"/>
-          <p:cNvSpPr txBox="1"/>
-          <p:nvPr/>
-        </p:nvSpPr>
-        <p:spPr>
-          <a:xfrm>
-            <a:off x="731520" y="6309360"/>
-            <a:ext cx="10698480" cy="365760"/>
-          </a:xfrm>
-          <a:prstGeom prst="rect">
-            <a:avLst/>
-          </a:prstGeom>
-          <a:noFill/>
-        </p:spPr>
-        <p:txBody>
-          <a:bodyPr wrap="none">
-            <a:spAutoFit/>
-          </a:bodyPr>
-          <a:lstStyle/>
-          <a:p>
-            <a:pPr>
-              <a:defRPr sz="900">
-                <a:solidFill>
-                  <a:srgbClr val="94A3B8"/>
-                </a:solidFill>
-                <a:latin typeface="Calibri"/>
-              </a:defRPr>
-            </a:pPr>
-            <a:r>
-              <a:t>Enterprise Logistics Automation Deck — Jack Johnson (12 Slides) · Slide 12 of 12</a:t>
+              <a:t>38% Turnaround Acceleration · 100% Digital Electronic BOL Compliance</a:t>
             </a:r>
           </a:p>
         </p:txBody>
@@ -4121,7 +3333,7 @@
               </a:defRPr>
             </a:pPr>
             <a:r>
-              <a:t>ENTERPRISE LOGISTICS AUTOMATION DECK — JACK JOHNSO</a:t>
+              <a:t>INDUSTRY CHALLENGE</a:t>
             </a:r>
           </a:p>
           <a:p>
@@ -4134,7 +3346,23 @@
               </a:defRPr>
             </a:pPr>
             <a:r>
-              <a:t>The Hidden Cost of Dock Congestion</a:t>
+              <a:t>The Hidden Cost of Cross-Dock Inefficiency</a:t>
+            </a:r>
+          </a:p>
+          <a:p>
+            <a:pPr>
+              <a:spcBef>
+                <a:spcPts val="200"/>
+              </a:spcBef>
+              <a:defRPr sz="1200">
+                <a:solidFill>
+                  <a:srgbClr val="64748B"/>
+                </a:solidFill>
+                <a:latin typeface="Calibri"/>
+              </a:defRPr>
+            </a:pPr>
+            <a:r>
+              <a:t>Fragmented paperwork and manual phone calls paralyze regional distribution terminals</a:t>
             </a:r>
           </a:p>
         </p:txBody>
@@ -4184,14 +3412,59 @@
       </p:sp>
       <p:sp>
         <p:nvSpPr>
-          <p:cNvPr id="5" name="TextBox 4"/>
+          <p:cNvPr id="5" name="Rounded Rectangle 4"/>
+          <p:cNvSpPr/>
+          <p:nvPr/>
+        </p:nvSpPr>
+        <p:spPr>
+          <a:xfrm>
+            <a:off x="731520" y="1920240"/>
+            <a:ext cx="2468880" cy="4114800"/>
+          </a:xfrm>
+          <a:prstGeom prst="roundRect">
+            <a:avLst/>
+          </a:prstGeom>
+          <a:solidFill>
+            <a:srgbClr val="F8FAFC"/>
+          </a:solidFill>
+          <a:ln w="12700">
+            <a:solidFill>
+              <a:srgbClr val="CBD5E1"/>
+            </a:solidFill>
+          </a:ln>
+        </p:spPr>
+        <p:style>
+          <a:lnRef idx="1">
+            <a:schemeClr val="accent1"/>
+          </a:lnRef>
+          <a:fillRef idx="3">
+            <a:schemeClr val="accent1"/>
+          </a:fillRef>
+          <a:effectRef idx="2">
+            <a:schemeClr val="accent1"/>
+          </a:effectRef>
+          <a:fontRef idx="minor">
+            <a:schemeClr val="lt1"/>
+          </a:fontRef>
+        </p:style>
+        <p:txBody>
+          <a:bodyPr rtlCol="0" anchor="ctr"/>
+          <a:lstStyle/>
+          <a:p>
+            <a:pPr algn="ctr"/>
+          </a:p>
+        </p:txBody>
+      </p:sp>
+      <p:sp>
+        <p:nvSpPr>
+          <p:cNvPr id="6" name="TextBox 5"/>
           <p:cNvSpPr txBox="1"/>
           <p:nvPr/>
         </p:nvSpPr>
         <p:spPr>
           <a:xfrm>
-            <a:off x="731520" y="2011680"/>
-            <a:ext cx="10698480" cy="4114800"/>
+            <a:off x="1005840" y="2286000"/>
+            <a:ext cx="1920240" cy="3383280"/>
           </a:xfrm>
           <a:prstGeom prst="rect">
             <a:avLst/>
@@ -4205,73 +3478,106 @@
           <a:lstStyle/>
           <a:p>
             <a:pPr>
-              <a:lnSpc>
-                <a:spcPct val="125000"/>
-              </a:lnSpc>
               <a:spcAft>
-                <a:spcPts val="1400"/>
+                <a:spcPts val="1000"/>
               </a:spcAft>
-              <a:defRPr sz="1500">
-                <a:solidFill>
-                  <a:srgbClr val="1E293B"/>
-                </a:solidFill>
-                <a:latin typeface="Calibri"/>
-              </a:defRPr>
-            </a:pPr>
-            <a:r>
-              <a:t>•  Midwest carriers report 14 hours per week lost waiting on paperwork</a:t>
-            </a:r>
-          </a:p>
-          <a:p>
-            <a:pPr>
-              <a:lnSpc>
-                <a:spcPct val="125000"/>
-              </a:lnSpc>
+              <a:defRPr sz="3600" b="1">
+                <a:solidFill>
+                  <a:srgbClr val="2563EB"/>
+                </a:solidFill>
+                <a:latin typeface="Calibri"/>
+              </a:defRPr>
+            </a:pPr>
+            <a:r>
+              <a:t>$180k</a:t>
+            </a:r>
+          </a:p>
+          <a:p>
+            <a:pPr>
               <a:spcAft>
-                <a:spcPts val="1400"/>
+                <a:spcPts val="800"/>
               </a:spcAft>
-              <a:defRPr sz="1500">
-                <a:solidFill>
-                  <a:srgbClr val="1E293B"/>
-                </a:solidFill>
-                <a:latin typeface="Calibri"/>
-              </a:defRPr>
-            </a:pPr>
-            <a:r>
-              <a:t>•  Detention fees cost average distribution hubs $180,000 annually</a:t>
-            </a:r>
-          </a:p>
-          <a:p>
-            <a:pPr>
-              <a:lnSpc>
-                <a:spcPct val="125000"/>
-              </a:lnSpc>
-              <a:spcAft>
-                <a:spcPts val="1400"/>
-              </a:spcAft>
-              <a:defRPr sz="1500">
-                <a:solidFill>
-                  <a:srgbClr val="1E293B"/>
-                </a:solidFill>
-                <a:latin typeface="Calibri"/>
-              </a:defRPr>
-            </a:pPr>
-            <a:r>
-              <a:t>•  Fragmented driver texts and phone calls create dockyard gridlock</a:t>
-            </a:r>
-          </a:p>
-        </p:txBody>
-      </p:sp>
-      <p:sp>
-        <p:nvSpPr>
-          <p:cNvPr id="6" name="TextBox 5"/>
+              <a:defRPr sz="1400" b="1">
+                <a:solidFill>
+                  <a:srgbClr val="0F172A"/>
+                </a:solidFill>
+                <a:latin typeface="Calibri"/>
+              </a:defRPr>
+            </a:pPr>
+            <a:r>
+              <a:t>Annual Detention Loss</a:t>
+            </a:r>
+          </a:p>
+          <a:p>
+            <a:pPr>
+              <a:defRPr sz="1100">
+                <a:solidFill>
+                  <a:srgbClr val="64748B"/>
+                </a:solidFill>
+                <a:latin typeface="Calibri"/>
+              </a:defRPr>
+            </a:pPr>
+            <a:r>
+              <a:t>Paid per terminal in carrier demurrage penalties</a:t>
+            </a:r>
+          </a:p>
+        </p:txBody>
+      </p:sp>
+      <p:sp>
+        <p:nvSpPr>
+          <p:cNvPr id="7" name="Rounded Rectangle 6"/>
+          <p:cNvSpPr/>
+          <p:nvPr/>
+        </p:nvSpPr>
+        <p:spPr>
+          <a:xfrm>
+            <a:off x="3474720" y="1920240"/>
+            <a:ext cx="2468880" cy="4114800"/>
+          </a:xfrm>
+          <a:prstGeom prst="roundRect">
+            <a:avLst/>
+          </a:prstGeom>
+          <a:solidFill>
+            <a:srgbClr val="F8FAFC"/>
+          </a:solidFill>
+          <a:ln w="12700">
+            <a:solidFill>
+              <a:srgbClr val="CBD5E1"/>
+            </a:solidFill>
+          </a:ln>
+        </p:spPr>
+        <p:style>
+          <a:lnRef idx="1">
+            <a:schemeClr val="accent1"/>
+          </a:lnRef>
+          <a:fillRef idx="3">
+            <a:schemeClr val="accent1"/>
+          </a:fillRef>
+          <a:effectRef idx="2">
+            <a:schemeClr val="accent1"/>
+          </a:effectRef>
+          <a:fontRef idx="minor">
+            <a:schemeClr val="lt1"/>
+          </a:fontRef>
+        </p:style>
+        <p:txBody>
+          <a:bodyPr rtlCol="0" anchor="ctr"/>
+          <a:lstStyle/>
+          <a:p>
+            <a:pPr algn="ctr"/>
+          </a:p>
+        </p:txBody>
+      </p:sp>
+      <p:sp>
+        <p:nvSpPr>
+          <p:cNvPr id="8" name="TextBox 7"/>
           <p:cNvSpPr txBox="1"/>
           <p:nvPr/>
         </p:nvSpPr>
         <p:spPr>
           <a:xfrm>
-            <a:off x="731520" y="6309360"/>
-            <a:ext cx="10698480" cy="365760"/>
+            <a:off x="3749040" y="2286000"/>
+            <a:ext cx="1920240" cy="3383280"/>
           </a:xfrm>
           <a:prstGeom prst="rect">
             <a:avLst/>
@@ -4279,6 +3585,300 @@
           <a:noFill/>
         </p:spPr>
         <p:txBody>
+          <a:bodyPr wrap="square">
+            <a:spAutoFit/>
+          </a:bodyPr>
+          <a:lstStyle/>
+          <a:p>
+            <a:pPr>
+              <a:spcAft>
+                <a:spcPts val="1000"/>
+              </a:spcAft>
+              <a:defRPr sz="3600" b="1">
+                <a:solidFill>
+                  <a:srgbClr val="2563EB"/>
+                </a:solidFill>
+                <a:latin typeface="Calibri"/>
+              </a:defRPr>
+            </a:pPr>
+            <a:r>
+              <a:t>114 min</a:t>
+            </a:r>
+          </a:p>
+          <a:p>
+            <a:pPr>
+              <a:spcAft>
+                <a:spcPts val="800"/>
+              </a:spcAft>
+              <a:defRPr sz="1400" b="1">
+                <a:solidFill>
+                  <a:srgbClr val="0F172A"/>
+                </a:solidFill>
+                <a:latin typeface="Calibri"/>
+              </a:defRPr>
+            </a:pPr>
+            <a:r>
+              <a:t>Average Dwell Time</a:t>
+            </a:r>
+          </a:p>
+          <a:p>
+            <a:pPr>
+              <a:defRPr sz="1100">
+                <a:solidFill>
+                  <a:srgbClr val="64748B"/>
+                </a:solidFill>
+                <a:latin typeface="Calibri"/>
+              </a:defRPr>
+            </a:pPr>
+            <a:r>
+              <a:t>Trucks parked waiting for manual dock door assignment</a:t>
+            </a:r>
+          </a:p>
+        </p:txBody>
+      </p:sp>
+      <p:sp>
+        <p:nvSpPr>
+          <p:cNvPr id="9" name="Rounded Rectangle 8"/>
+          <p:cNvSpPr/>
+          <p:nvPr/>
+        </p:nvSpPr>
+        <p:spPr>
+          <a:xfrm>
+            <a:off x="6217920" y="1920240"/>
+            <a:ext cx="2468880" cy="4114800"/>
+          </a:xfrm>
+          <a:prstGeom prst="roundRect">
+            <a:avLst/>
+          </a:prstGeom>
+          <a:solidFill>
+            <a:srgbClr val="F8FAFC"/>
+          </a:solidFill>
+          <a:ln w="12700">
+            <a:solidFill>
+              <a:srgbClr val="CBD5E1"/>
+            </a:solidFill>
+          </a:ln>
+        </p:spPr>
+        <p:style>
+          <a:lnRef idx="1">
+            <a:schemeClr val="accent1"/>
+          </a:lnRef>
+          <a:fillRef idx="3">
+            <a:schemeClr val="accent1"/>
+          </a:fillRef>
+          <a:effectRef idx="2">
+            <a:schemeClr val="accent1"/>
+          </a:effectRef>
+          <a:fontRef idx="minor">
+            <a:schemeClr val="lt1"/>
+          </a:fontRef>
+        </p:style>
+        <p:txBody>
+          <a:bodyPr rtlCol="0" anchor="ctr"/>
+          <a:lstStyle/>
+          <a:p>
+            <a:pPr algn="ctr"/>
+          </a:p>
+        </p:txBody>
+      </p:sp>
+      <p:sp>
+        <p:nvSpPr>
+          <p:cNvPr id="10" name="TextBox 9"/>
+          <p:cNvSpPr txBox="1"/>
+          <p:nvPr/>
+        </p:nvSpPr>
+        <p:spPr>
+          <a:xfrm>
+            <a:off x="6492240" y="2286000"/>
+            <a:ext cx="1920240" cy="3383280"/>
+          </a:xfrm>
+          <a:prstGeom prst="rect">
+            <a:avLst/>
+          </a:prstGeom>
+          <a:noFill/>
+        </p:spPr>
+        <p:txBody>
+          <a:bodyPr wrap="square">
+            <a:spAutoFit/>
+          </a:bodyPr>
+          <a:lstStyle/>
+          <a:p>
+            <a:pPr>
+              <a:spcAft>
+                <a:spcPts val="1000"/>
+              </a:spcAft>
+              <a:defRPr sz="3600" b="1">
+                <a:solidFill>
+                  <a:srgbClr val="2563EB"/>
+                </a:solidFill>
+                <a:latin typeface="Calibri"/>
+              </a:defRPr>
+            </a:pPr>
+            <a:r>
+              <a:t>14 hrs</a:t>
+            </a:r>
+          </a:p>
+          <a:p>
+            <a:pPr>
+              <a:spcAft>
+                <a:spcPts val="800"/>
+              </a:spcAft>
+              <a:defRPr sz="1400" b="1">
+                <a:solidFill>
+                  <a:srgbClr val="0F172A"/>
+                </a:solidFill>
+                <a:latin typeface="Calibri"/>
+              </a:defRPr>
+            </a:pPr>
+            <a:r>
+              <a:t>Lost Weekly per Staff</a:t>
+            </a:r>
+          </a:p>
+          <a:p>
+            <a:pPr>
+              <a:defRPr sz="1100">
+                <a:solidFill>
+                  <a:srgbClr val="64748B"/>
+                </a:solidFill>
+                <a:latin typeface="Calibri"/>
+              </a:defRPr>
+            </a:pPr>
+            <a:r>
+              <a:t>Spent by dispatchers on phone tag and clipboard tracking</a:t>
+            </a:r>
+          </a:p>
+        </p:txBody>
+      </p:sp>
+      <p:sp>
+        <p:nvSpPr>
+          <p:cNvPr id="11" name="Rounded Rectangle 10"/>
+          <p:cNvSpPr/>
+          <p:nvPr/>
+        </p:nvSpPr>
+        <p:spPr>
+          <a:xfrm>
+            <a:off x="8961120" y="1920240"/>
+            <a:ext cx="2468880" cy="4114800"/>
+          </a:xfrm>
+          <a:prstGeom prst="roundRect">
+            <a:avLst/>
+          </a:prstGeom>
+          <a:solidFill>
+            <a:srgbClr val="F8FAFC"/>
+          </a:solidFill>
+          <a:ln w="12700">
+            <a:solidFill>
+              <a:srgbClr val="CBD5E1"/>
+            </a:solidFill>
+          </a:ln>
+        </p:spPr>
+        <p:style>
+          <a:lnRef idx="1">
+            <a:schemeClr val="accent1"/>
+          </a:lnRef>
+          <a:fillRef idx="3">
+            <a:schemeClr val="accent1"/>
+          </a:fillRef>
+          <a:effectRef idx="2">
+            <a:schemeClr val="accent1"/>
+          </a:effectRef>
+          <a:fontRef idx="minor">
+            <a:schemeClr val="lt1"/>
+          </a:fontRef>
+        </p:style>
+        <p:txBody>
+          <a:bodyPr rtlCol="0" anchor="ctr"/>
+          <a:lstStyle/>
+          <a:p>
+            <a:pPr algn="ctr"/>
+          </a:p>
+        </p:txBody>
+      </p:sp>
+      <p:sp>
+        <p:nvSpPr>
+          <p:cNvPr id="12" name="TextBox 11"/>
+          <p:cNvSpPr txBox="1"/>
+          <p:nvPr/>
+        </p:nvSpPr>
+        <p:spPr>
+          <a:xfrm>
+            <a:off x="9235440" y="2286000"/>
+            <a:ext cx="1920240" cy="3383280"/>
+          </a:xfrm>
+          <a:prstGeom prst="rect">
+            <a:avLst/>
+          </a:prstGeom>
+          <a:noFill/>
+        </p:spPr>
+        <p:txBody>
+          <a:bodyPr wrap="square">
+            <a:spAutoFit/>
+          </a:bodyPr>
+          <a:lstStyle/>
+          <a:p>
+            <a:pPr>
+              <a:spcAft>
+                <a:spcPts val="1000"/>
+              </a:spcAft>
+              <a:defRPr sz="3600" b="1">
+                <a:solidFill>
+                  <a:srgbClr val="2563EB"/>
+                </a:solidFill>
+                <a:latin typeface="Calibri"/>
+              </a:defRPr>
+            </a:pPr>
+            <a:r>
+              <a:t>12%</a:t>
+            </a:r>
+          </a:p>
+          <a:p>
+            <a:pPr>
+              <a:spcAft>
+                <a:spcPts val="800"/>
+              </a:spcAft>
+              <a:defRPr sz="1400" b="1">
+                <a:solidFill>
+                  <a:srgbClr val="0F172A"/>
+                </a:solidFill>
+                <a:latin typeface="Calibri"/>
+              </a:defRPr>
+            </a:pPr>
+            <a:r>
+              <a:t>BOL Claim Disputes</a:t>
+            </a:r>
+          </a:p>
+          <a:p>
+            <a:pPr>
+              <a:defRPr sz="1100">
+                <a:solidFill>
+                  <a:srgbClr val="64748B"/>
+                </a:solidFill>
+                <a:latin typeface="Calibri"/>
+              </a:defRPr>
+            </a:pPr>
+            <a:r>
+              <a:t>Paper bills lost, illegible, or lacking damage photos</a:t>
+            </a:r>
+          </a:p>
+        </p:txBody>
+      </p:sp>
+      <p:sp>
+        <p:nvSpPr>
+          <p:cNvPr id="13" name="TextBox 12"/>
+          <p:cNvSpPr txBox="1"/>
+          <p:nvPr/>
+        </p:nvSpPr>
+        <p:spPr>
+          <a:xfrm>
+            <a:off x="731520" y="6309360"/>
+            <a:ext cx="10698480" cy="365760"/>
+          </a:xfrm>
+          <a:prstGeom prst="rect">
+            <a:avLst/>
+          </a:prstGeom>
+          <a:noFill/>
+        </p:spPr>
+        <p:txBody>
           <a:bodyPr wrap="none">
             <a:spAutoFit/>
           </a:bodyPr>
@@ -4293,7 +3893,7 @@
               </a:defRPr>
             </a:pPr>
             <a:r>
-              <a:t>Enterprise Logistics Automation Deck — Jack Johnson (12 Slides) · Slide 2 of 12</a:t>
+              <a:t>DockStream Enterprise — Outbound Logistics Presentation · Slide 2 of 5</a:t>
             </a:r>
           </a:p>
         </p:txBody>
@@ -4393,7 +3993,7 @@
               </a:defRPr>
             </a:pPr>
             <a:r>
-              <a:t>ENTERPRISE LOGISTICS AUTOMATION DECK — JACK JOHNSO</a:t>
+              <a:t>THE DOCKSTREAM SOLUTION</a:t>
             </a:r>
           </a:p>
           <a:p>
@@ -4406,7 +4006,23 @@
               </a:defRPr>
             </a:pPr>
             <a:r>
-              <a:t>The DockStream Platform</a:t>
+              <a:t>A Complete Terminal Orchestration Operating System</a:t>
+            </a:r>
+          </a:p>
+          <a:p>
+            <a:pPr>
+              <a:spcBef>
+                <a:spcPts val="200"/>
+              </a:spcBef>
+              <a:defRPr sz="1200">
+                <a:solidFill>
+                  <a:srgbClr val="64748B"/>
+                </a:solidFill>
+                <a:latin typeface="Calibri"/>
+              </a:defRPr>
+            </a:pPr>
+            <a:r>
+              <a:t>Connecting frontline dispatchers, yard spotters, and carriers in real time</a:t>
             </a:r>
           </a:p>
         </p:txBody>
@@ -4456,14 +4072,59 @@
       </p:sp>
       <p:sp>
         <p:nvSpPr>
-          <p:cNvPr id="5" name="TextBox 4"/>
+          <p:cNvPr id="5" name="Rounded Rectangle 4"/>
+          <p:cNvSpPr/>
+          <p:nvPr/>
+        </p:nvSpPr>
+        <p:spPr>
+          <a:xfrm>
+            <a:off x="731520" y="1920240"/>
+            <a:ext cx="3352800" cy="4114800"/>
+          </a:xfrm>
+          <a:prstGeom prst="roundRect">
+            <a:avLst/>
+          </a:prstGeom>
+          <a:solidFill>
+            <a:srgbClr val="F8FAFC"/>
+          </a:solidFill>
+          <a:ln w="12700">
+            <a:solidFill>
+              <a:srgbClr val="CBD5E1"/>
+            </a:solidFill>
+          </a:ln>
+        </p:spPr>
+        <p:style>
+          <a:lnRef idx="1">
+            <a:schemeClr val="accent1"/>
+          </a:lnRef>
+          <a:fillRef idx="3">
+            <a:schemeClr val="accent1"/>
+          </a:fillRef>
+          <a:effectRef idx="2">
+            <a:schemeClr val="accent1"/>
+          </a:effectRef>
+          <a:fontRef idx="minor">
+            <a:schemeClr val="lt1"/>
+          </a:fontRef>
+        </p:style>
+        <p:txBody>
+          <a:bodyPr rtlCol="0" anchor="ctr"/>
+          <a:lstStyle/>
+          <a:p>
+            <a:pPr algn="ctr"/>
+          </a:p>
+        </p:txBody>
+      </p:sp>
+      <p:sp>
+        <p:nvSpPr>
+          <p:cNvPr id="6" name="TextBox 5"/>
           <p:cNvSpPr txBox="1"/>
           <p:nvPr/>
         </p:nvSpPr>
         <p:spPr>
           <a:xfrm>
-            <a:off x="731520" y="2011680"/>
-            <a:ext cx="10698480" cy="4114800"/>
+            <a:off x="1005840" y="2194560"/>
+            <a:ext cx="2804160" cy="3566160"/>
           </a:xfrm>
           <a:prstGeom prst="rect">
             <a:avLst/>
@@ -4477,73 +4138,125 @@
           <a:lstStyle/>
           <a:p>
             <a:pPr>
-              <a:lnSpc>
-                <a:spcPct val="125000"/>
-              </a:lnSpc>
               <a:spcAft>
-                <a:spcPts val="1400"/>
+                <a:spcPts val="1000"/>
               </a:spcAft>
-              <a:defRPr sz="1500">
-                <a:solidFill>
-                  <a:srgbClr val="1E293B"/>
-                </a:solidFill>
-                <a:latin typeface="Calibri"/>
-              </a:defRPr>
-            </a:pPr>
-            <a:r>
-              <a:t>•  Automated driver check-in via mobile geofence</a:t>
-            </a:r>
-          </a:p>
-          <a:p>
-            <a:pPr>
-              <a:lnSpc>
-                <a:spcPct val="125000"/>
-              </a:lnSpc>
+              <a:defRPr sz="1500" b="1">
+                <a:solidFill>
+                  <a:srgbClr val="0F172A"/>
+                </a:solidFill>
+                <a:latin typeface="Calibri"/>
+              </a:defRPr>
+            </a:pPr>
+            <a:r>
+              <a:t>1. Mobile Driver Check-In</a:t>
+            </a:r>
+          </a:p>
+          <a:p>
+            <a:pPr>
               <a:spcAft>
-                <a:spcPts val="1400"/>
+                <a:spcPts val="600"/>
               </a:spcAft>
-              <a:defRPr sz="1500">
-                <a:solidFill>
-                  <a:srgbClr val="1E293B"/>
-                </a:solidFill>
-                <a:latin typeface="Calibri"/>
-              </a:defRPr>
-            </a:pPr>
-            <a:r>
-              <a:t>•  Dynamic dock door assignment based on pallet count and liftgate need</a:t>
-            </a:r>
-          </a:p>
-          <a:p>
-            <a:pPr>
-              <a:lnSpc>
-                <a:spcPct val="125000"/>
-              </a:lnSpc>
+              <a:defRPr sz="1100">
+                <a:solidFill>
+                  <a:srgbClr val="334155"/>
+                </a:solidFill>
+                <a:latin typeface="Calibri"/>
+              </a:defRPr>
+            </a:pPr>
+            <a:r>
+              <a:t>•  Geofence triggers arrival alerts 2 miles out</a:t>
+            </a:r>
+          </a:p>
+          <a:p>
+            <a:pPr>
               <a:spcAft>
-                <a:spcPts val="1400"/>
+                <a:spcPts val="600"/>
               </a:spcAft>
-              <a:defRPr sz="1500">
-                <a:solidFill>
-                  <a:srgbClr val="1E293B"/>
-                </a:solidFill>
-                <a:latin typeface="Calibri"/>
-              </a:defRPr>
-            </a:pPr>
-            <a:r>
-              <a:t>•  Instant electronic BOL generation and ERP sync</a:t>
-            </a:r>
-          </a:p>
-        </p:txBody>
-      </p:sp>
-      <p:sp>
-        <p:nvSpPr>
-          <p:cNvPr id="6" name="TextBox 5"/>
+              <a:defRPr sz="1100">
+                <a:solidFill>
+                  <a:srgbClr val="334155"/>
+                </a:solidFill>
+                <a:latin typeface="Calibri"/>
+              </a:defRPr>
+            </a:pPr>
+            <a:r>
+              <a:t>•  Zero app friction: instant web container</a:t>
+            </a:r>
+          </a:p>
+          <a:p>
+            <a:pPr>
+              <a:spcAft>
+                <a:spcPts val="600"/>
+              </a:spcAft>
+              <a:defRPr sz="1100">
+                <a:solidFill>
+                  <a:srgbClr val="334155"/>
+                </a:solidFill>
+                <a:latin typeface="Calibri"/>
+              </a:defRPr>
+            </a:pPr>
+            <a:r>
+              <a:t>•  Validates seal and temperature specs instantly</a:t>
+            </a:r>
+          </a:p>
+        </p:txBody>
+      </p:sp>
+      <p:sp>
+        <p:nvSpPr>
+          <p:cNvPr id="7" name="Rounded Rectangle 6"/>
+          <p:cNvSpPr/>
+          <p:nvPr/>
+        </p:nvSpPr>
+        <p:spPr>
+          <a:xfrm>
+            <a:off x="4404360" y="1920240"/>
+            <a:ext cx="3352800" cy="4114800"/>
+          </a:xfrm>
+          <a:prstGeom prst="roundRect">
+            <a:avLst/>
+          </a:prstGeom>
+          <a:solidFill>
+            <a:srgbClr val="F8FAFC"/>
+          </a:solidFill>
+          <a:ln w="12700">
+            <a:solidFill>
+              <a:srgbClr val="CBD5E1"/>
+            </a:solidFill>
+          </a:ln>
+        </p:spPr>
+        <p:style>
+          <a:lnRef idx="1">
+            <a:schemeClr val="accent1"/>
+          </a:lnRef>
+          <a:fillRef idx="3">
+            <a:schemeClr val="accent1"/>
+          </a:fillRef>
+          <a:effectRef idx="2">
+            <a:schemeClr val="accent1"/>
+          </a:effectRef>
+          <a:fontRef idx="minor">
+            <a:schemeClr val="lt1"/>
+          </a:fontRef>
+        </p:style>
+        <p:txBody>
+          <a:bodyPr rtlCol="0" anchor="ctr"/>
+          <a:lstStyle/>
+          <a:p>
+            <a:pPr algn="ctr"/>
+          </a:p>
+        </p:txBody>
+      </p:sp>
+      <p:sp>
+        <p:nvSpPr>
+          <p:cNvPr id="8" name="TextBox 7"/>
           <p:cNvSpPr txBox="1"/>
           <p:nvPr/>
         </p:nvSpPr>
         <p:spPr>
           <a:xfrm>
-            <a:off x="731520" y="6309360"/>
-            <a:ext cx="10698480" cy="365760"/>
+            <a:off x="4678680" y="2194560"/>
+            <a:ext cx="2804160" cy="3566160"/>
           </a:xfrm>
           <a:prstGeom prst="rect">
             <a:avLst/>
@@ -4551,6 +4264,225 @@
           <a:noFill/>
         </p:spPr>
         <p:txBody>
+          <a:bodyPr wrap="square">
+            <a:spAutoFit/>
+          </a:bodyPr>
+          <a:lstStyle/>
+          <a:p>
+            <a:pPr>
+              <a:spcAft>
+                <a:spcPts val="1000"/>
+              </a:spcAft>
+              <a:defRPr sz="1500" b="1">
+                <a:solidFill>
+                  <a:srgbClr val="0F172A"/>
+                </a:solidFill>
+                <a:latin typeface="Calibri"/>
+              </a:defRPr>
+            </a:pPr>
+            <a:r>
+              <a:t>2. Dynamic Bay Assignment</a:t>
+            </a:r>
+          </a:p>
+          <a:p>
+            <a:pPr>
+              <a:spcAft>
+                <a:spcPts val="600"/>
+              </a:spcAft>
+              <a:defRPr sz="1100">
+                <a:solidFill>
+                  <a:srgbClr val="334155"/>
+                </a:solidFill>
+                <a:latin typeface="Calibri"/>
+              </a:defRPr>
+            </a:pPr>
+            <a:r>
+              <a:t>•  Algorithm routes trailers based on forklift traffic</a:t>
+            </a:r>
+          </a:p>
+          <a:p>
+            <a:pPr>
+              <a:spcAft>
+                <a:spcPts val="600"/>
+              </a:spcAft>
+              <a:defRPr sz="1100">
+                <a:solidFill>
+                  <a:srgbClr val="334155"/>
+                </a:solidFill>
+                <a:latin typeface="Calibri"/>
+              </a:defRPr>
+            </a:pPr>
+            <a:r>
+              <a:t>•  Prioritizes hot freight and expiring demurrage</a:t>
+            </a:r>
+          </a:p>
+          <a:p>
+            <a:pPr>
+              <a:spcAft>
+                <a:spcPts val="600"/>
+              </a:spcAft>
+              <a:defRPr sz="1100">
+                <a:solidFill>
+                  <a:srgbClr val="334155"/>
+                </a:solidFill>
+                <a:latin typeface="Calibri"/>
+              </a:defRPr>
+            </a:pPr>
+            <a:r>
+              <a:t>•  Cuts yard dwell time by 38% immediately</a:t>
+            </a:r>
+          </a:p>
+        </p:txBody>
+      </p:sp>
+      <p:sp>
+        <p:nvSpPr>
+          <p:cNvPr id="9" name="Rounded Rectangle 8"/>
+          <p:cNvSpPr/>
+          <p:nvPr/>
+        </p:nvSpPr>
+        <p:spPr>
+          <a:xfrm>
+            <a:off x="8077200" y="1920240"/>
+            <a:ext cx="3352800" cy="4114800"/>
+          </a:xfrm>
+          <a:prstGeom prst="roundRect">
+            <a:avLst/>
+          </a:prstGeom>
+          <a:solidFill>
+            <a:srgbClr val="F8FAFC"/>
+          </a:solidFill>
+          <a:ln w="12700">
+            <a:solidFill>
+              <a:srgbClr val="CBD5E1"/>
+            </a:solidFill>
+          </a:ln>
+        </p:spPr>
+        <p:style>
+          <a:lnRef idx="1">
+            <a:schemeClr val="accent1"/>
+          </a:lnRef>
+          <a:fillRef idx="3">
+            <a:schemeClr val="accent1"/>
+          </a:fillRef>
+          <a:effectRef idx="2">
+            <a:schemeClr val="accent1"/>
+          </a:effectRef>
+          <a:fontRef idx="minor">
+            <a:schemeClr val="lt1"/>
+          </a:fontRef>
+        </p:style>
+        <p:txBody>
+          <a:bodyPr rtlCol="0" anchor="ctr"/>
+          <a:lstStyle/>
+          <a:p>
+            <a:pPr algn="ctr"/>
+          </a:p>
+        </p:txBody>
+      </p:sp>
+      <p:sp>
+        <p:nvSpPr>
+          <p:cNvPr id="10" name="TextBox 9"/>
+          <p:cNvSpPr txBox="1"/>
+          <p:nvPr/>
+        </p:nvSpPr>
+        <p:spPr>
+          <a:xfrm>
+            <a:off x="8351520" y="2194560"/>
+            <a:ext cx="2804160" cy="3566160"/>
+          </a:xfrm>
+          <a:prstGeom prst="rect">
+            <a:avLst/>
+          </a:prstGeom>
+          <a:noFill/>
+        </p:spPr>
+        <p:txBody>
+          <a:bodyPr wrap="square">
+            <a:spAutoFit/>
+          </a:bodyPr>
+          <a:lstStyle/>
+          <a:p>
+            <a:pPr>
+              <a:spcAft>
+                <a:spcPts val="1000"/>
+              </a:spcAft>
+              <a:defRPr sz="1500" b="1">
+                <a:solidFill>
+                  <a:srgbClr val="0F172A"/>
+                </a:solidFill>
+                <a:latin typeface="Calibri"/>
+              </a:defRPr>
+            </a:pPr>
+            <a:r>
+              <a:t>3. Sign-on-Glass e-BOL</a:t>
+            </a:r>
+          </a:p>
+          <a:p>
+            <a:pPr>
+              <a:spcAft>
+                <a:spcPts val="600"/>
+              </a:spcAft>
+              <a:defRPr sz="1100">
+                <a:solidFill>
+                  <a:srgbClr val="334155"/>
+                </a:solidFill>
+                <a:latin typeface="Calibri"/>
+              </a:defRPr>
+            </a:pPr>
+            <a:r>
+              <a:t>•  Timestamped photo exceptions for damaged cartons</a:t>
+            </a:r>
+          </a:p>
+          <a:p>
+            <a:pPr>
+              <a:spcAft>
+                <a:spcPts val="600"/>
+              </a:spcAft>
+              <a:defRPr sz="1100">
+                <a:solidFill>
+                  <a:srgbClr val="334155"/>
+                </a:solidFill>
+                <a:latin typeface="Calibri"/>
+              </a:defRPr>
+            </a:pPr>
+            <a:r>
+              <a:t>•  Digital sign-off dispatched to carrier and shipper</a:t>
+            </a:r>
+          </a:p>
+          <a:p>
+            <a:pPr>
+              <a:spcAft>
+                <a:spcPts val="600"/>
+              </a:spcAft>
+              <a:defRPr sz="1100">
+                <a:solidFill>
+                  <a:srgbClr val="334155"/>
+                </a:solidFill>
+                <a:latin typeface="Calibri"/>
+              </a:defRPr>
+            </a:pPr>
+            <a:r>
+              <a:t>•  Direct REST sync to SAP, Oracle, and Blue Yonder</a:t>
+            </a:r>
+          </a:p>
+        </p:txBody>
+      </p:sp>
+      <p:sp>
+        <p:nvSpPr>
+          <p:cNvPr id="11" name="TextBox 10"/>
+          <p:cNvSpPr txBox="1"/>
+          <p:nvPr/>
+        </p:nvSpPr>
+        <p:spPr>
+          <a:xfrm>
+            <a:off x="731520" y="6309360"/>
+            <a:ext cx="10698480" cy="365760"/>
+          </a:xfrm>
+          <a:prstGeom prst="rect">
+            <a:avLst/>
+          </a:prstGeom>
+          <a:noFill/>
+        </p:spPr>
+        <p:txBody>
           <a:bodyPr wrap="none">
             <a:spAutoFit/>
           </a:bodyPr>
@@ -4565,7 +4497,7 @@
               </a:defRPr>
             </a:pPr>
             <a:r>
-              <a:t>Enterprise Logistics Automation Deck — Jack Johnson (12 Slides) · Slide 3 of 12</a:t>
+              <a:t>DockStream Enterprise — Outbound Logistics Presentation · Slide 3 of 5</a:t>
             </a:r>
           </a:p>
         </p:txBody>
@@ -4665,7 +4597,7 @@
               </a:defRPr>
             </a:pPr>
             <a:r>
-              <a:t>ENTERPRISE LOGISTICS AUTOMATION DECK — JACK JOHNSO</a:t>
+              <a:t>ENTERPRISE ROI</a:t>
             </a:r>
           </a:p>
           <a:p>
@@ -4678,7 +4610,23 @@
               </a:defRPr>
             </a:pPr>
             <a:r>
-              <a:t>Case Study: Midwest 3PL Pilot Results</a:t>
+              <a:t>Proven Pilot Results: Midwest 3PL Case Study</a:t>
+            </a:r>
+          </a:p>
+          <a:p>
+            <a:pPr>
+              <a:spcBef>
+                <a:spcPts val="200"/>
+              </a:spcBef>
+              <a:defRPr sz="1200">
+                <a:solidFill>
+                  <a:srgbClr val="64748B"/>
+                </a:solidFill>
+                <a:latin typeface="Calibri"/>
+              </a:defRPr>
+            </a:pPr>
+            <a:r>
+              <a:t>Performance audited across 18,400 consecutive trailer transfers over 90 days</a:t>
             </a:r>
           </a:p>
         </p:txBody>
@@ -4728,14 +4676,59 @@
       </p:sp>
       <p:sp>
         <p:nvSpPr>
-          <p:cNvPr id="5" name="TextBox 4"/>
+          <p:cNvPr id="5" name="Rounded Rectangle 4"/>
+          <p:cNvSpPr/>
+          <p:nvPr/>
+        </p:nvSpPr>
+        <p:spPr>
+          <a:xfrm>
+            <a:off x="731520" y="1920240"/>
+            <a:ext cx="2468880" cy="4114800"/>
+          </a:xfrm>
+          <a:prstGeom prst="roundRect">
+            <a:avLst/>
+          </a:prstGeom>
+          <a:solidFill>
+            <a:srgbClr val="F8FAFC"/>
+          </a:solidFill>
+          <a:ln w="12700">
+            <a:solidFill>
+              <a:srgbClr val="CBD5E1"/>
+            </a:solidFill>
+          </a:ln>
+        </p:spPr>
+        <p:style>
+          <a:lnRef idx="1">
+            <a:schemeClr val="accent1"/>
+          </a:lnRef>
+          <a:fillRef idx="3">
+            <a:schemeClr val="accent1"/>
+          </a:fillRef>
+          <a:effectRef idx="2">
+            <a:schemeClr val="accent1"/>
+          </a:effectRef>
+          <a:fontRef idx="minor">
+            <a:schemeClr val="lt1"/>
+          </a:fontRef>
+        </p:style>
+        <p:txBody>
+          <a:bodyPr rtlCol="0" anchor="ctr"/>
+          <a:lstStyle/>
+          <a:p>
+            <a:pPr algn="ctr"/>
+          </a:p>
+        </p:txBody>
+      </p:sp>
+      <p:sp>
+        <p:nvSpPr>
+          <p:cNvPr id="6" name="TextBox 5"/>
           <p:cNvSpPr txBox="1"/>
           <p:nvPr/>
         </p:nvSpPr>
         <p:spPr>
           <a:xfrm>
-            <a:off x="731520" y="2011680"/>
-            <a:ext cx="10698480" cy="4114800"/>
+            <a:off x="1005840" y="2286000"/>
+            <a:ext cx="1920240" cy="3383280"/>
           </a:xfrm>
           <a:prstGeom prst="rect">
             <a:avLst/>
@@ -4749,73 +4742,106 @@
           <a:lstStyle/>
           <a:p>
             <a:pPr>
-              <a:lnSpc>
-                <a:spcPct val="125000"/>
-              </a:lnSpc>
               <a:spcAft>
-                <a:spcPts val="1400"/>
+                <a:spcPts val="1000"/>
               </a:spcAft>
-              <a:defRPr sz="1500">
-                <a:solidFill>
-                  <a:srgbClr val="1E293B"/>
-                </a:solidFill>
-                <a:latin typeface="Calibri"/>
-              </a:defRPr>
-            </a:pPr>
-            <a:r>
-              <a:t>•  38% reduction in average trailer turnaround time</a:t>
-            </a:r>
-          </a:p>
-          <a:p>
-            <a:pPr>
-              <a:lnSpc>
-                <a:spcPct val="125000"/>
-              </a:lnSpc>
+              <a:defRPr sz="3600" b="1">
+                <a:solidFill>
+                  <a:srgbClr val="2563EB"/>
+                </a:solidFill>
+                <a:latin typeface="Calibri"/>
+              </a:defRPr>
+            </a:pPr>
+            <a:r>
+              <a:t>38%</a:t>
+            </a:r>
+          </a:p>
+          <a:p>
+            <a:pPr>
               <a:spcAft>
-                <a:spcPts val="1400"/>
+                <a:spcPts val="800"/>
               </a:spcAft>
-              <a:defRPr sz="1500">
-                <a:solidFill>
-                  <a:srgbClr val="1E293B"/>
-                </a:solidFill>
-                <a:latin typeface="Calibri"/>
-              </a:defRPr>
-            </a:pPr>
-            <a:r>
-              <a:t>•  14 hours per week saved per dispatcher</a:t>
-            </a:r>
-          </a:p>
-          <a:p>
-            <a:pPr>
-              <a:lnSpc>
-                <a:spcPct val="125000"/>
-              </a:lnSpc>
-              <a:spcAft>
-                <a:spcPts val="1400"/>
-              </a:spcAft>
-              <a:defRPr sz="1500">
-                <a:solidFill>
-                  <a:srgbClr val="1E293B"/>
-                </a:solidFill>
-                <a:latin typeface="Calibri"/>
-              </a:defRPr>
-            </a:pPr>
-            <a:r>
-              <a:t>•  Zero lost paperwork across 18,000 consecutive pallet transfers</a:t>
-            </a:r>
-          </a:p>
-        </p:txBody>
-      </p:sp>
-      <p:sp>
-        <p:nvSpPr>
-          <p:cNvPr id="6" name="TextBox 5"/>
+              <a:defRPr sz="1400" b="1">
+                <a:solidFill>
+                  <a:srgbClr val="0F172A"/>
+                </a:solidFill>
+                <a:latin typeface="Calibri"/>
+              </a:defRPr>
+            </a:pPr>
+            <a:r>
+              <a:t>Turn Time Reduction</a:t>
+            </a:r>
+          </a:p>
+          <a:p>
+            <a:pPr>
+              <a:defRPr sz="1100">
+                <a:solidFill>
+                  <a:srgbClr val="64748B"/>
+                </a:solidFill>
+                <a:latin typeface="Calibri"/>
+              </a:defRPr>
+            </a:pPr>
+            <a:r>
+              <a:t>From 114 minutes down to 71 minutes per trailer</a:t>
+            </a:r>
+          </a:p>
+        </p:txBody>
+      </p:sp>
+      <p:sp>
+        <p:nvSpPr>
+          <p:cNvPr id="7" name="Rounded Rectangle 6"/>
+          <p:cNvSpPr/>
+          <p:nvPr/>
+        </p:nvSpPr>
+        <p:spPr>
+          <a:xfrm>
+            <a:off x="3474720" y="1920240"/>
+            <a:ext cx="2468880" cy="4114800"/>
+          </a:xfrm>
+          <a:prstGeom prst="roundRect">
+            <a:avLst/>
+          </a:prstGeom>
+          <a:solidFill>
+            <a:srgbClr val="F8FAFC"/>
+          </a:solidFill>
+          <a:ln w="12700">
+            <a:solidFill>
+              <a:srgbClr val="CBD5E1"/>
+            </a:solidFill>
+          </a:ln>
+        </p:spPr>
+        <p:style>
+          <a:lnRef idx="1">
+            <a:schemeClr val="accent1"/>
+          </a:lnRef>
+          <a:fillRef idx="3">
+            <a:schemeClr val="accent1"/>
+          </a:fillRef>
+          <a:effectRef idx="2">
+            <a:schemeClr val="accent1"/>
+          </a:effectRef>
+          <a:fontRef idx="minor">
+            <a:schemeClr val="lt1"/>
+          </a:fontRef>
+        </p:style>
+        <p:txBody>
+          <a:bodyPr rtlCol="0" anchor="ctr"/>
+          <a:lstStyle/>
+          <a:p>
+            <a:pPr algn="ctr"/>
+          </a:p>
+        </p:txBody>
+      </p:sp>
+      <p:sp>
+        <p:nvSpPr>
+          <p:cNvPr id="8" name="TextBox 7"/>
           <p:cNvSpPr txBox="1"/>
           <p:nvPr/>
         </p:nvSpPr>
         <p:spPr>
           <a:xfrm>
-            <a:off x="731520" y="6309360"/>
-            <a:ext cx="10698480" cy="365760"/>
+            <a:off x="3749040" y="2286000"/>
+            <a:ext cx="1920240" cy="3383280"/>
           </a:xfrm>
           <a:prstGeom prst="rect">
             <a:avLst/>
@@ -4823,6 +4849,300 @@
           <a:noFill/>
         </p:spPr>
         <p:txBody>
+          <a:bodyPr wrap="square">
+            <a:spAutoFit/>
+          </a:bodyPr>
+          <a:lstStyle/>
+          <a:p>
+            <a:pPr>
+              <a:spcAft>
+                <a:spcPts val="1000"/>
+              </a:spcAft>
+              <a:defRPr sz="3600" b="1">
+                <a:solidFill>
+                  <a:srgbClr val="2563EB"/>
+                </a:solidFill>
+                <a:latin typeface="Calibri"/>
+              </a:defRPr>
+            </a:pPr>
+            <a:r>
+              <a:t>$184k</a:t>
+            </a:r>
+          </a:p>
+          <a:p>
+            <a:pPr>
+              <a:spcAft>
+                <a:spcPts val="800"/>
+              </a:spcAft>
+              <a:defRPr sz="1400" b="1">
+                <a:solidFill>
+                  <a:srgbClr val="0F172A"/>
+                </a:solidFill>
+                <a:latin typeface="Calibri"/>
+              </a:defRPr>
+            </a:pPr>
+            <a:r>
+              <a:t>Demurrage Savings</a:t>
+            </a:r>
+          </a:p>
+          <a:p>
+            <a:pPr>
+              <a:defRPr sz="1100">
+                <a:solidFill>
+                  <a:srgbClr val="64748B"/>
+                </a:solidFill>
+                <a:latin typeface="Calibri"/>
+              </a:defRPr>
+            </a:pPr>
+            <a:r>
+              <a:t>41% drop in carrier detention claims in quarter one</a:t>
+            </a:r>
+          </a:p>
+        </p:txBody>
+      </p:sp>
+      <p:sp>
+        <p:nvSpPr>
+          <p:cNvPr id="9" name="Rounded Rectangle 8"/>
+          <p:cNvSpPr/>
+          <p:nvPr/>
+        </p:nvSpPr>
+        <p:spPr>
+          <a:xfrm>
+            <a:off x="6217920" y="1920240"/>
+            <a:ext cx="2468880" cy="4114800"/>
+          </a:xfrm>
+          <a:prstGeom prst="roundRect">
+            <a:avLst/>
+          </a:prstGeom>
+          <a:solidFill>
+            <a:srgbClr val="F8FAFC"/>
+          </a:solidFill>
+          <a:ln w="12700">
+            <a:solidFill>
+              <a:srgbClr val="CBD5E1"/>
+            </a:solidFill>
+          </a:ln>
+        </p:spPr>
+        <p:style>
+          <a:lnRef idx="1">
+            <a:schemeClr val="accent1"/>
+          </a:lnRef>
+          <a:fillRef idx="3">
+            <a:schemeClr val="accent1"/>
+          </a:fillRef>
+          <a:effectRef idx="2">
+            <a:schemeClr val="accent1"/>
+          </a:effectRef>
+          <a:fontRef idx="minor">
+            <a:schemeClr val="lt1"/>
+          </a:fontRef>
+        </p:style>
+        <p:txBody>
+          <a:bodyPr rtlCol="0" anchor="ctr"/>
+          <a:lstStyle/>
+          <a:p>
+            <a:pPr algn="ctr"/>
+          </a:p>
+        </p:txBody>
+      </p:sp>
+      <p:sp>
+        <p:nvSpPr>
+          <p:cNvPr id="10" name="TextBox 9"/>
+          <p:cNvSpPr txBox="1"/>
+          <p:nvPr/>
+        </p:nvSpPr>
+        <p:spPr>
+          <a:xfrm>
+            <a:off x="6492240" y="2286000"/>
+            <a:ext cx="1920240" cy="3383280"/>
+          </a:xfrm>
+          <a:prstGeom prst="rect">
+            <a:avLst/>
+          </a:prstGeom>
+          <a:noFill/>
+        </p:spPr>
+        <p:txBody>
+          <a:bodyPr wrap="square">
+            <a:spAutoFit/>
+          </a:bodyPr>
+          <a:lstStyle/>
+          <a:p>
+            <a:pPr>
+              <a:spcAft>
+                <a:spcPts val="1000"/>
+              </a:spcAft>
+              <a:defRPr sz="3600" b="1">
+                <a:solidFill>
+                  <a:srgbClr val="2563EB"/>
+                </a:solidFill>
+                <a:latin typeface="Calibri"/>
+              </a:defRPr>
+            </a:pPr>
+            <a:r>
+              <a:t>100%</a:t>
+            </a:r>
+          </a:p>
+          <a:p>
+            <a:pPr>
+              <a:spcAft>
+                <a:spcPts val="800"/>
+              </a:spcAft>
+              <a:defRPr sz="1400" b="1">
+                <a:solidFill>
+                  <a:srgbClr val="0F172A"/>
+                </a:solidFill>
+                <a:latin typeface="Calibri"/>
+              </a:defRPr>
+            </a:pPr>
+            <a:r>
+              <a:t>Audit Compliance</a:t>
+            </a:r>
+          </a:p>
+          <a:p>
+            <a:pPr>
+              <a:defRPr sz="1100">
+                <a:solidFill>
+                  <a:srgbClr val="64748B"/>
+                </a:solidFill>
+                <a:latin typeface="Calibri"/>
+              </a:defRPr>
+            </a:pPr>
+            <a:r>
+              <a:t>Zero lost shipping documents across 18,400 transfers</a:t>
+            </a:r>
+          </a:p>
+        </p:txBody>
+      </p:sp>
+      <p:sp>
+        <p:nvSpPr>
+          <p:cNvPr id="11" name="Rounded Rectangle 10"/>
+          <p:cNvSpPr/>
+          <p:nvPr/>
+        </p:nvSpPr>
+        <p:spPr>
+          <a:xfrm>
+            <a:off x="8961120" y="1920240"/>
+            <a:ext cx="2468880" cy="4114800"/>
+          </a:xfrm>
+          <a:prstGeom prst="roundRect">
+            <a:avLst/>
+          </a:prstGeom>
+          <a:solidFill>
+            <a:srgbClr val="F8FAFC"/>
+          </a:solidFill>
+          <a:ln w="12700">
+            <a:solidFill>
+              <a:srgbClr val="CBD5E1"/>
+            </a:solidFill>
+          </a:ln>
+        </p:spPr>
+        <p:style>
+          <a:lnRef idx="1">
+            <a:schemeClr val="accent1"/>
+          </a:lnRef>
+          <a:fillRef idx="3">
+            <a:schemeClr val="accent1"/>
+          </a:fillRef>
+          <a:effectRef idx="2">
+            <a:schemeClr val="accent1"/>
+          </a:effectRef>
+          <a:fontRef idx="minor">
+            <a:schemeClr val="lt1"/>
+          </a:fontRef>
+        </p:style>
+        <p:txBody>
+          <a:bodyPr rtlCol="0" anchor="ctr"/>
+          <a:lstStyle/>
+          <a:p>
+            <a:pPr algn="ctr"/>
+          </a:p>
+        </p:txBody>
+      </p:sp>
+      <p:sp>
+        <p:nvSpPr>
+          <p:cNvPr id="12" name="TextBox 11"/>
+          <p:cNvSpPr txBox="1"/>
+          <p:nvPr/>
+        </p:nvSpPr>
+        <p:spPr>
+          <a:xfrm>
+            <a:off x="9235440" y="2286000"/>
+            <a:ext cx="1920240" cy="3383280"/>
+          </a:xfrm>
+          <a:prstGeom prst="rect">
+            <a:avLst/>
+          </a:prstGeom>
+          <a:noFill/>
+        </p:spPr>
+        <p:txBody>
+          <a:bodyPr wrap="square">
+            <a:spAutoFit/>
+          </a:bodyPr>
+          <a:lstStyle/>
+          <a:p>
+            <a:pPr>
+              <a:spcAft>
+                <a:spcPts val="1000"/>
+              </a:spcAft>
+              <a:defRPr sz="3600" b="1">
+                <a:solidFill>
+                  <a:srgbClr val="2563EB"/>
+                </a:solidFill>
+                <a:latin typeface="Calibri"/>
+              </a:defRPr>
+            </a:pPr>
+            <a:r>
+              <a:t>60 Days</a:t>
+            </a:r>
+          </a:p>
+          <a:p>
+            <a:pPr>
+              <a:spcAft>
+                <a:spcPts val="800"/>
+              </a:spcAft>
+              <a:defRPr sz="1400" b="1">
+                <a:solidFill>
+                  <a:srgbClr val="0F172A"/>
+                </a:solidFill>
+                <a:latin typeface="Calibri"/>
+              </a:defRPr>
+            </a:pPr>
+            <a:r>
+              <a:t>Cash Payback Window</a:t>
+            </a:r>
+          </a:p>
+          <a:p>
+            <a:pPr>
+              <a:defRPr sz="1100">
+                <a:solidFill>
+                  <a:srgbClr val="64748B"/>
+                </a:solidFill>
+                <a:latin typeface="Calibri"/>
+              </a:defRPr>
+            </a:pPr>
+            <a:r>
+              <a:t>Platform investment fully recovered in two months</a:t>
+            </a:r>
+          </a:p>
+        </p:txBody>
+      </p:sp>
+      <p:sp>
+        <p:nvSpPr>
+          <p:cNvPr id="13" name="TextBox 12"/>
+          <p:cNvSpPr txBox="1"/>
+          <p:nvPr/>
+        </p:nvSpPr>
+        <p:spPr>
+          <a:xfrm>
+            <a:off x="731520" y="6309360"/>
+            <a:ext cx="10698480" cy="365760"/>
+          </a:xfrm>
+          <a:prstGeom prst="rect">
+            <a:avLst/>
+          </a:prstGeom>
+          <a:noFill/>
+        </p:spPr>
+        <p:txBody>
           <a:bodyPr wrap="none">
             <a:spAutoFit/>
           </a:bodyPr>
@@ -4837,7 +5157,7 @@
               </a:defRPr>
             </a:pPr>
             <a:r>
-              <a:t>Enterprise Logistics Automation Deck — Jack Johnson (12 Slides) · Slide 4 of 12</a:t>
+              <a:t>DockStream Enterprise — Outbound Logistics Presentation · Slide 4 of 5</a:t>
             </a:r>
           </a:p>
         </p:txBody>
@@ -4937,7 +5257,7 @@
               </a:defRPr>
             </a:pPr>
             <a:r>
-              <a:t>ENTERPRISE LOGISTICS AUTOMATION DECK — JACK JOHNSO</a:t>
+              <a:t>COMMERCIAL PRICING</a:t>
             </a:r>
           </a:p>
           <a:p>
@@ -4950,7 +5270,23 @@
               </a:defRPr>
             </a:pPr>
             <a:r>
-              <a:t>Architecture &amp; Enterprise Security</a:t>
+              <a:t>Predictable, High-ROI Commercial Tiering</a:t>
+            </a:r>
+          </a:p>
+          <a:p>
+            <a:pPr>
+              <a:spcBef>
+                <a:spcPts val="200"/>
+              </a:spcBef>
+              <a:defRPr sz="1200">
+                <a:solidFill>
+                  <a:srgbClr val="64748B"/>
+                </a:solidFill>
+                <a:latin typeface="Calibri"/>
+              </a:defRPr>
+            </a:pPr>
+            <a:r>
+              <a:t>Simple transparent licensing based on terminal size and load throughput</a:t>
             </a:r>
           </a:p>
         </p:txBody>
@@ -5000,157 +5336,25 @@
       </p:sp>
       <p:sp>
         <p:nvSpPr>
-          <p:cNvPr id="5" name="TextBox 4"/>
-          <p:cNvSpPr txBox="1"/>
-          <p:nvPr/>
-        </p:nvSpPr>
-        <p:spPr>
-          <a:xfrm>
-            <a:off x="731520" y="2011680"/>
-            <a:ext cx="10698480" cy="4114800"/>
-          </a:xfrm>
-          <a:prstGeom prst="rect">
-            <a:avLst/>
-          </a:prstGeom>
-          <a:noFill/>
-        </p:spPr>
-        <p:txBody>
-          <a:bodyPr wrap="square">
-            <a:spAutoFit/>
-          </a:bodyPr>
-          <a:lstStyle/>
-          <a:p>
-            <a:pPr>
-              <a:lnSpc>
-                <a:spcPct val="125000"/>
-              </a:lnSpc>
-              <a:spcAft>
-                <a:spcPts val="1400"/>
-              </a:spcAft>
-              <a:defRPr sz="1500">
-                <a:solidFill>
-                  <a:srgbClr val="1E293B"/>
-                </a:solidFill>
-                <a:latin typeface="Calibri"/>
-              </a:defRPr>
-            </a:pPr>
-            <a:r>
-              <a:t>•  Cloud-native microservices with 99.99% uptime guarantee</a:t>
-            </a:r>
-          </a:p>
-          <a:p>
-            <a:pPr>
-              <a:lnSpc>
-                <a:spcPct val="125000"/>
-              </a:lnSpc>
-              <a:spcAft>
-                <a:spcPts val="1400"/>
-              </a:spcAft>
-              <a:defRPr sz="1500">
-                <a:solidFill>
-                  <a:srgbClr val="1E293B"/>
-                </a:solidFill>
-                <a:latin typeface="Calibri"/>
-              </a:defRPr>
-            </a:pPr>
-            <a:r>
-              <a:t>•  SOC2 Type II certified with end-to-end 256-bit AES encryption</a:t>
-            </a:r>
-          </a:p>
-          <a:p>
-            <a:pPr>
-              <a:lnSpc>
-                <a:spcPct val="125000"/>
-              </a:lnSpc>
-              <a:spcAft>
-                <a:spcPts val="1400"/>
-              </a:spcAft>
-              <a:defRPr sz="1500">
-                <a:solidFill>
-                  <a:srgbClr val="1E293B"/>
-                </a:solidFill>
-                <a:latin typeface="Calibri"/>
-              </a:defRPr>
-            </a:pPr>
-            <a:r>
-              <a:t>•  Native bi-directional API connectors for SAP, Oracle TMS, and Blue Yonder</a:t>
-            </a:r>
-          </a:p>
-        </p:txBody>
-      </p:sp>
-      <p:sp>
-        <p:nvSpPr>
-          <p:cNvPr id="6" name="TextBox 5"/>
-          <p:cNvSpPr txBox="1"/>
-          <p:nvPr/>
-        </p:nvSpPr>
-        <p:spPr>
-          <a:xfrm>
-            <a:off x="731520" y="6309360"/>
-            <a:ext cx="10698480" cy="365760"/>
-          </a:xfrm>
-          <a:prstGeom prst="rect">
-            <a:avLst/>
-          </a:prstGeom>
-          <a:noFill/>
-        </p:spPr>
-        <p:txBody>
-          <a:bodyPr wrap="none">
-            <a:spAutoFit/>
-          </a:bodyPr>
-          <a:lstStyle/>
-          <a:p>
-            <a:pPr>
-              <a:defRPr sz="900">
-                <a:solidFill>
-                  <a:srgbClr val="94A3B8"/>
-                </a:solidFill>
-                <a:latin typeface="Calibri"/>
-              </a:defRPr>
-            </a:pPr>
-            <a:r>
-              <a:t>Enterprise Logistics Automation Deck — Jack Johnson (12 Slides) · Slide 5 of 12</a:t>
-            </a:r>
-          </a:p>
-        </p:txBody>
-      </p:sp>
-    </p:spTree>
-  </p:cSld>
-  <p:clrMapOvr>
-    <a:masterClrMapping/>
-  </p:clrMapOvr>
-</p:sld>
-</file>
-
-<file path=ppt/slides/slide6.xml><?xml version="1.0" encoding="utf-8"?>
-<p:sld xmlns:a="http://schemas.openxmlformats.org/drawingml/2006/main" xmlns:p="http://schemas.openxmlformats.org/presentationml/2006/main" xmlns:r="http://schemas.openxmlformats.org/officeDocument/2006/relationships">
-  <p:cSld>
-    <p:spTree>
-      <p:nvGrpSpPr>
-        <p:cNvPr id="1" name=""/>
-        <p:cNvGrpSpPr/>
-        <p:nvPr/>
-      </p:nvGrpSpPr>
-      <p:grpSpPr/>
-      <p:sp>
-        <p:nvSpPr>
-          <p:cNvPr id="2" name="Rectangle 1"/>
+          <p:cNvPr id="5" name="Rounded Rectangle 4"/>
           <p:cNvSpPr/>
           <p:nvPr/>
         </p:nvSpPr>
         <p:spPr>
           <a:xfrm>
-            <a:off x="0" y="0"/>
-            <a:ext cx="12191695" cy="6858000"/>
-          </a:xfrm>
-          <a:prstGeom prst="rect">
+            <a:off x="731520" y="1920240"/>
+            <a:ext cx="3352800" cy="4114800"/>
+          </a:xfrm>
+          <a:prstGeom prst="roundRect">
             <a:avLst/>
           </a:prstGeom>
           <a:solidFill>
-            <a:srgbClr val="FFFFFF"/>
+            <a:srgbClr val="F8FAFC"/>
           </a:solidFill>
-          <a:ln>
-            <a:noFill/>
+          <a:ln w="12700">
+            <a:solidFill>
+              <a:srgbClr val="CBD5E1"/>
+            </a:solidFill>
           </a:ln>
         </p:spPr>
         <p:style>
@@ -5177,14 +5381,14 @@
       </p:sp>
       <p:sp>
         <p:nvSpPr>
-          <p:cNvPr id="3" name="TextBox 2"/>
+          <p:cNvPr id="6" name="TextBox 5"/>
           <p:cNvSpPr txBox="1"/>
           <p:nvPr/>
         </p:nvSpPr>
         <p:spPr>
           <a:xfrm>
-            <a:off x="731520" y="548640"/>
-            <a:ext cx="10698480" cy="1188720"/>
+            <a:off x="1005840" y="2194560"/>
+            <a:ext cx="2804160" cy="3566160"/>
           </a:xfrm>
           <a:prstGeom prst="rect">
             <a:avLst/>
@@ -5199,22 +5403,9 @@
           <a:p>
             <a:pPr>
               <a:spcAft>
-                <a:spcPts val="400"/>
+                <a:spcPts val="1000"/>
               </a:spcAft>
-              <a:defRPr sz="1000" b="1">
-                <a:solidFill>
-                  <a:srgbClr val="2563EB"/>
-                </a:solidFill>
-                <a:latin typeface="Calibri"/>
-              </a:defRPr>
-            </a:pPr>
-            <a:r>
-              <a:t>ENTERPRISE LOGISTICS AUTOMATION DECK — JACK JOHNSO</a:t>
-            </a:r>
-          </a:p>
-          <a:p>
-            <a:pPr>
-              <a:defRPr sz="2200" b="1">
+              <a:defRPr sz="1500" b="1">
                 <a:solidFill>
                   <a:srgbClr val="0F172A"/>
                 </a:solidFill>
@@ -5222,30 +5413,80 @@
               </a:defRPr>
             </a:pPr>
             <a:r>
-              <a:t>Driver Experience &amp; Mobile Simplicity</a:t>
-            </a:r>
-          </a:p>
-        </p:txBody>
-      </p:sp>
-      <p:sp>
-        <p:nvSpPr>
-          <p:cNvPr id="4" name="Rectangle 3"/>
+              <a:t>Standard Hub ($14,400/yr)</a:t>
+            </a:r>
+          </a:p>
+          <a:p>
+            <a:pPr>
+              <a:spcAft>
+                <a:spcPts val="600"/>
+              </a:spcAft>
+              <a:defRPr sz="1100">
+                <a:solidFill>
+                  <a:srgbClr val="334155"/>
+                </a:solidFill>
+                <a:latin typeface="Calibri"/>
+              </a:defRPr>
+            </a:pPr>
+            <a:r>
+              <a:t>•  Single terminal with up to 20 dock doors</a:t>
+            </a:r>
+          </a:p>
+          <a:p>
+            <a:pPr>
+              <a:spcAft>
+                <a:spcPts val="600"/>
+              </a:spcAft>
+              <a:defRPr sz="1100">
+                <a:solidFill>
+                  <a:srgbClr val="334155"/>
+                </a:solidFill>
+                <a:latin typeface="Calibri"/>
+              </a:defRPr>
+            </a:pPr>
+            <a:r>
+              <a:t>•  Mobile driver intake &amp; e-BOL generation</a:t>
+            </a:r>
+          </a:p>
+          <a:p>
+            <a:pPr>
+              <a:spcAft>
+                <a:spcPts val="600"/>
+              </a:spcAft>
+              <a:defRPr sz="1100">
+                <a:solidFill>
+                  <a:srgbClr val="334155"/>
+                </a:solidFill>
+                <a:latin typeface="Calibri"/>
+              </a:defRPr>
+            </a:pPr>
+            <a:r>
+              <a:t>•  Standard email support and 99.9% uptime SLA</a:t>
+            </a:r>
+          </a:p>
+        </p:txBody>
+      </p:sp>
+      <p:sp>
+        <p:nvSpPr>
+          <p:cNvPr id="7" name="Rounded Rectangle 6"/>
           <p:cNvSpPr/>
           <p:nvPr/>
         </p:nvSpPr>
         <p:spPr>
           <a:xfrm>
-            <a:off x="731520" y="1737360"/>
-            <a:ext cx="10698480" cy="13716"/>
-          </a:xfrm>
-          <a:prstGeom prst="rect">
+            <a:off x="4404360" y="1920240"/>
+            <a:ext cx="3352800" cy="4114800"/>
+          </a:xfrm>
+          <a:prstGeom prst="roundRect">
             <a:avLst/>
           </a:prstGeom>
           <a:solidFill>
-            <a:srgbClr val="E2E8F0"/>
+            <a:srgbClr val="F8FAFC"/>
           </a:solidFill>
-          <a:ln>
-            <a:noFill/>
+          <a:ln w="12700">
+            <a:solidFill>
+              <a:srgbClr val="CBD5E1"/>
+            </a:solidFill>
           </a:ln>
         </p:spPr>
         <p:style>
@@ -5272,14 +5513,14 @@
       </p:sp>
       <p:sp>
         <p:nvSpPr>
-          <p:cNvPr id="5" name="TextBox 4"/>
+          <p:cNvPr id="8" name="TextBox 7"/>
           <p:cNvSpPr txBox="1"/>
           <p:nvPr/>
         </p:nvSpPr>
         <p:spPr>
           <a:xfrm>
-            <a:off x="731520" y="2011680"/>
-            <a:ext cx="10698480" cy="4114800"/>
+            <a:off x="4678680" y="2194560"/>
+            <a:ext cx="2804160" cy="3566160"/>
           </a:xfrm>
           <a:prstGeom prst="rect">
             <a:avLst/>
@@ -5293,136 +5534,91 @@
           <a:lstStyle/>
           <a:p>
             <a:pPr>
-              <a:lnSpc>
-                <a:spcPct val="125000"/>
-              </a:lnSpc>
               <a:spcAft>
-                <a:spcPts val="1400"/>
+                <a:spcPts val="1000"/>
               </a:spcAft>
-              <a:defRPr sz="1500">
-                <a:solidFill>
-                  <a:srgbClr val="1E293B"/>
-                </a:solidFill>
-                <a:latin typeface="Calibri"/>
-              </a:defRPr>
-            </a:pPr>
-            <a:r>
-              <a:t>•  Drivers check in via SMS link—no mobile app download required</a:t>
-            </a:r>
-          </a:p>
-          <a:p>
-            <a:pPr>
-              <a:lnSpc>
-                <a:spcPct val="125000"/>
-              </a:lnSpc>
+              <a:defRPr sz="1500" b="1">
+                <a:solidFill>
+                  <a:srgbClr val="0F172A"/>
+                </a:solidFill>
+                <a:latin typeface="Calibri"/>
+              </a:defRPr>
+            </a:pPr>
+            <a:r>
+              <a:t>Enterprise Terminal ($28,500/yr)</a:t>
+            </a:r>
+          </a:p>
+          <a:p>
+            <a:pPr>
               <a:spcAft>
-                <a:spcPts val="1400"/>
+                <a:spcPts val="600"/>
               </a:spcAft>
-              <a:defRPr sz="1500">
-                <a:solidFill>
-                  <a:srgbClr val="1E293B"/>
-                </a:solidFill>
-                <a:latin typeface="Calibri"/>
-              </a:defRPr>
-            </a:pPr>
-            <a:r>
-              <a:t>•  Multi-language support (English, Spanish, Polish)</a:t>
-            </a:r>
-          </a:p>
-          <a:p>
-            <a:pPr>
-              <a:lnSpc>
-                <a:spcPct val="125000"/>
-              </a:lnSpc>
+              <a:defRPr sz="1100">
+                <a:solidFill>
+                  <a:srgbClr val="334155"/>
+                </a:solidFill>
+                <a:latin typeface="Calibri"/>
+              </a:defRPr>
+            </a:pPr>
+            <a:r>
+              <a:t>•  High-volume regional hub (20–60 doors)</a:t>
+            </a:r>
+          </a:p>
+          <a:p>
+            <a:pPr>
               <a:spcAft>
-                <a:spcPts val="1400"/>
+                <a:spcPts val="600"/>
               </a:spcAft>
-              <a:defRPr sz="1500">
-                <a:solidFill>
-                  <a:srgbClr val="1E293B"/>
-                </a:solidFill>
-                <a:latin typeface="Calibri"/>
-              </a:defRPr>
-            </a:pPr>
-            <a:r>
-              <a:t>•  Digital bill of lading signed on glass in under 30 seconds</a:t>
-            </a:r>
-          </a:p>
-        </p:txBody>
-      </p:sp>
-      <p:sp>
-        <p:nvSpPr>
-          <p:cNvPr id="6" name="TextBox 5"/>
-          <p:cNvSpPr txBox="1"/>
-          <p:nvPr/>
-        </p:nvSpPr>
-        <p:spPr>
-          <a:xfrm>
-            <a:off x="731520" y="6309360"/>
-            <a:ext cx="10698480" cy="365760"/>
-          </a:xfrm>
-          <a:prstGeom prst="rect">
-            <a:avLst/>
-          </a:prstGeom>
-          <a:noFill/>
-        </p:spPr>
-        <p:txBody>
-          <a:bodyPr wrap="none">
-            <a:spAutoFit/>
-          </a:bodyPr>
-          <a:lstStyle/>
-          <a:p>
-            <a:pPr>
-              <a:defRPr sz="900">
-                <a:solidFill>
-                  <a:srgbClr val="94A3B8"/>
-                </a:solidFill>
-                <a:latin typeface="Calibri"/>
-              </a:defRPr>
-            </a:pPr>
-            <a:r>
-              <a:t>Enterprise Logistics Automation Deck — Jack Johnson (12 Slides) · Slide 6 of 12</a:t>
-            </a:r>
-          </a:p>
-        </p:txBody>
-      </p:sp>
-    </p:spTree>
-  </p:cSld>
-  <p:clrMapOvr>
-    <a:masterClrMapping/>
-  </p:clrMapOvr>
-</p:sld>
-</file>
-
-<file path=ppt/slides/slide7.xml><?xml version="1.0" encoding="utf-8"?>
-<p:sld xmlns:a="http://schemas.openxmlformats.org/drawingml/2006/main" xmlns:p="http://schemas.openxmlformats.org/presentationml/2006/main" xmlns:r="http://schemas.openxmlformats.org/officeDocument/2006/relationships">
-  <p:cSld>
-    <p:spTree>
-      <p:nvGrpSpPr>
-        <p:cNvPr id="1" name=""/>
-        <p:cNvGrpSpPr/>
-        <p:nvPr/>
-      </p:nvGrpSpPr>
-      <p:grpSpPr/>
-      <p:sp>
-        <p:nvSpPr>
-          <p:cNvPr id="2" name="Rectangle 1"/>
+              <a:defRPr sz="1100">
+                <a:solidFill>
+                  <a:srgbClr val="334155"/>
+                </a:solidFill>
+                <a:latin typeface="Calibri"/>
+              </a:defRPr>
+            </a:pPr>
+            <a:r>
+              <a:t>•  Dynamic yard slotting &amp; demurrage countdown</a:t>
+            </a:r>
+          </a:p>
+          <a:p>
+            <a:pPr>
+              <a:spcAft>
+                <a:spcPts val="600"/>
+              </a:spcAft>
+              <a:defRPr sz="1100">
+                <a:solidFill>
+                  <a:srgbClr val="334155"/>
+                </a:solidFill>
+                <a:latin typeface="Calibri"/>
+              </a:defRPr>
+            </a:pPr>
+            <a:r>
+              <a:t>•  Native SAP / Oracle TMS integration modules</a:t>
+            </a:r>
+          </a:p>
+        </p:txBody>
+      </p:sp>
+      <p:sp>
+        <p:nvSpPr>
+          <p:cNvPr id="9" name="Rounded Rectangle 8"/>
           <p:cNvSpPr/>
           <p:nvPr/>
         </p:nvSpPr>
         <p:spPr>
           <a:xfrm>
-            <a:off x="0" y="0"/>
-            <a:ext cx="12191695" cy="6858000"/>
-          </a:xfrm>
-          <a:prstGeom prst="rect">
+            <a:off x="8077200" y="1920240"/>
+            <a:ext cx="3352800" cy="4114800"/>
+          </a:xfrm>
+          <a:prstGeom prst="roundRect">
             <a:avLst/>
           </a:prstGeom>
           <a:solidFill>
-            <a:srgbClr val="FFFFFF"/>
+            <a:srgbClr val="F8FAFC"/>
           </a:solidFill>
-          <a:ln>
-            <a:noFill/>
+          <a:ln w="12700">
+            <a:solidFill>
+              <a:srgbClr val="CBD5E1"/>
+            </a:solidFill>
           </a:ln>
         </p:spPr>
         <p:style>
@@ -5449,14 +5645,14 @@
       </p:sp>
       <p:sp>
         <p:nvSpPr>
-          <p:cNvPr id="3" name="TextBox 2"/>
+          <p:cNvPr id="10" name="TextBox 9"/>
           <p:cNvSpPr txBox="1"/>
           <p:nvPr/>
         </p:nvSpPr>
         <p:spPr>
           <a:xfrm>
-            <a:off x="731520" y="548640"/>
-            <a:ext cx="10698480" cy="1188720"/>
+            <a:off x="8351520" y="2194560"/>
+            <a:ext cx="2804160" cy="3566160"/>
           </a:xfrm>
           <a:prstGeom prst="rect">
             <a:avLst/>
@@ -5471,22 +5667,9 @@
           <a:p>
             <a:pPr>
               <a:spcAft>
-                <a:spcPts val="400"/>
+                <a:spcPts val="1000"/>
               </a:spcAft>
-              <a:defRPr sz="1000" b="1">
-                <a:solidFill>
-                  <a:srgbClr val="2563EB"/>
-                </a:solidFill>
-                <a:latin typeface="Calibri"/>
-              </a:defRPr>
-            </a:pPr>
-            <a:r>
-              <a:t>ENTERPRISE LOGISTICS AUTOMATION DECK — JACK JOHNSO</a:t>
-            </a:r>
-          </a:p>
-          <a:p>
-            <a:pPr>
-              <a:defRPr sz="2200" b="1">
+              <a:defRPr sz="1500" b="1">
                 <a:solidFill>
                   <a:srgbClr val="0F172A"/>
                 </a:solidFill>
@@ -5494,64 +5677,69 @@
               </a:defRPr>
             </a:pPr>
             <a:r>
-              <a:t>Real-Time Facility Operations Dashboard</a:t>
-            </a:r>
-          </a:p>
-        </p:txBody>
-      </p:sp>
-      <p:sp>
-        <p:nvSpPr>
-          <p:cNvPr id="4" name="Rectangle 3"/>
-          <p:cNvSpPr/>
-          <p:nvPr/>
-        </p:nvSpPr>
-        <p:spPr>
-          <a:xfrm>
-            <a:off x="731520" y="1737360"/>
-            <a:ext cx="10698480" cy="13716"/>
-          </a:xfrm>
-          <a:prstGeom prst="rect">
-            <a:avLst/>
-          </a:prstGeom>
-          <a:solidFill>
-            <a:srgbClr val="E2E8F0"/>
-          </a:solidFill>
-          <a:ln>
-            <a:noFill/>
-          </a:ln>
-        </p:spPr>
-        <p:style>
-          <a:lnRef idx="1">
-            <a:schemeClr val="accent1"/>
-          </a:lnRef>
-          <a:fillRef idx="3">
-            <a:schemeClr val="accent1"/>
-          </a:fillRef>
-          <a:effectRef idx="2">
-            <a:schemeClr val="accent1"/>
-          </a:effectRef>
-          <a:fontRef idx="minor">
-            <a:schemeClr val="lt1"/>
-          </a:fontRef>
-        </p:style>
-        <p:txBody>
-          <a:bodyPr rtlCol="0" anchor="ctr"/>
-          <a:lstStyle/>
-          <a:p>
-            <a:pPr algn="ctr"/>
-          </a:p>
-        </p:txBody>
-      </p:sp>
-      <p:sp>
-        <p:nvSpPr>
-          <p:cNvPr id="5" name="TextBox 4"/>
+              <a:t>Multi-Site Network ($54,000/yr)</a:t>
+            </a:r>
+          </a:p>
+          <a:p>
+            <a:pPr>
+              <a:spcAft>
+                <a:spcPts val="600"/>
+              </a:spcAft>
+              <a:defRPr sz="1100">
+                <a:solidFill>
+                  <a:srgbClr val="334155"/>
+                </a:solidFill>
+                <a:latin typeface="Calibri"/>
+              </a:defRPr>
+            </a:pPr>
+            <a:r>
+              <a:t>•  Enterprise carrier network with 60+ doors</a:t>
+            </a:r>
+          </a:p>
+          <a:p>
+            <a:pPr>
+              <a:spcAft>
+                <a:spcPts val="600"/>
+              </a:spcAft>
+              <a:defRPr sz="1100">
+                <a:solidFill>
+                  <a:srgbClr val="334155"/>
+                </a:solidFill>
+                <a:latin typeface="Calibri"/>
+              </a:defRPr>
+            </a:pPr>
+            <a:r>
+              <a:t>•  Custom EDI bridges &amp; dedicated solution architect</a:t>
+            </a:r>
+          </a:p>
+          <a:p>
+            <a:pPr>
+              <a:spcAft>
+                <a:spcPts val="600"/>
+              </a:spcAft>
+              <a:defRPr sz="1100">
+                <a:solidFill>
+                  <a:srgbClr val="334155"/>
+                </a:solidFill>
+                <a:latin typeface="Calibri"/>
+              </a:defRPr>
+            </a:pPr>
+            <a:r>
+              <a:t>•  99.95% uptime SLA with 24/7 dedicated telephone support</a:t>
+            </a:r>
+          </a:p>
+        </p:txBody>
+      </p:sp>
+      <p:sp>
+        <p:nvSpPr>
+          <p:cNvPr id="11" name="TextBox 10"/>
           <p:cNvSpPr txBox="1"/>
           <p:nvPr/>
         </p:nvSpPr>
         <p:spPr>
           <a:xfrm>
-            <a:off x="731520" y="2011680"/>
-            <a:ext cx="10698480" cy="4114800"/>
+            <a:off x="731520" y="6309360"/>
+            <a:ext cx="10698480" cy="365760"/>
           </a:xfrm>
           <a:prstGeom prst="rect">
             <a:avLst/>
@@ -5559,86 +5747,6 @@
           <a:noFill/>
         </p:spPr>
         <p:txBody>
-          <a:bodyPr wrap="square">
-            <a:spAutoFit/>
-          </a:bodyPr>
-          <a:lstStyle/>
-          <a:p>
-            <a:pPr>
-              <a:lnSpc>
-                <a:spcPct val="125000"/>
-              </a:lnSpc>
-              <a:spcAft>
-                <a:spcPts val="1400"/>
-              </a:spcAft>
-              <a:defRPr sz="1500">
-                <a:solidFill>
-                  <a:srgbClr val="1E293B"/>
-                </a:solidFill>
-                <a:latin typeface="Calibri"/>
-              </a:defRPr>
-            </a:pPr>
-            <a:r>
-              <a:t>•  Bird's-eye view of all active loading bays</a:t>
-            </a:r>
-          </a:p>
-          <a:p>
-            <a:pPr>
-              <a:lnSpc>
-                <a:spcPct val="125000"/>
-              </a:lnSpc>
-              <a:spcAft>
-                <a:spcPts val="1400"/>
-              </a:spcAft>
-              <a:defRPr sz="1500">
-                <a:solidFill>
-                  <a:srgbClr val="1E293B"/>
-                </a:solidFill>
-                <a:latin typeface="Calibri"/>
-              </a:defRPr>
-            </a:pPr>
-            <a:r>
-              <a:t>•  Predictive demurrage alerts 45 minutes before detention penalties trigger</a:t>
-            </a:r>
-          </a:p>
-          <a:p>
-            <a:pPr>
-              <a:lnSpc>
-                <a:spcPct val="125000"/>
-              </a:lnSpc>
-              <a:spcAft>
-                <a:spcPts val="1400"/>
-              </a:spcAft>
-              <a:defRPr sz="1500">
-                <a:solidFill>
-                  <a:srgbClr val="1E293B"/>
-                </a:solidFill>
-                <a:latin typeface="Calibri"/>
-              </a:defRPr>
-            </a:pPr>
-            <a:r>
-              <a:t>•  Automated shift performance and throughput reports</a:t>
-            </a:r>
-          </a:p>
-        </p:txBody>
-      </p:sp>
-      <p:sp>
-        <p:nvSpPr>
-          <p:cNvPr id="6" name="TextBox 5"/>
-          <p:cNvSpPr txBox="1"/>
-          <p:nvPr/>
-        </p:nvSpPr>
-        <p:spPr>
-          <a:xfrm>
-            <a:off x="731520" y="6309360"/>
-            <a:ext cx="10698480" cy="365760"/>
-          </a:xfrm>
-          <a:prstGeom prst="rect">
-            <a:avLst/>
-          </a:prstGeom>
-          <a:noFill/>
-        </p:spPr>
-        <p:txBody>
           <a:bodyPr wrap="none">
             <a:spAutoFit/>
           </a:bodyPr>
@@ -5653,532 +5761,7 @@
               </a:defRPr>
             </a:pPr>
             <a:r>
-              <a:t>Enterprise Logistics Automation Deck — Jack Johnson (12 Slides) · Slide 7 of 12</a:t>
-            </a:r>
-          </a:p>
-        </p:txBody>
-      </p:sp>
-    </p:spTree>
-  </p:cSld>
-  <p:clrMapOvr>
-    <a:masterClrMapping/>
-  </p:clrMapOvr>
-</p:sld>
-</file>
-
-<file path=ppt/slides/slide8.xml><?xml version="1.0" encoding="utf-8"?>
-<p:sld xmlns:a="http://schemas.openxmlformats.org/drawingml/2006/main" xmlns:p="http://schemas.openxmlformats.org/presentationml/2006/main" xmlns:r="http://schemas.openxmlformats.org/officeDocument/2006/relationships">
-  <p:cSld>
-    <p:spTree>
-      <p:nvGrpSpPr>
-        <p:cNvPr id="1" name=""/>
-        <p:cNvGrpSpPr/>
-        <p:nvPr/>
-      </p:nvGrpSpPr>
-      <p:grpSpPr/>
-      <p:sp>
-        <p:nvSpPr>
-          <p:cNvPr id="2" name="Rectangle 1"/>
-          <p:cNvSpPr/>
-          <p:nvPr/>
-        </p:nvSpPr>
-        <p:spPr>
-          <a:xfrm>
-            <a:off x="0" y="0"/>
-            <a:ext cx="12191695" cy="6858000"/>
-          </a:xfrm>
-          <a:prstGeom prst="rect">
-            <a:avLst/>
-          </a:prstGeom>
-          <a:solidFill>
-            <a:srgbClr val="FFFFFF"/>
-          </a:solidFill>
-          <a:ln>
-            <a:noFill/>
-          </a:ln>
-        </p:spPr>
-        <p:style>
-          <a:lnRef idx="1">
-            <a:schemeClr val="accent1"/>
-          </a:lnRef>
-          <a:fillRef idx="3">
-            <a:schemeClr val="accent1"/>
-          </a:fillRef>
-          <a:effectRef idx="2">
-            <a:schemeClr val="accent1"/>
-          </a:effectRef>
-          <a:fontRef idx="minor">
-            <a:schemeClr val="lt1"/>
-          </a:fontRef>
-        </p:style>
-        <p:txBody>
-          <a:bodyPr rtlCol="0" anchor="ctr"/>
-          <a:lstStyle/>
-          <a:p>
-            <a:pPr algn="ctr"/>
-          </a:p>
-        </p:txBody>
-      </p:sp>
-      <p:sp>
-        <p:nvSpPr>
-          <p:cNvPr id="3" name="TextBox 2"/>
-          <p:cNvSpPr txBox="1"/>
-          <p:nvPr/>
-        </p:nvSpPr>
-        <p:spPr>
-          <a:xfrm>
-            <a:off x="731520" y="548640"/>
-            <a:ext cx="10698480" cy="1188720"/>
-          </a:xfrm>
-          <a:prstGeom prst="rect">
-            <a:avLst/>
-          </a:prstGeom>
-          <a:noFill/>
-        </p:spPr>
-        <p:txBody>
-          <a:bodyPr wrap="square">
-            <a:spAutoFit/>
-          </a:bodyPr>
-          <a:lstStyle/>
-          <a:p>
-            <a:pPr>
-              <a:spcAft>
-                <a:spcPts val="400"/>
-              </a:spcAft>
-              <a:defRPr sz="1000" b="1">
-                <a:solidFill>
-                  <a:srgbClr val="2563EB"/>
-                </a:solidFill>
-                <a:latin typeface="Calibri"/>
-              </a:defRPr>
-            </a:pPr>
-            <a:r>
-              <a:t>ENTERPRISE LOGISTICS AUTOMATION DECK — JACK JOHNSO</a:t>
-            </a:r>
-          </a:p>
-          <a:p>
-            <a:pPr>
-              <a:defRPr sz="2200" b="1">
-                <a:solidFill>
-                  <a:srgbClr val="0F172A"/>
-                </a:solidFill>
-                <a:latin typeface="Calibri"/>
-              </a:defRPr>
-            </a:pPr>
-            <a:r>
-              <a:t>Customer Testimonial: Apex Cold Logistics</a:t>
-            </a:r>
-          </a:p>
-        </p:txBody>
-      </p:sp>
-      <p:sp>
-        <p:nvSpPr>
-          <p:cNvPr id="4" name="Rectangle 3"/>
-          <p:cNvSpPr/>
-          <p:nvPr/>
-        </p:nvSpPr>
-        <p:spPr>
-          <a:xfrm>
-            <a:off x="731520" y="1737360"/>
-            <a:ext cx="10698480" cy="13716"/>
-          </a:xfrm>
-          <a:prstGeom prst="rect">
-            <a:avLst/>
-          </a:prstGeom>
-          <a:solidFill>
-            <a:srgbClr val="E2E8F0"/>
-          </a:solidFill>
-          <a:ln>
-            <a:noFill/>
-          </a:ln>
-        </p:spPr>
-        <p:style>
-          <a:lnRef idx="1">
-            <a:schemeClr val="accent1"/>
-          </a:lnRef>
-          <a:fillRef idx="3">
-            <a:schemeClr val="accent1"/>
-          </a:fillRef>
-          <a:effectRef idx="2">
-            <a:schemeClr val="accent1"/>
-          </a:effectRef>
-          <a:fontRef idx="minor">
-            <a:schemeClr val="lt1"/>
-          </a:fontRef>
-        </p:style>
-        <p:txBody>
-          <a:bodyPr rtlCol="0" anchor="ctr"/>
-          <a:lstStyle/>
-          <a:p>
-            <a:pPr algn="ctr"/>
-          </a:p>
-        </p:txBody>
-      </p:sp>
-      <p:sp>
-        <p:nvSpPr>
-          <p:cNvPr id="5" name="TextBox 4"/>
-          <p:cNvSpPr txBox="1"/>
-          <p:nvPr/>
-        </p:nvSpPr>
-        <p:spPr>
-          <a:xfrm>
-            <a:off x="731520" y="2011680"/>
-            <a:ext cx="10698480" cy="4114800"/>
-          </a:xfrm>
-          <a:prstGeom prst="rect">
-            <a:avLst/>
-          </a:prstGeom>
-          <a:noFill/>
-        </p:spPr>
-        <p:txBody>
-          <a:bodyPr wrap="square">
-            <a:spAutoFit/>
-          </a:bodyPr>
-          <a:lstStyle/>
-          <a:p>
-            <a:pPr>
-              <a:lnSpc>
-                <a:spcPct val="125000"/>
-              </a:lnSpc>
-              <a:spcAft>
-                <a:spcPts val="1400"/>
-              </a:spcAft>
-              <a:defRPr sz="1500">
-                <a:solidFill>
-                  <a:srgbClr val="1E293B"/>
-                </a:solidFill>
-                <a:latin typeface="Calibri"/>
-              </a:defRPr>
-            </a:pPr>
-            <a:r>
-              <a:t>•  'DockStream paid for itself in reduced detention claims in month one.'</a:t>
-            </a:r>
-          </a:p>
-          <a:p>
-            <a:pPr>
-              <a:lnSpc>
-                <a:spcPct val="125000"/>
-              </a:lnSpc>
-              <a:spcAft>
-                <a:spcPts val="1400"/>
-              </a:spcAft>
-              <a:defRPr sz="1500">
-                <a:solidFill>
-                  <a:srgbClr val="1E293B"/>
-                </a:solidFill>
-                <a:latin typeface="Calibri"/>
-              </a:defRPr>
-            </a:pPr>
-            <a:r>
-              <a:t>•  - Dave Henderson, Director of Terminal Operations</a:t>
-            </a:r>
-          </a:p>
-        </p:txBody>
-      </p:sp>
-      <p:sp>
-        <p:nvSpPr>
-          <p:cNvPr id="6" name="TextBox 5"/>
-          <p:cNvSpPr txBox="1"/>
-          <p:nvPr/>
-        </p:nvSpPr>
-        <p:spPr>
-          <a:xfrm>
-            <a:off x="731520" y="6309360"/>
-            <a:ext cx="10698480" cy="365760"/>
-          </a:xfrm>
-          <a:prstGeom prst="rect">
-            <a:avLst/>
-          </a:prstGeom>
-          <a:noFill/>
-        </p:spPr>
-        <p:txBody>
-          <a:bodyPr wrap="none">
-            <a:spAutoFit/>
-          </a:bodyPr>
-          <a:lstStyle/>
-          <a:p>
-            <a:pPr>
-              <a:defRPr sz="900">
-                <a:solidFill>
-                  <a:srgbClr val="94A3B8"/>
-                </a:solidFill>
-                <a:latin typeface="Calibri"/>
-              </a:defRPr>
-            </a:pPr>
-            <a:r>
-              <a:t>Enterprise Logistics Automation Deck — Jack Johnson (12 Slides) · Slide 8 of 12</a:t>
-            </a:r>
-          </a:p>
-        </p:txBody>
-      </p:sp>
-    </p:spTree>
-  </p:cSld>
-  <p:clrMapOvr>
-    <a:masterClrMapping/>
-  </p:clrMapOvr>
-</p:sld>
-</file>
-
-<file path=ppt/slides/slide9.xml><?xml version="1.0" encoding="utf-8"?>
-<p:sld xmlns:a="http://schemas.openxmlformats.org/drawingml/2006/main" xmlns:p="http://schemas.openxmlformats.org/presentationml/2006/main" xmlns:r="http://schemas.openxmlformats.org/officeDocument/2006/relationships">
-  <p:cSld>
-    <p:spTree>
-      <p:nvGrpSpPr>
-        <p:cNvPr id="1" name=""/>
-        <p:cNvGrpSpPr/>
-        <p:nvPr/>
-      </p:nvGrpSpPr>
-      <p:grpSpPr/>
-      <p:sp>
-        <p:nvSpPr>
-          <p:cNvPr id="2" name="Rectangle 1"/>
-          <p:cNvSpPr/>
-          <p:nvPr/>
-        </p:nvSpPr>
-        <p:spPr>
-          <a:xfrm>
-            <a:off x="0" y="0"/>
-            <a:ext cx="12191695" cy="6858000"/>
-          </a:xfrm>
-          <a:prstGeom prst="rect">
-            <a:avLst/>
-          </a:prstGeom>
-          <a:solidFill>
-            <a:srgbClr val="FFFFFF"/>
-          </a:solidFill>
-          <a:ln>
-            <a:noFill/>
-          </a:ln>
-        </p:spPr>
-        <p:style>
-          <a:lnRef idx="1">
-            <a:schemeClr val="accent1"/>
-          </a:lnRef>
-          <a:fillRef idx="3">
-            <a:schemeClr val="accent1"/>
-          </a:fillRef>
-          <a:effectRef idx="2">
-            <a:schemeClr val="accent1"/>
-          </a:effectRef>
-          <a:fontRef idx="minor">
-            <a:schemeClr val="lt1"/>
-          </a:fontRef>
-        </p:style>
-        <p:txBody>
-          <a:bodyPr rtlCol="0" anchor="ctr"/>
-          <a:lstStyle/>
-          <a:p>
-            <a:pPr algn="ctr"/>
-          </a:p>
-        </p:txBody>
-      </p:sp>
-      <p:sp>
-        <p:nvSpPr>
-          <p:cNvPr id="3" name="TextBox 2"/>
-          <p:cNvSpPr txBox="1"/>
-          <p:nvPr/>
-        </p:nvSpPr>
-        <p:spPr>
-          <a:xfrm>
-            <a:off x="731520" y="548640"/>
-            <a:ext cx="10698480" cy="1188720"/>
-          </a:xfrm>
-          <a:prstGeom prst="rect">
-            <a:avLst/>
-          </a:prstGeom>
-          <a:noFill/>
-        </p:spPr>
-        <p:txBody>
-          <a:bodyPr wrap="square">
-            <a:spAutoFit/>
-          </a:bodyPr>
-          <a:lstStyle/>
-          <a:p>
-            <a:pPr>
-              <a:spcAft>
-                <a:spcPts val="400"/>
-              </a:spcAft>
-              <a:defRPr sz="1000" b="1">
-                <a:solidFill>
-                  <a:srgbClr val="2563EB"/>
-                </a:solidFill>
-                <a:latin typeface="Calibri"/>
-              </a:defRPr>
-            </a:pPr>
-            <a:r>
-              <a:t>ENTERPRISE LOGISTICS AUTOMATION DECK — JACK JOHNSO</a:t>
-            </a:r>
-          </a:p>
-          <a:p>
-            <a:pPr>
-              <a:defRPr sz="2200" b="1">
-                <a:solidFill>
-                  <a:srgbClr val="0F172A"/>
-                </a:solidFill>
-                <a:latin typeface="Calibri"/>
-              </a:defRPr>
-            </a:pPr>
-            <a:r>
-              <a:t>Deployment Timeline: Live in 14 Days</a:t>
-            </a:r>
-          </a:p>
-        </p:txBody>
-      </p:sp>
-      <p:sp>
-        <p:nvSpPr>
-          <p:cNvPr id="4" name="Rectangle 3"/>
-          <p:cNvSpPr/>
-          <p:nvPr/>
-        </p:nvSpPr>
-        <p:spPr>
-          <a:xfrm>
-            <a:off x="731520" y="1737360"/>
-            <a:ext cx="10698480" cy="13716"/>
-          </a:xfrm>
-          <a:prstGeom prst="rect">
-            <a:avLst/>
-          </a:prstGeom>
-          <a:solidFill>
-            <a:srgbClr val="E2E8F0"/>
-          </a:solidFill>
-          <a:ln>
-            <a:noFill/>
-          </a:ln>
-        </p:spPr>
-        <p:style>
-          <a:lnRef idx="1">
-            <a:schemeClr val="accent1"/>
-          </a:lnRef>
-          <a:fillRef idx="3">
-            <a:schemeClr val="accent1"/>
-          </a:fillRef>
-          <a:effectRef idx="2">
-            <a:schemeClr val="accent1"/>
-          </a:effectRef>
-          <a:fontRef idx="minor">
-            <a:schemeClr val="lt1"/>
-          </a:fontRef>
-        </p:style>
-        <p:txBody>
-          <a:bodyPr rtlCol="0" anchor="ctr"/>
-          <a:lstStyle/>
-          <a:p>
-            <a:pPr algn="ctr"/>
-          </a:p>
-        </p:txBody>
-      </p:sp>
-      <p:sp>
-        <p:nvSpPr>
-          <p:cNvPr id="5" name="TextBox 4"/>
-          <p:cNvSpPr txBox="1"/>
-          <p:nvPr/>
-        </p:nvSpPr>
-        <p:spPr>
-          <a:xfrm>
-            <a:off x="731520" y="2011680"/>
-            <a:ext cx="10698480" cy="4114800"/>
-          </a:xfrm>
-          <a:prstGeom prst="rect">
-            <a:avLst/>
-          </a:prstGeom>
-          <a:noFill/>
-        </p:spPr>
-        <p:txBody>
-          <a:bodyPr wrap="square">
-            <a:spAutoFit/>
-          </a:bodyPr>
-          <a:lstStyle/>
-          <a:p>
-            <a:pPr>
-              <a:lnSpc>
-                <a:spcPct val="125000"/>
-              </a:lnSpc>
-              <a:spcAft>
-                <a:spcPts val="1400"/>
-              </a:spcAft>
-              <a:defRPr sz="1500">
-                <a:solidFill>
-                  <a:srgbClr val="1E293B"/>
-                </a:solidFill>
-                <a:latin typeface="Calibri"/>
-              </a:defRPr>
-            </a:pPr>
-            <a:r>
-              <a:t>•  Week 1: ERP API credential exchange and dockyard mapping</a:t>
-            </a:r>
-          </a:p>
-          <a:p>
-            <a:pPr>
-              <a:lnSpc>
-                <a:spcPct val="125000"/>
-              </a:lnSpc>
-              <a:spcAft>
-                <a:spcPts val="1400"/>
-              </a:spcAft>
-              <a:defRPr sz="1500">
-                <a:solidFill>
-                  <a:srgbClr val="1E293B"/>
-                </a:solidFill>
-                <a:latin typeface="Calibri"/>
-              </a:defRPr>
-            </a:pPr>
-            <a:r>
-              <a:t>•  Week 2: Frontline dispatcher training and pilot bay rollout</a:t>
-            </a:r>
-          </a:p>
-          <a:p>
-            <a:pPr>
-              <a:lnSpc>
-                <a:spcPct val="125000"/>
-              </a:lnSpc>
-              <a:spcAft>
-                <a:spcPts val="1400"/>
-              </a:spcAft>
-              <a:defRPr sz="1500">
-                <a:solidFill>
-                  <a:srgbClr val="1E293B"/>
-                </a:solidFill>
-                <a:latin typeface="Calibri"/>
-              </a:defRPr>
-            </a:pPr>
-            <a:r>
-              <a:t>•  Day 15: Full facility activation with dedicated implementation engineer</a:t>
-            </a:r>
-          </a:p>
-        </p:txBody>
-      </p:sp>
-      <p:sp>
-        <p:nvSpPr>
-          <p:cNvPr id="6" name="TextBox 5"/>
-          <p:cNvSpPr txBox="1"/>
-          <p:nvPr/>
-        </p:nvSpPr>
-        <p:spPr>
-          <a:xfrm>
-            <a:off x="731520" y="6309360"/>
-            <a:ext cx="10698480" cy="365760"/>
-          </a:xfrm>
-          <a:prstGeom prst="rect">
-            <a:avLst/>
-          </a:prstGeom>
-          <a:noFill/>
-        </p:spPr>
-        <p:txBody>
-          <a:bodyPr wrap="none">
-            <a:spAutoFit/>
-          </a:bodyPr>
-          <a:lstStyle/>
-          <a:p>
-            <a:pPr>
-              <a:defRPr sz="900">
-                <a:solidFill>
-                  <a:srgbClr val="94A3B8"/>
-                </a:solidFill>
-                <a:latin typeface="Calibri"/>
-              </a:defRPr>
-            </a:pPr>
-            <a:r>
-              <a:t>Enterprise Logistics Automation Deck — Jack Johnson (12 Slides) · Slide 9 of 12</a:t>
+              <a:t>DockStream Enterprise — Outbound Logistics Presentation · Slide 5 of 5</a:t>
             </a:r>
           </a:p>
         </p:txBody>
